--- a/public/wedding-mentor-files/S3_Captacao.pptx
+++ b/public/wedding-mentor-files/S3_Captacao.pptx
@@ -2548,7 +2548,7 @@
     <p:bg>
       <p:bgPr>
         <a:solidFill>
-          <a:srgbClr val="0B1D33"/>
+          <a:srgbClr val="F8F6F3"/>
         </a:solidFill>
       </p:bgPr>
     </p:bg>
@@ -2566,60 +2566,40 @@
           <a:chExt cx="0" cy="0"/>
         </a:xfrm>
       </p:grpSpPr>
-      <p:sp>
-        <p:nvSpPr>
-          <p:cNvPr id="2" name="Shape 0"/>
-          <p:cNvSpPr/>
-          <p:nvPr/>
-        </p:nvSpPr>
-        <p:spPr>
-          <a:xfrm>
-            <a:off x="8046720" y="-1645920"/>
-            <a:ext cx="5943600" cy="5943600"/>
-          </a:xfrm>
-          <a:prstGeom prst="ellipse">
-            <a:avLst/>
-          </a:prstGeom>
-          <a:solidFill>
-            <a:srgbClr val="4A9EFF">
-              <a:alpha val="14000"/>
-            </a:srgbClr>
-          </a:solidFill>
-          <a:ln/>
-        </p:spPr>
-      </p:sp>
-      <p:sp>
-        <p:nvSpPr>
-          <p:cNvPr id="3" name="Shape 1"/>
-          <p:cNvSpPr/>
-          <p:nvPr/>
-        </p:nvSpPr>
-        <p:spPr>
-          <a:xfrm>
-            <a:off x="-1828800" y="4389120"/>
-            <a:ext cx="5029200" cy="5029200"/>
-          </a:xfrm>
-          <a:prstGeom prst="ellipse">
-            <a:avLst/>
-          </a:prstGeom>
-          <a:solidFill>
-            <a:srgbClr val="C9A961">
-              <a:alpha val="10000"/>
-            </a:srgbClr>
-          </a:solidFill>
-          <a:ln/>
-        </p:spPr>
-      </p:sp>
-      <p:sp>
-        <p:nvSpPr>
-          <p:cNvPr id="4" name="Text 2"/>
-          <p:cNvSpPr/>
-          <p:nvPr/>
-        </p:nvSpPr>
-        <p:spPr>
-          <a:xfrm>
-            <a:off x="640080" y="548640"/>
-            <a:ext cx="7315200" cy="365760"/>
+      <p:pic>
+        <p:nvPicPr>
+          <p:cNvPr id="2" name="Image 0" descr="preencoded.png">    </p:cNvPr>
+          <p:cNvPicPr>
+            <a:picLocks noChangeAspect="1"/>
+          </p:cNvPicPr>
+          <p:nvPr/>
+        </p:nvPicPr>
+        <p:blipFill>
+          <a:blip r:embed="rId1"/>
+          <a:stretch>
+            <a:fillRect/>
+          </a:stretch>
+        </p:blipFill>
+        <p:spPr>
+          <a:xfrm>
+            <a:off x="603504" y="457200"/>
+            <a:ext cx="1371600" cy="1415143"/>
+          </a:xfrm>
+          <a:prstGeom prst="rect">
+            <a:avLst/>
+          </a:prstGeom>
+        </p:spPr>
+      </p:pic>
+      <p:sp>
+        <p:nvSpPr>
+          <p:cNvPr id="3" name="Text 0"/>
+          <p:cNvSpPr/>
+          <p:nvPr/>
+        </p:nvSpPr>
+        <p:spPr>
+          <a:xfrm>
+            <a:off x="640080" y="2286000"/>
+            <a:ext cx="5486400" cy="457200"/>
           </a:xfrm>
           <a:prstGeom prst="rect">
             <a:avLst/>
@@ -2635,53 +2615,14 @@
               <a:buNone/>
             </a:pPr>
             <a:r>
-              <a:rPr lang="en-US" sz="1300" b="1" spc="500" kern="0" dirty="0">
-                <a:solidFill>
-                  <a:srgbClr val="9FB2C9"/>
+              <a:rPr lang="en-US" sz="1500" b="1" spc="600" kern="0" dirty="0">
+                <a:solidFill>
+                  <a:srgbClr val="B1937E"/>
                 </a:solidFill>
                 <a:latin typeface="Calibri" pitchFamily="34" charset="0"/>
                 <a:ea typeface="Calibri" pitchFamily="34" charset="-122"/>
                 <a:cs typeface="Calibri" pitchFamily="34" charset="-120"/>
               </a:rPr>
-              <a:t>MENTORIA · RL</a:t>
-            </a:r>
-            <a:endParaRPr lang="en-US" sz="1300" dirty="0"/>
-          </a:p>
-        </p:txBody>
-      </p:sp>
-      <p:sp>
-        <p:nvSpPr>
-          <p:cNvPr id="5" name="Text 3"/>
-          <p:cNvSpPr/>
-          <p:nvPr/>
-        </p:nvSpPr>
-        <p:spPr>
-          <a:xfrm>
-            <a:off x="640080" y="2286000"/>
-            <a:ext cx="5486400" cy="457200"/>
-          </a:xfrm>
-          <a:prstGeom prst="rect">
-            <a:avLst/>
-          </a:prstGeom>
-          <a:noFill/>
-          <a:ln/>
-        </p:spPr>
-        <p:txBody>
-          <a:bodyPr wrap="square" lIns="0" tIns="0" rIns="0" bIns="0" rtlCol="0" anchor="ctr"/>
-          <a:lstStyle/>
-          <a:p>
-            <a:pPr indent="0" marL="0">
-              <a:buNone/>
-            </a:pPr>
-            <a:r>
-              <a:rPr lang="en-US" sz="1500" b="1" spc="600" kern="0" dirty="0">
-                <a:solidFill>
-                  <a:srgbClr val="C9A961"/>
-                </a:solidFill>
-                <a:latin typeface="Calibri" pitchFamily="34" charset="0"/>
-                <a:ea typeface="Calibri" pitchFamily="34" charset="-122"/>
-                <a:cs typeface="Calibri" pitchFamily="34" charset="-120"/>
-              </a:rPr>
               <a:t>SESSÃO 03</a:t>
             </a:r>
             <a:endParaRPr lang="en-US" sz="1500" dirty="0"/>
@@ -2690,7 +2631,7 @@
       </p:sp>
       <p:sp>
         <p:nvSpPr>
-          <p:cNvPr id="6" name="Text 4"/>
+          <p:cNvPr id="4" name="Text 1"/>
           <p:cNvSpPr/>
           <p:nvPr/>
         </p:nvSpPr>
@@ -2716,17 +2657,17 @@
               <a:buNone/>
             </a:pPr>
             <a:r>
-              <a:rPr lang="en-US" sz="5000" b="1" dirty="0">
-                <a:solidFill>
-                  <a:srgbClr val="EAF1FA"/>
-                </a:solidFill>
-                <a:latin typeface="Bookman Old Style" pitchFamily="34" charset="0"/>
-                <a:ea typeface="Bookman Old Style" pitchFamily="34" charset="-122"/>
-                <a:cs typeface="Bookman Old Style" pitchFamily="34" charset="-120"/>
+              <a:rPr lang="en-US" sz="4400" b="1" dirty="0">
+                <a:solidFill>
+                  <a:srgbClr val="33302B"/>
+                </a:solidFill>
+                <a:latin typeface="Georgia" pitchFamily="34" charset="0"/>
+                <a:ea typeface="Georgia" pitchFamily="34" charset="-122"/>
+                <a:cs typeface="Georgia" pitchFamily="34" charset="-120"/>
               </a:rPr>
               <a:t>Captação e</a:t>
             </a:r>
-            <a:endParaRPr lang="en-US" sz="5000" dirty="0"/>
+            <a:endParaRPr lang="en-US" sz="4400" dirty="0"/>
           </a:p>
           <a:p>
             <a:pPr indent="0" marL="0">
@@ -2736,23 +2677,23 @@
               <a:buNone/>
             </a:pPr>
             <a:r>
-              <a:rPr lang="en-US" sz="5000" b="1" dirty="0">
-                <a:solidFill>
-                  <a:srgbClr val="EAF1FA"/>
-                </a:solidFill>
-                <a:latin typeface="Bookman Old Style" pitchFamily="34" charset="0"/>
-                <a:ea typeface="Bookman Old Style" pitchFamily="34" charset="-122"/>
-                <a:cs typeface="Bookman Old Style" pitchFamily="34" charset="-120"/>
+              <a:rPr lang="en-US" sz="4400" b="1" dirty="0">
+                <a:solidFill>
+                  <a:srgbClr val="33302B"/>
+                </a:solidFill>
+                <a:latin typeface="Georgia" pitchFamily="34" charset="0"/>
+                <a:ea typeface="Georgia" pitchFamily="34" charset="-122"/>
+                <a:cs typeface="Georgia" pitchFamily="34" charset="-120"/>
               </a:rPr>
               <a:t>Qualificação do Lead</a:t>
             </a:r>
-            <a:endParaRPr lang="en-US" sz="5000" dirty="0"/>
-          </a:p>
-        </p:txBody>
-      </p:sp>
-      <p:sp>
-        <p:nvSpPr>
-          <p:cNvPr id="7" name="Text 5"/>
+            <a:endParaRPr lang="en-US" sz="4400" dirty="0"/>
+          </a:p>
+        </p:txBody>
+      </p:sp>
+      <p:sp>
+        <p:nvSpPr>
+          <p:cNvPr id="5" name="Text 2"/>
           <p:cNvSpPr/>
           <p:nvPr/>
         </p:nvSpPr>
@@ -2777,7 +2718,7 @@
             <a:r>
               <a:rPr lang="en-US" sz="1700" dirty="0">
                 <a:solidFill>
-                  <a:srgbClr val="9FB2C9"/>
+                  <a:srgbClr val="8A7E72"/>
                 </a:solidFill>
                 <a:latin typeface="Calibri" pitchFamily="34" charset="0"/>
                 <a:ea typeface="Calibri" pitchFamily="34" charset="-122"/>
@@ -2791,7 +2732,7 @@
       </p:sp>
       <p:sp>
         <p:nvSpPr>
-          <p:cNvPr id="8" name="Text 6"/>
+          <p:cNvPr id="6" name="Text 3"/>
           <p:cNvSpPr/>
           <p:nvPr/>
         </p:nvSpPr>
@@ -2816,11 +2757,11 @@
             <a:r>
               <a:rPr lang="en-US" sz="12000" b="1" dirty="0">
                 <a:solidFill>
-                  <a:srgbClr val="16314F"/>
-                </a:solidFill>
-                <a:latin typeface="Bookman Old Style" pitchFamily="34" charset="0"/>
-                <a:ea typeface="Bookman Old Style" pitchFamily="34" charset="-122"/>
-                <a:cs typeface="Bookman Old Style" pitchFamily="34" charset="-120"/>
+                  <a:srgbClr val="EADFD0"/>
+                </a:solidFill>
+                <a:latin typeface="Georgia" pitchFamily="34" charset="0"/>
+                <a:ea typeface="Georgia" pitchFamily="34" charset="-122"/>
+                <a:cs typeface="Georgia" pitchFamily="34" charset="-120"/>
               </a:rPr>
               <a:t>03</a:t>
             </a:r>
@@ -2830,7 +2771,7 @@
       </p:sp>
       <p:sp>
         <p:nvSpPr>
-          <p:cNvPr id="9" name="Shape 7"/>
+          <p:cNvPr id="7" name="Shape 4"/>
           <p:cNvSpPr/>
           <p:nvPr/>
         </p:nvSpPr>
@@ -2845,7 +2786,7 @@
           <a:noFill/>
           <a:ln w="31750">
             <a:solidFill>
-              <a:srgbClr val="C9A961"/>
+              <a:srgbClr val="B1937E"/>
             </a:solidFill>
             <a:prstDash val="solid"/>
           </a:ln>
@@ -2865,7 +2806,7 @@
     <p:bg>
       <p:bgPr>
         <a:solidFill>
-          <a:srgbClr val="0B1D33"/>
+          <a:srgbClr val="F8F6F3"/>
         </a:solidFill>
       </p:bgPr>
     </p:bg>
@@ -2910,7 +2851,7 @@
             <a:r>
               <a:rPr lang="en-US" sz="1200" b="1" spc="300" kern="0" dirty="0">
                 <a:solidFill>
-                  <a:srgbClr val="4A9EFF"/>
+                  <a:srgbClr val="9A7B66"/>
                 </a:solidFill>
                 <a:latin typeface="Calibri" pitchFamily="34" charset="0"/>
                 <a:ea typeface="Calibri" pitchFamily="34" charset="-122"/>
@@ -2952,11 +2893,11 @@
             <a:r>
               <a:rPr lang="en-US" sz="3200" b="1" dirty="0">
                 <a:solidFill>
-                  <a:srgbClr val="EAF1FA"/>
-                </a:solidFill>
-                <a:latin typeface="Bookman Old Style" pitchFamily="34" charset="0"/>
-                <a:ea typeface="Bookman Old Style" pitchFamily="34" charset="-122"/>
-                <a:cs typeface="Bookman Old Style" pitchFamily="34" charset="-120"/>
+                  <a:srgbClr val="33302B"/>
+                </a:solidFill>
+                <a:latin typeface="Georgia" pitchFamily="34" charset="0"/>
+                <a:ea typeface="Georgia" pitchFamily="34" charset="-122"/>
+                <a:cs typeface="Georgia" pitchFamily="34" charset="-120"/>
               </a:rPr>
               <a:t>Nem todo o lead merece reunião</a:t>
             </a:r>
@@ -2981,13 +2922,18 @@
             </a:avLst>
           </a:prstGeom>
           <a:solidFill>
-            <a:srgbClr val="13283F"/>
+            <a:srgbClr val="FFFFFF"/>
           </a:solidFill>
-          <a:ln/>
+          <a:ln w="12700">
+            <a:solidFill>
+              <a:srgbClr val="E3D9CC"/>
+            </a:solidFill>
+            <a:prstDash val="solid"/>
+          </a:ln>
           <a:effectLst>
-            <a:outerShdw sx="100000" sy="100000" kx="0" ky="0" algn="bl" rotWithShape="0" blurRad="127000" dist="38100" dir="5400000">
-              <a:srgbClr val="000000">
-                <a:alpha val="28000"/>
+            <a:outerShdw sx="100000" sy="100000" kx="0" ky="0" algn="bl" rotWithShape="0" blurRad="114300" dist="38100" dir="5400000">
+              <a:srgbClr val="7A6A55">
+                <a:alpha val="12000"/>
               </a:srgbClr>
             </a:outerShdw>
           </a:effectLst>
@@ -3008,9 +2954,14 @@
             <a:avLst/>
           </a:prstGeom>
           <a:solidFill>
-            <a:srgbClr val="16314F"/>
+            <a:srgbClr val="EADFD0"/>
           </a:solidFill>
-          <a:ln/>
+          <a:ln w="9525">
+            <a:solidFill>
+              <a:srgbClr val="E3D9CC"/>
+            </a:solidFill>
+            <a:prstDash val="solid"/>
+          </a:ln>
         </p:spPr>
       </p:sp>
       <p:pic>
@@ -3064,11 +3015,11 @@
             <a:r>
               <a:rPr lang="en-US" sz="1900" b="1" dirty="0">
                 <a:solidFill>
-                  <a:srgbClr val="C9A961"/>
-                </a:solidFill>
-                <a:latin typeface="Bookman Old Style" pitchFamily="34" charset="0"/>
-                <a:ea typeface="Bookman Old Style" pitchFamily="34" charset="-122"/>
-                <a:cs typeface="Bookman Old Style" pitchFamily="34" charset="-120"/>
+                  <a:srgbClr val="B1937E"/>
+                </a:solidFill>
+                <a:latin typeface="Georgia" pitchFamily="34" charset="0"/>
+                <a:ea typeface="Georgia" pitchFamily="34" charset="-122"/>
+                <a:cs typeface="Georgia" pitchFamily="34" charset="-120"/>
               </a:rPr>
               <a:t>Data</a:t>
             </a:r>
@@ -3103,7 +3054,7 @@
             <a:r>
               <a:rPr lang="en-US" sz="1400" dirty="0">
                 <a:solidFill>
-                  <a:srgbClr val="9FB2C9"/>
+                  <a:srgbClr val="8A7E72"/>
                 </a:solidFill>
                 <a:latin typeface="Calibri" pitchFamily="34" charset="0"/>
                 <a:ea typeface="Calibri" pitchFamily="34" charset="-122"/>
@@ -3132,13 +3083,18 @@
             </a:avLst>
           </a:prstGeom>
           <a:solidFill>
-            <a:srgbClr val="13283F"/>
+            <a:srgbClr val="FFFFFF"/>
           </a:solidFill>
-          <a:ln/>
+          <a:ln w="12700">
+            <a:solidFill>
+              <a:srgbClr val="E3D9CC"/>
+            </a:solidFill>
+            <a:prstDash val="solid"/>
+          </a:ln>
           <a:effectLst>
-            <a:outerShdw sx="100000" sy="100000" kx="0" ky="0" algn="bl" rotWithShape="0" blurRad="127000" dist="38100" dir="5400000">
-              <a:srgbClr val="000000">
-                <a:alpha val="28000"/>
+            <a:outerShdw sx="100000" sy="100000" kx="0" ky="0" algn="bl" rotWithShape="0" blurRad="114300" dist="38100" dir="5400000">
+              <a:srgbClr val="7A6A55">
+                <a:alpha val="12000"/>
               </a:srgbClr>
             </a:outerShdw>
           </a:effectLst>
@@ -3159,9 +3115,14 @@
             <a:avLst/>
           </a:prstGeom>
           <a:solidFill>
-            <a:srgbClr val="16314F"/>
+            <a:srgbClr val="EADFD0"/>
           </a:solidFill>
-          <a:ln/>
+          <a:ln w="9525">
+            <a:solidFill>
+              <a:srgbClr val="E3D9CC"/>
+            </a:solidFill>
+            <a:prstDash val="solid"/>
+          </a:ln>
         </p:spPr>
       </p:sp>
       <p:pic>
@@ -3215,11 +3176,11 @@
             <a:r>
               <a:rPr lang="en-US" sz="1900" b="1" dirty="0">
                 <a:solidFill>
-                  <a:srgbClr val="C9A961"/>
-                </a:solidFill>
-                <a:latin typeface="Bookman Old Style" pitchFamily="34" charset="0"/>
-                <a:ea typeface="Bookman Old Style" pitchFamily="34" charset="-122"/>
-                <a:cs typeface="Bookman Old Style" pitchFamily="34" charset="-120"/>
+                  <a:srgbClr val="B1937E"/>
+                </a:solidFill>
+                <a:latin typeface="Georgia" pitchFamily="34" charset="0"/>
+                <a:ea typeface="Georgia" pitchFamily="34" charset="-122"/>
+                <a:cs typeface="Georgia" pitchFamily="34" charset="-120"/>
               </a:rPr>
               <a:t>Orçamento</a:t>
             </a:r>
@@ -3254,7 +3215,7 @@
             <a:r>
               <a:rPr lang="en-US" sz="1400" dirty="0">
                 <a:solidFill>
-                  <a:srgbClr val="9FB2C9"/>
+                  <a:srgbClr val="8A7E72"/>
                 </a:solidFill>
                 <a:latin typeface="Calibri" pitchFamily="34" charset="0"/>
                 <a:ea typeface="Calibri" pitchFamily="34" charset="-122"/>
@@ -3283,13 +3244,18 @@
             </a:avLst>
           </a:prstGeom>
           <a:solidFill>
-            <a:srgbClr val="13283F"/>
+            <a:srgbClr val="FFFFFF"/>
           </a:solidFill>
-          <a:ln/>
+          <a:ln w="12700">
+            <a:solidFill>
+              <a:srgbClr val="E3D9CC"/>
+            </a:solidFill>
+            <a:prstDash val="solid"/>
+          </a:ln>
           <a:effectLst>
-            <a:outerShdw sx="100000" sy="100000" kx="0" ky="0" algn="bl" rotWithShape="0" blurRad="127000" dist="38100" dir="5400000">
-              <a:srgbClr val="000000">
-                <a:alpha val="28000"/>
+            <a:outerShdw sx="100000" sy="100000" kx="0" ky="0" algn="bl" rotWithShape="0" blurRad="114300" dist="38100" dir="5400000">
+              <a:srgbClr val="7A6A55">
+                <a:alpha val="12000"/>
               </a:srgbClr>
             </a:outerShdw>
           </a:effectLst>
@@ -3310,9 +3276,14 @@
             <a:avLst/>
           </a:prstGeom>
           <a:solidFill>
-            <a:srgbClr val="16314F"/>
+            <a:srgbClr val="EADFD0"/>
           </a:solidFill>
-          <a:ln/>
+          <a:ln w="9525">
+            <a:solidFill>
+              <a:srgbClr val="E3D9CC"/>
+            </a:solidFill>
+            <a:prstDash val="solid"/>
+          </a:ln>
         </p:spPr>
       </p:sp>
       <p:pic>
@@ -3366,11 +3337,11 @@
             <a:r>
               <a:rPr lang="en-US" sz="1900" b="1" dirty="0">
                 <a:solidFill>
-                  <a:srgbClr val="C9A961"/>
-                </a:solidFill>
-                <a:latin typeface="Bookman Old Style" pitchFamily="34" charset="0"/>
-                <a:ea typeface="Bookman Old Style" pitchFamily="34" charset="-122"/>
-                <a:cs typeface="Bookman Old Style" pitchFamily="34" charset="-120"/>
+                  <a:srgbClr val="B1937E"/>
+                </a:solidFill>
+                <a:latin typeface="Georgia" pitchFamily="34" charset="0"/>
+                <a:ea typeface="Georgia" pitchFamily="34" charset="-122"/>
+                <a:cs typeface="Georgia" pitchFamily="34" charset="-120"/>
               </a:rPr>
               <a:t>Fit</a:t>
             </a:r>
@@ -3405,7 +3376,7 @@
             <a:r>
               <a:rPr lang="en-US" sz="1400" dirty="0">
                 <a:solidFill>
-                  <a:srgbClr val="9FB2C9"/>
+                  <a:srgbClr val="8A7E72"/>
                 </a:solidFill>
                 <a:latin typeface="Calibri" pitchFamily="34" charset="0"/>
                 <a:ea typeface="Calibri" pitchFamily="34" charset="-122"/>
@@ -3434,7 +3405,7 @@
           <a:noFill/>
           <a:ln w="9525">
             <a:solidFill>
-              <a:srgbClr val="5C708A">
+              <a:srgbClr val="A89A86">
                 <a:alpha val="60000"/>
               </a:srgbClr>
             </a:solidFill>
@@ -3469,7 +3440,7 @@
             <a:r>
               <a:rPr lang="en-US" sz="900" dirty="0">
                 <a:solidFill>
-                  <a:srgbClr val="5C708A"/>
+                  <a:srgbClr val="A89A86"/>
                 </a:solidFill>
                 <a:latin typeface="Calibri" pitchFamily="34" charset="0"/>
                 <a:ea typeface="Calibri" pitchFamily="34" charset="-122"/>
@@ -3508,7 +3479,7 @@
             <a:r>
               <a:rPr lang="en-US" sz="900" dirty="0">
                 <a:solidFill>
-                  <a:srgbClr val="5C708A"/>
+                  <a:srgbClr val="A89A86"/>
                 </a:solidFill>
                 <a:latin typeface="Calibri" pitchFamily="34" charset="0"/>
                 <a:ea typeface="Calibri" pitchFamily="34" charset="-122"/>
@@ -3534,7 +3505,7 @@
     <p:bg>
       <p:bgPr>
         <a:solidFill>
-          <a:srgbClr val="0B1D33"/>
+          <a:srgbClr val="F8F6F3"/>
         </a:solidFill>
       </p:bgPr>
     </p:bg>
@@ -3579,7 +3550,7 @@
             <a:r>
               <a:rPr lang="en-US" sz="1200" b="1" spc="300" kern="0" dirty="0">
                 <a:solidFill>
-                  <a:srgbClr val="4A9EFF"/>
+                  <a:srgbClr val="9A7B66"/>
                 </a:solidFill>
                 <a:latin typeface="Calibri" pitchFamily="34" charset="0"/>
                 <a:ea typeface="Calibri" pitchFamily="34" charset="-122"/>
@@ -3621,11 +3592,11 @@
             <a:r>
               <a:rPr lang="en-US" sz="3000" b="1" dirty="0">
                 <a:solidFill>
-                  <a:srgbClr val="EAF1FA"/>
-                </a:solidFill>
-                <a:latin typeface="Bookman Old Style" pitchFamily="34" charset="0"/>
-                <a:ea typeface="Bookman Old Style" pitchFamily="34" charset="-122"/>
-                <a:cs typeface="Bookman Old Style" pitchFamily="34" charset="-120"/>
+                  <a:srgbClr val="33302B"/>
+                </a:solidFill>
+                <a:latin typeface="Georgia" pitchFamily="34" charset="0"/>
+                <a:ea typeface="Georgia" pitchFamily="34" charset="-122"/>
+                <a:cs typeface="Georgia" pitchFamily="34" charset="-120"/>
               </a:rPr>
               <a:t>Como qualificar com elegância</a:t>
             </a:r>
@@ -3650,13 +3621,18 @@
             </a:avLst>
           </a:prstGeom>
           <a:solidFill>
-            <a:srgbClr val="13283F"/>
+            <a:srgbClr val="FFFFFF"/>
           </a:solidFill>
-          <a:ln/>
+          <a:ln w="12700">
+            <a:solidFill>
+              <a:srgbClr val="E3D9CC"/>
+            </a:solidFill>
+            <a:prstDash val="solid"/>
+          </a:ln>
           <a:effectLst>
-            <a:outerShdw sx="100000" sy="100000" kx="0" ky="0" algn="bl" rotWithShape="0" blurRad="127000" dist="38100" dir="5400000">
-              <a:srgbClr val="000000">
-                <a:alpha val="28000"/>
+            <a:outerShdw sx="100000" sy="100000" kx="0" ky="0" algn="bl" rotWithShape="0" blurRad="114300" dist="38100" dir="5400000">
+              <a:srgbClr val="7A6A55">
+                <a:alpha val="12000"/>
               </a:srgbClr>
             </a:outerShdw>
           </a:effectLst>
@@ -3677,9 +3653,14 @@
             <a:avLst/>
           </a:prstGeom>
           <a:solidFill>
-            <a:srgbClr val="16314F"/>
+            <a:srgbClr val="EADFD0"/>
           </a:solidFill>
-          <a:ln/>
+          <a:ln w="9525">
+            <a:solidFill>
+              <a:srgbClr val="E3D9CC"/>
+            </a:solidFill>
+            <a:prstDash val="solid"/>
+          </a:ln>
         </p:spPr>
       </p:sp>
       <p:pic>
@@ -3733,11 +3714,11 @@
             <a:r>
               <a:rPr lang="en-US" sz="1700" b="1" dirty="0">
                 <a:solidFill>
-                  <a:srgbClr val="EAF1FA"/>
-                </a:solidFill>
-                <a:latin typeface="Bookman Old Style" pitchFamily="34" charset="0"/>
-                <a:ea typeface="Bookman Old Style" pitchFamily="34" charset="-122"/>
-                <a:cs typeface="Bookman Old Style" pitchFamily="34" charset="-120"/>
+                  <a:srgbClr val="33302B"/>
+                </a:solidFill>
+                <a:latin typeface="Georgia" pitchFamily="34" charset="0"/>
+                <a:ea typeface="Georgia" pitchFamily="34" charset="-122"/>
+                <a:cs typeface="Georgia" pitchFamily="34" charset="-120"/>
               </a:rPr>
               <a:t>Pergunta aberta</a:t>
             </a:r>
@@ -3772,7 +3753,7 @@
             <a:r>
               <a:rPr lang="en-US" sz="1250" dirty="0">
                 <a:solidFill>
-                  <a:srgbClr val="9FB2C9"/>
+                  <a:srgbClr val="8A7E72"/>
                 </a:solidFill>
                 <a:latin typeface="Calibri" pitchFamily="34" charset="0"/>
                 <a:ea typeface="Calibri" pitchFamily="34" charset="-122"/>
@@ -3825,13 +3806,18 @@
             </a:avLst>
           </a:prstGeom>
           <a:solidFill>
-            <a:srgbClr val="13283F"/>
+            <a:srgbClr val="FFFFFF"/>
           </a:solidFill>
-          <a:ln/>
+          <a:ln w="12700">
+            <a:solidFill>
+              <a:srgbClr val="E3D9CC"/>
+            </a:solidFill>
+            <a:prstDash val="solid"/>
+          </a:ln>
           <a:effectLst>
-            <a:outerShdw sx="100000" sy="100000" kx="0" ky="0" algn="bl" rotWithShape="0" blurRad="127000" dist="38100" dir="5400000">
-              <a:srgbClr val="000000">
-                <a:alpha val="28000"/>
+            <a:outerShdw sx="100000" sy="100000" kx="0" ky="0" algn="bl" rotWithShape="0" blurRad="114300" dist="38100" dir="5400000">
+              <a:srgbClr val="7A6A55">
+                <a:alpha val="12000"/>
               </a:srgbClr>
             </a:outerShdw>
           </a:effectLst>
@@ -3852,9 +3838,14 @@
             <a:avLst/>
           </a:prstGeom>
           <a:solidFill>
-            <a:srgbClr val="16314F"/>
+            <a:srgbClr val="EADFD0"/>
           </a:solidFill>
-          <a:ln/>
+          <a:ln w="9525">
+            <a:solidFill>
+              <a:srgbClr val="E3D9CC"/>
+            </a:solidFill>
+            <a:prstDash val="solid"/>
+          </a:ln>
         </p:spPr>
       </p:sp>
       <p:pic>
@@ -3908,11 +3899,11 @@
             <a:r>
               <a:rPr lang="en-US" sz="1700" b="1" dirty="0">
                 <a:solidFill>
-                  <a:srgbClr val="EAF1FA"/>
-                </a:solidFill>
-                <a:latin typeface="Bookman Old Style" pitchFamily="34" charset="0"/>
-                <a:ea typeface="Bookman Old Style" pitchFamily="34" charset="-122"/>
-                <a:cs typeface="Bookman Old Style" pitchFamily="34" charset="-120"/>
+                  <a:srgbClr val="33302B"/>
+                </a:solidFill>
+                <a:latin typeface="Georgia" pitchFamily="34" charset="0"/>
+                <a:ea typeface="Georgia" pitchFamily="34" charset="-122"/>
+                <a:cs typeface="Georgia" pitchFamily="34" charset="-120"/>
               </a:rPr>
               <a:t>Lê os sinais</a:t>
             </a:r>
@@ -3947,7 +3938,7 @@
             <a:r>
               <a:rPr lang="en-US" sz="1250" dirty="0">
                 <a:solidFill>
-                  <a:srgbClr val="9FB2C9"/>
+                  <a:srgbClr val="8A7E72"/>
                 </a:solidFill>
                 <a:latin typeface="Calibri" pitchFamily="34" charset="0"/>
                 <a:ea typeface="Calibri" pitchFamily="34" charset="-122"/>
@@ -4000,13 +3991,18 @@
             </a:avLst>
           </a:prstGeom>
           <a:solidFill>
-            <a:srgbClr val="13283F"/>
+            <a:srgbClr val="FFFFFF"/>
           </a:solidFill>
-          <a:ln/>
+          <a:ln w="12700">
+            <a:solidFill>
+              <a:srgbClr val="E3D9CC"/>
+            </a:solidFill>
+            <a:prstDash val="solid"/>
+          </a:ln>
           <a:effectLst>
-            <a:outerShdw sx="100000" sy="100000" kx="0" ky="0" algn="bl" rotWithShape="0" blurRad="127000" dist="38100" dir="5400000">
-              <a:srgbClr val="000000">
-                <a:alpha val="28000"/>
+            <a:outerShdw sx="100000" sy="100000" kx="0" ky="0" algn="bl" rotWithShape="0" blurRad="114300" dist="38100" dir="5400000">
+              <a:srgbClr val="7A6A55">
+                <a:alpha val="12000"/>
               </a:srgbClr>
             </a:outerShdw>
           </a:effectLst>
@@ -4027,9 +4023,14 @@
             <a:avLst/>
           </a:prstGeom>
           <a:solidFill>
-            <a:srgbClr val="16314F"/>
+            <a:srgbClr val="EADFD0"/>
           </a:solidFill>
-          <a:ln/>
+          <a:ln w="9525">
+            <a:solidFill>
+              <a:srgbClr val="E3D9CC"/>
+            </a:solidFill>
+            <a:prstDash val="solid"/>
+          </a:ln>
         </p:spPr>
       </p:sp>
       <p:pic>
@@ -4083,11 +4084,11 @@
             <a:r>
               <a:rPr lang="en-US" sz="1700" b="1" dirty="0">
                 <a:solidFill>
-                  <a:srgbClr val="EAF1FA"/>
-                </a:solidFill>
-                <a:latin typeface="Bookman Old Style" pitchFamily="34" charset="0"/>
-                <a:ea typeface="Bookman Old Style" pitchFamily="34" charset="-122"/>
-                <a:cs typeface="Bookman Old Style" pitchFamily="34" charset="-120"/>
+                  <a:srgbClr val="33302B"/>
+                </a:solidFill>
+                <a:latin typeface="Georgia" pitchFamily="34" charset="0"/>
+                <a:ea typeface="Georgia" pitchFamily="34" charset="-122"/>
+                <a:cs typeface="Georgia" pitchFamily="34" charset="-120"/>
               </a:rPr>
               <a:t>Decide o passo</a:t>
             </a:r>
@@ -4122,7 +4123,7 @@
             <a:r>
               <a:rPr lang="en-US" sz="1250" dirty="0">
                 <a:solidFill>
-                  <a:srgbClr val="9FB2C9"/>
+                  <a:srgbClr val="8A7E72"/>
                 </a:solidFill>
                 <a:latin typeface="Calibri" pitchFamily="34" charset="0"/>
                 <a:ea typeface="Calibri" pitchFamily="34" charset="-122"/>
@@ -4161,7 +4162,7 @@
             <a:r>
               <a:rPr lang="en-US" sz="1500" i="1" dirty="0">
                 <a:solidFill>
-                  <a:srgbClr val="C9A961"/>
+                  <a:srgbClr val="B1937E"/>
                 </a:solidFill>
                 <a:latin typeface="Calibri" pitchFamily="34" charset="0"/>
                 <a:ea typeface="Calibri" pitchFamily="34" charset="-122"/>
@@ -4190,7 +4191,7 @@
           <a:noFill/>
           <a:ln w="9525">
             <a:solidFill>
-              <a:srgbClr val="5C708A">
+              <a:srgbClr val="A89A86">
                 <a:alpha val="60000"/>
               </a:srgbClr>
             </a:solidFill>
@@ -4225,7 +4226,7 @@
             <a:r>
               <a:rPr lang="en-US" sz="900" dirty="0">
                 <a:solidFill>
-                  <a:srgbClr val="5C708A"/>
+                  <a:srgbClr val="A89A86"/>
                 </a:solidFill>
                 <a:latin typeface="Calibri" pitchFamily="34" charset="0"/>
                 <a:ea typeface="Calibri" pitchFamily="34" charset="-122"/>
@@ -4264,7 +4265,7 @@
             <a:r>
               <a:rPr lang="en-US" sz="900" dirty="0">
                 <a:solidFill>
-                  <a:srgbClr val="5C708A"/>
+                  <a:srgbClr val="A89A86"/>
                 </a:solidFill>
                 <a:latin typeface="Calibri" pitchFamily="34" charset="0"/>
                 <a:ea typeface="Calibri" pitchFamily="34" charset="-122"/>
@@ -4290,7 +4291,7 @@
     <p:bg>
       <p:bgPr>
         <a:solidFill>
-          <a:srgbClr val="102844"/>
+          <a:srgbClr val="EFE7DE"/>
         </a:solidFill>
       </p:bgPr>
     </p:bg>
@@ -4335,7 +4336,7 @@
             <a:r>
               <a:rPr lang="en-US" sz="1200" b="1" spc="300" kern="0" dirty="0">
                 <a:solidFill>
-                  <a:srgbClr val="C9A961"/>
+                  <a:srgbClr val="B1937E"/>
                 </a:solidFill>
                 <a:latin typeface="Calibri" pitchFamily="34" charset="0"/>
                 <a:ea typeface="Calibri" pitchFamily="34" charset="-122"/>
@@ -4377,11 +4378,11 @@
             <a:r>
               <a:rPr lang="en-US" sz="3400" b="1" dirty="0">
                 <a:solidFill>
-                  <a:srgbClr val="EAF1FA"/>
-                </a:solidFill>
-                <a:latin typeface="Bookman Old Style" pitchFamily="34" charset="0"/>
-                <a:ea typeface="Bookman Old Style" pitchFamily="34" charset="-122"/>
-                <a:cs typeface="Bookman Old Style" pitchFamily="34" charset="-120"/>
+                  <a:srgbClr val="33302B"/>
+                </a:solidFill>
+                <a:latin typeface="Georgia" pitchFamily="34" charset="0"/>
+                <a:ea typeface="Georgia" pitchFamily="34" charset="-122"/>
+                <a:cs typeface="Georgia" pitchFamily="34" charset="-120"/>
               </a:rPr>
               <a:t>Lead bem vs. mal qualificado</a:t>
             </a:r>
@@ -4406,20 +4407,20 @@
             </a:avLst>
           </a:prstGeom>
           <a:solidFill>
-            <a:srgbClr val="13283F"/>
+            <a:srgbClr val="FFFFFF"/>
           </a:solidFill>
           <a:ln w="9525">
             <a:solidFill>
-              <a:srgbClr val="9FB2C9">
+              <a:srgbClr val="8A7E72">
                 <a:alpha val="50000"/>
               </a:srgbClr>
             </a:solidFill>
             <a:prstDash val="solid"/>
           </a:ln>
           <a:effectLst>
-            <a:outerShdw sx="100000" sy="100000" kx="0" ky="0" algn="bl" rotWithShape="0" blurRad="127000" dist="38100" dir="5400000">
-              <a:srgbClr val="000000">
-                <a:alpha val="28000"/>
+            <a:outerShdw sx="100000" sy="100000" kx="0" ky="0" algn="bl" rotWithShape="0" blurRad="114300" dist="38100" dir="5400000">
+              <a:srgbClr val="7A6A55">
+                <a:alpha val="12000"/>
               </a:srgbClr>
             </a:outerShdw>
           </a:effectLst>
@@ -4452,7 +4453,7 @@
             <a:r>
               <a:rPr lang="en-US" sz="1300" b="1" spc="300" kern="0" dirty="0">
                 <a:solidFill>
-                  <a:srgbClr val="9FB2C9"/>
+                  <a:srgbClr val="8A7E72"/>
                 </a:solidFill>
                 <a:latin typeface="Calibri" pitchFamily="34" charset="0"/>
                 <a:ea typeface="Calibri" pitchFamily="34" charset="-122"/>
@@ -4494,7 +4495,7 @@
             <a:r>
               <a:rPr lang="en-US" sz="1600" b="1" dirty="0">
                 <a:solidFill>
-                  <a:srgbClr val="9FB2C9"/>
+                  <a:srgbClr val="8A7E72"/>
                 </a:solidFill>
                 <a:latin typeface="Calibri" pitchFamily="34" charset="0"/>
                 <a:ea typeface="Calibri" pitchFamily="34" charset="-122"/>
@@ -4514,7 +4515,7 @@
             <a:r>
               <a:rPr lang="en-US" sz="1500" dirty="0">
                 <a:solidFill>
-                  <a:srgbClr val="9FB2C9"/>
+                  <a:srgbClr val="8A7E72"/>
                 </a:solidFill>
                 <a:latin typeface="Calibri" pitchFamily="34" charset="0"/>
                 <a:ea typeface="Calibri" pitchFamily="34" charset="-122"/>
@@ -4534,7 +4535,7 @@
             <a:r>
               <a:rPr lang="en-US" sz="1500" dirty="0">
                 <a:solidFill>
-                  <a:srgbClr val="9FB2C9"/>
+                  <a:srgbClr val="8A7E72"/>
                 </a:solidFill>
                 <a:latin typeface="Calibri" pitchFamily="34" charset="0"/>
                 <a:ea typeface="Calibri" pitchFamily="34" charset="-122"/>
@@ -4551,7 +4552,7 @@
             <a:r>
               <a:rPr lang="en-US" sz="1400" i="1" dirty="0">
                 <a:solidFill>
-                  <a:srgbClr val="9FB2C9"/>
+                  <a:srgbClr val="8A7E72"/>
                 </a:solidFill>
                 <a:latin typeface="Calibri" pitchFamily="34" charset="0"/>
                 <a:ea typeface="Calibri" pitchFamily="34" charset="-122"/>
@@ -4580,18 +4581,18 @@
             </a:avLst>
           </a:prstGeom>
           <a:solidFill>
-            <a:srgbClr val="16314F"/>
+            <a:srgbClr val="EADFD0"/>
           </a:solidFill>
           <a:ln w="19050">
             <a:solidFill>
-              <a:srgbClr val="C9A961"/>
+              <a:srgbClr val="B1937E"/>
             </a:solidFill>
             <a:prstDash val="solid"/>
           </a:ln>
           <a:effectLst>
-            <a:outerShdw sx="100000" sy="100000" kx="0" ky="0" algn="bl" rotWithShape="0" blurRad="127000" dist="38100" dir="5400000">
-              <a:srgbClr val="000000">
-                <a:alpha val="28000"/>
+            <a:outerShdw sx="100000" sy="100000" kx="0" ky="0" algn="bl" rotWithShape="0" blurRad="114300" dist="38100" dir="5400000">
+              <a:srgbClr val="7A6A55">
+                <a:alpha val="12000"/>
               </a:srgbClr>
             </a:outerShdw>
           </a:effectLst>
@@ -4624,7 +4625,7 @@
             <a:r>
               <a:rPr lang="en-US" sz="1300" b="1" spc="300" kern="0" dirty="0">
                 <a:solidFill>
-                  <a:srgbClr val="C9A961"/>
+                  <a:srgbClr val="B1937E"/>
                 </a:solidFill>
                 <a:latin typeface="Calibri" pitchFamily="34" charset="0"/>
                 <a:ea typeface="Calibri" pitchFamily="34" charset="-122"/>
@@ -4666,7 +4667,7 @@
             <a:r>
               <a:rPr lang="en-US" sz="1600" b="1" dirty="0">
                 <a:solidFill>
-                  <a:srgbClr val="EAF1FA"/>
+                  <a:srgbClr val="33302B"/>
                 </a:solidFill>
                 <a:latin typeface="Calibri" pitchFamily="34" charset="0"/>
                 <a:ea typeface="Calibri" pitchFamily="34" charset="-122"/>
@@ -4686,7 +4687,7 @@
             <a:r>
               <a:rPr lang="en-US" sz="1500" dirty="0">
                 <a:solidFill>
-                  <a:srgbClr val="EAF1FA"/>
+                  <a:srgbClr val="33302B"/>
                 </a:solidFill>
                 <a:latin typeface="Calibri" pitchFamily="34" charset="0"/>
                 <a:ea typeface="Calibri" pitchFamily="34" charset="-122"/>
@@ -4706,7 +4707,7 @@
             <a:r>
               <a:rPr lang="en-US" sz="1500" dirty="0">
                 <a:solidFill>
-                  <a:srgbClr val="EAF1FA"/>
+                  <a:srgbClr val="33302B"/>
                 </a:solidFill>
                 <a:latin typeface="Calibri" pitchFamily="34" charset="0"/>
                 <a:ea typeface="Calibri" pitchFamily="34" charset="-122"/>
@@ -4723,7 +4724,7 @@
             <a:r>
               <a:rPr lang="en-US" sz="1400" i="1" dirty="0">
                 <a:solidFill>
-                  <a:srgbClr val="C9A961"/>
+                  <a:srgbClr val="B1937E"/>
                 </a:solidFill>
                 <a:latin typeface="Calibri" pitchFamily="34" charset="0"/>
                 <a:ea typeface="Calibri" pitchFamily="34" charset="-122"/>
@@ -4752,7 +4753,7 @@
           <a:noFill/>
           <a:ln w="9525">
             <a:solidFill>
-              <a:srgbClr val="5C708A">
+              <a:srgbClr val="A89A86">
                 <a:alpha val="60000"/>
               </a:srgbClr>
             </a:solidFill>
@@ -4787,7 +4788,7 @@
             <a:r>
               <a:rPr lang="en-US" sz="900" dirty="0">
                 <a:solidFill>
-                  <a:srgbClr val="5C708A"/>
+                  <a:srgbClr val="A89A86"/>
                 </a:solidFill>
                 <a:latin typeface="Calibri" pitchFamily="34" charset="0"/>
                 <a:ea typeface="Calibri" pitchFamily="34" charset="-122"/>
@@ -4826,7 +4827,7 @@
             <a:r>
               <a:rPr lang="en-US" sz="900" dirty="0">
                 <a:solidFill>
-                  <a:srgbClr val="5C708A"/>
+                  <a:srgbClr val="A89A86"/>
                 </a:solidFill>
                 <a:latin typeface="Calibri" pitchFamily="34" charset="0"/>
                 <a:ea typeface="Calibri" pitchFamily="34" charset="-122"/>
@@ -4852,7 +4853,7 @@
     <p:bg>
       <p:bgPr>
         <a:solidFill>
-          <a:srgbClr val="0B1D33"/>
+          <a:srgbClr val="F8F6F3"/>
         </a:solidFill>
       </p:bgPr>
     </p:bg>
@@ -4897,7 +4898,7 @@
             <a:r>
               <a:rPr lang="en-US" sz="1200" b="1" spc="300" kern="0" dirty="0">
                 <a:solidFill>
-                  <a:srgbClr val="4A9EFF"/>
+                  <a:srgbClr val="9A7B66"/>
                 </a:solidFill>
                 <a:latin typeface="Calibri" pitchFamily="34" charset="0"/>
                 <a:ea typeface="Calibri" pitchFamily="34" charset="-122"/>
@@ -4939,11 +4940,11 @@
             <a:r>
               <a:rPr lang="en-US" sz="3200" b="1" dirty="0">
                 <a:solidFill>
-                  <a:srgbClr val="EAF1FA"/>
-                </a:solidFill>
-                <a:latin typeface="Bookman Old Style" pitchFamily="34" charset="0"/>
-                <a:ea typeface="Bookman Old Style" pitchFamily="34" charset="-122"/>
-                <a:cs typeface="Bookman Old Style" pitchFamily="34" charset="-120"/>
+                  <a:srgbClr val="33302B"/>
+                </a:solidFill>
+                <a:latin typeface="Georgia" pitchFamily="34" charset="0"/>
+                <a:ea typeface="Georgia" pitchFamily="34" charset="-122"/>
+                <a:cs typeface="Georgia" pitchFamily="34" charset="-120"/>
               </a:rPr>
               <a:t>O silêncio mata mais que o 'não'</a:t>
             </a:r>
@@ -4968,13 +4969,18 @@
             </a:avLst>
           </a:prstGeom>
           <a:solidFill>
-            <a:srgbClr val="13283F"/>
+            <a:srgbClr val="FFFFFF"/>
           </a:solidFill>
-          <a:ln/>
+          <a:ln w="12700">
+            <a:solidFill>
+              <a:srgbClr val="E3D9CC"/>
+            </a:solidFill>
+            <a:prstDash val="solid"/>
+          </a:ln>
           <a:effectLst>
-            <a:outerShdw sx="100000" sy="100000" kx="0" ky="0" algn="bl" rotWithShape="0" blurRad="127000" dist="38100" dir="5400000">
-              <a:srgbClr val="000000">
-                <a:alpha val="28000"/>
+            <a:outerShdw sx="100000" sy="100000" kx="0" ky="0" algn="bl" rotWithShape="0" blurRad="114300" dist="38100" dir="5400000">
+              <a:srgbClr val="7A6A55">
+                <a:alpha val="12000"/>
               </a:srgbClr>
             </a:outerShdw>
           </a:effectLst>
@@ -5007,11 +5013,11 @@
             <a:r>
               <a:rPr lang="en-US" sz="4600" b="1" dirty="0">
                 <a:solidFill>
-                  <a:srgbClr val="C9A961"/>
-                </a:solidFill>
-                <a:latin typeface="Bookman Old Style" pitchFamily="34" charset="0"/>
-                <a:ea typeface="Bookman Old Style" pitchFamily="34" charset="-122"/>
-                <a:cs typeface="Bookman Old Style" pitchFamily="34" charset="-120"/>
+                  <a:srgbClr val="B1937E"/>
+                </a:solidFill>
+                <a:latin typeface="Georgia" pitchFamily="34" charset="0"/>
+                <a:ea typeface="Georgia" pitchFamily="34" charset="-122"/>
+                <a:cs typeface="Georgia" pitchFamily="34" charset="-120"/>
               </a:rPr>
               <a:t>80%</a:t>
             </a:r>
@@ -5046,7 +5052,7 @@
             <a:r>
               <a:rPr lang="en-US" sz="1500" b="1" dirty="0">
                 <a:solidFill>
-                  <a:srgbClr val="EAF1FA"/>
+                  <a:srgbClr val="33302B"/>
                 </a:solidFill>
                 <a:latin typeface="Calibri" pitchFamily="34" charset="0"/>
                 <a:ea typeface="Calibri" pitchFamily="34" charset="-122"/>
@@ -5075,7 +5081,7 @@
           <a:noFill/>
           <a:ln w="9525">
             <a:solidFill>
-              <a:srgbClr val="5C708A">
+              <a:srgbClr val="A89A86">
                 <a:alpha val="60000"/>
               </a:srgbClr>
             </a:solidFill>
@@ -5110,7 +5116,7 @@
             <a:r>
               <a:rPr lang="en-US" sz="1300" dirty="0">
                 <a:solidFill>
-                  <a:srgbClr val="9FB2C9"/>
+                  <a:srgbClr val="8A7E72"/>
                 </a:solidFill>
                 <a:latin typeface="Calibri" pitchFamily="34" charset="0"/>
                 <a:ea typeface="Calibri" pitchFamily="34" charset="-122"/>
@@ -5139,13 +5145,18 @@
             </a:avLst>
           </a:prstGeom>
           <a:solidFill>
-            <a:srgbClr val="13283F"/>
+            <a:srgbClr val="FFFFFF"/>
           </a:solidFill>
-          <a:ln/>
+          <a:ln w="12700">
+            <a:solidFill>
+              <a:srgbClr val="E3D9CC"/>
+            </a:solidFill>
+            <a:prstDash val="solid"/>
+          </a:ln>
           <a:effectLst>
-            <a:outerShdw sx="100000" sy="100000" kx="0" ky="0" algn="bl" rotWithShape="0" blurRad="127000" dist="38100" dir="5400000">
-              <a:srgbClr val="000000">
-                <a:alpha val="28000"/>
+            <a:outerShdw sx="100000" sy="100000" kx="0" ky="0" algn="bl" rotWithShape="0" blurRad="114300" dist="38100" dir="5400000">
+              <a:srgbClr val="7A6A55">
+                <a:alpha val="12000"/>
               </a:srgbClr>
             </a:outerShdw>
           </a:effectLst>
@@ -5178,11 +5189,11 @@
             <a:r>
               <a:rPr lang="en-US" sz="4600" b="1" dirty="0">
                 <a:solidFill>
-                  <a:srgbClr val="4A9EFF"/>
-                </a:solidFill>
-                <a:latin typeface="Bookman Old Style" pitchFamily="34" charset="0"/>
-                <a:ea typeface="Bookman Old Style" pitchFamily="34" charset="-122"/>
-                <a:cs typeface="Bookman Old Style" pitchFamily="34" charset="-120"/>
+                  <a:srgbClr val="9A7B66"/>
+                </a:solidFill>
+                <a:latin typeface="Georgia" pitchFamily="34" charset="0"/>
+                <a:ea typeface="Georgia" pitchFamily="34" charset="-122"/>
+                <a:cs typeface="Georgia" pitchFamily="34" charset="-120"/>
               </a:rPr>
               <a:t>2-3</a:t>
             </a:r>
@@ -5217,7 +5228,7 @@
             <a:r>
               <a:rPr lang="en-US" sz="1500" b="1" dirty="0">
                 <a:solidFill>
-                  <a:srgbClr val="EAF1FA"/>
+                  <a:srgbClr val="33302B"/>
                 </a:solidFill>
                 <a:latin typeface="Calibri" pitchFamily="34" charset="0"/>
                 <a:ea typeface="Calibri" pitchFamily="34" charset="-122"/>
@@ -5246,7 +5257,7 @@
           <a:noFill/>
           <a:ln w="9525">
             <a:solidFill>
-              <a:srgbClr val="5C708A">
+              <a:srgbClr val="A89A86">
                 <a:alpha val="60000"/>
               </a:srgbClr>
             </a:solidFill>
@@ -5281,7 +5292,7 @@
             <a:r>
               <a:rPr lang="en-US" sz="1300" dirty="0">
                 <a:solidFill>
-                  <a:srgbClr val="9FB2C9"/>
+                  <a:srgbClr val="8A7E72"/>
                 </a:solidFill>
                 <a:latin typeface="Calibri" pitchFamily="34" charset="0"/>
                 <a:ea typeface="Calibri" pitchFamily="34" charset="-122"/>
@@ -5310,13 +5321,18 @@
             </a:avLst>
           </a:prstGeom>
           <a:solidFill>
-            <a:srgbClr val="13283F"/>
+            <a:srgbClr val="FFFFFF"/>
           </a:solidFill>
-          <a:ln/>
+          <a:ln w="12700">
+            <a:solidFill>
+              <a:srgbClr val="E3D9CC"/>
+            </a:solidFill>
+            <a:prstDash val="solid"/>
+          </a:ln>
           <a:effectLst>
-            <a:outerShdw sx="100000" sy="100000" kx="0" ky="0" algn="bl" rotWithShape="0" blurRad="127000" dist="38100" dir="5400000">
-              <a:srgbClr val="000000">
-                <a:alpha val="28000"/>
+            <a:outerShdw sx="100000" sy="100000" kx="0" ky="0" algn="bl" rotWithShape="0" blurRad="114300" dist="38100" dir="5400000">
+              <a:srgbClr val="7A6A55">
+                <a:alpha val="12000"/>
               </a:srgbClr>
             </a:outerShdw>
           </a:effectLst>
@@ -5349,11 +5365,11 @@
             <a:r>
               <a:rPr lang="en-US" sz="4600" b="1" dirty="0">
                 <a:solidFill>
-                  <a:srgbClr val="4A9EFF"/>
-                </a:solidFill>
-                <a:latin typeface="Bookman Old Style" pitchFamily="34" charset="0"/>
-                <a:ea typeface="Bookman Old Style" pitchFamily="34" charset="-122"/>
-                <a:cs typeface="Bookman Old Style" pitchFamily="34" charset="-120"/>
+                  <a:srgbClr val="9A7B66"/>
+                </a:solidFill>
+                <a:latin typeface="Georgia" pitchFamily="34" charset="0"/>
+                <a:ea typeface="Georgia" pitchFamily="34" charset="-122"/>
+                <a:cs typeface="Georgia" pitchFamily="34" charset="-120"/>
               </a:rPr>
               <a:t>≠</a:t>
             </a:r>
@@ -5388,7 +5404,7 @@
             <a:r>
               <a:rPr lang="en-US" sz="1500" b="1" dirty="0">
                 <a:solidFill>
-                  <a:srgbClr val="EAF1FA"/>
+                  <a:srgbClr val="33302B"/>
                 </a:solidFill>
                 <a:latin typeface="Calibri" pitchFamily="34" charset="0"/>
                 <a:ea typeface="Calibri" pitchFamily="34" charset="-122"/>
@@ -5417,7 +5433,7 @@
           <a:noFill/>
           <a:ln w="9525">
             <a:solidFill>
-              <a:srgbClr val="5C708A">
+              <a:srgbClr val="A89A86">
                 <a:alpha val="60000"/>
               </a:srgbClr>
             </a:solidFill>
@@ -5452,7 +5468,7 @@
             <a:r>
               <a:rPr lang="en-US" sz="1300" dirty="0">
                 <a:solidFill>
-                  <a:srgbClr val="9FB2C9"/>
+                  <a:srgbClr val="8A7E72"/>
                 </a:solidFill>
                 <a:latin typeface="Calibri" pitchFamily="34" charset="0"/>
                 <a:ea typeface="Calibri" pitchFamily="34" charset="-122"/>
@@ -5481,7 +5497,7 @@
           <a:noFill/>
           <a:ln w="9525">
             <a:solidFill>
-              <a:srgbClr val="5C708A">
+              <a:srgbClr val="A89A86">
                 <a:alpha val="60000"/>
               </a:srgbClr>
             </a:solidFill>
@@ -5516,7 +5532,7 @@
             <a:r>
               <a:rPr lang="en-US" sz="900" dirty="0">
                 <a:solidFill>
-                  <a:srgbClr val="5C708A"/>
+                  <a:srgbClr val="A89A86"/>
                 </a:solidFill>
                 <a:latin typeface="Calibri" pitchFamily="34" charset="0"/>
                 <a:ea typeface="Calibri" pitchFamily="34" charset="-122"/>
@@ -5555,7 +5571,7 @@
             <a:r>
               <a:rPr lang="en-US" sz="900" dirty="0">
                 <a:solidFill>
-                  <a:srgbClr val="5C708A"/>
+                  <a:srgbClr val="A89A86"/>
                 </a:solidFill>
                 <a:latin typeface="Calibri" pitchFamily="34" charset="0"/>
                 <a:ea typeface="Calibri" pitchFamily="34" charset="-122"/>
@@ -5581,7 +5597,7 @@
     <p:bg>
       <p:bgPr>
         <a:solidFill>
-          <a:srgbClr val="0B1D33"/>
+          <a:srgbClr val="F8F6F3"/>
         </a:solidFill>
       </p:bgPr>
     </p:bg>
@@ -5626,7 +5642,7 @@
             <a:r>
               <a:rPr lang="en-US" sz="1200" b="1" spc="300" kern="0" dirty="0">
                 <a:solidFill>
-                  <a:srgbClr val="4A9EFF"/>
+                  <a:srgbClr val="9A7B66"/>
                 </a:solidFill>
                 <a:latin typeface="Calibri" pitchFamily="34" charset="0"/>
                 <a:ea typeface="Calibri" pitchFamily="34" charset="-122"/>
@@ -5668,11 +5684,11 @@
             <a:r>
               <a:rPr lang="en-US" sz="3000" b="1" dirty="0">
                 <a:solidFill>
-                  <a:srgbClr val="EAF1FA"/>
-                </a:solidFill>
-                <a:latin typeface="Bookman Old Style" pitchFamily="34" charset="0"/>
-                <a:ea typeface="Bookman Old Style" pitchFamily="34" charset="-122"/>
-                <a:cs typeface="Bookman Old Style" pitchFamily="34" charset="-120"/>
+                  <a:srgbClr val="33302B"/>
+                </a:solidFill>
+                <a:latin typeface="Georgia" pitchFamily="34" charset="0"/>
+                <a:ea typeface="Georgia" pitchFamily="34" charset="-122"/>
+                <a:cs typeface="Georgia" pitchFamily="34" charset="-120"/>
               </a:rPr>
               <a:t>A sequência de follow-up</a:t>
             </a:r>
@@ -5697,13 +5713,18 @@
             </a:avLst>
           </a:prstGeom>
           <a:solidFill>
-            <a:srgbClr val="13283F"/>
+            <a:srgbClr val="FFFFFF"/>
           </a:solidFill>
-          <a:ln/>
+          <a:ln w="12700">
+            <a:solidFill>
+              <a:srgbClr val="E3D9CC"/>
+            </a:solidFill>
+            <a:prstDash val="solid"/>
+          </a:ln>
           <a:effectLst>
-            <a:outerShdw sx="100000" sy="100000" kx="0" ky="0" algn="bl" rotWithShape="0" blurRad="127000" dist="38100" dir="5400000">
-              <a:srgbClr val="000000">
-                <a:alpha val="28000"/>
+            <a:outerShdw sx="100000" sy="100000" kx="0" ky="0" algn="bl" rotWithShape="0" blurRad="114300" dist="38100" dir="5400000">
+              <a:srgbClr val="7A6A55">
+                <a:alpha val="12000"/>
               </a:srgbClr>
             </a:outerShdw>
           </a:effectLst>
@@ -5724,9 +5745,14 @@
             <a:avLst/>
           </a:prstGeom>
           <a:solidFill>
-            <a:srgbClr val="16314F"/>
+            <a:srgbClr val="EADFD0"/>
           </a:solidFill>
-          <a:ln/>
+          <a:ln w="9525">
+            <a:solidFill>
+              <a:srgbClr val="E3D9CC"/>
+            </a:solidFill>
+            <a:prstDash val="solid"/>
+          </a:ln>
         </p:spPr>
       </p:sp>
       <p:pic>
@@ -5780,11 +5806,11 @@
             <a:r>
               <a:rPr lang="en-US" sz="1700" b="1" dirty="0">
                 <a:solidFill>
-                  <a:srgbClr val="EAF1FA"/>
-                </a:solidFill>
-                <a:latin typeface="Bookman Old Style" pitchFamily="34" charset="0"/>
-                <a:ea typeface="Bookman Old Style" pitchFamily="34" charset="-122"/>
-                <a:cs typeface="Bookman Old Style" pitchFamily="34" charset="-120"/>
+                  <a:srgbClr val="33302B"/>
+                </a:solidFill>
+                <a:latin typeface="Georgia" pitchFamily="34" charset="0"/>
+                <a:ea typeface="Georgia" pitchFamily="34" charset="-122"/>
+                <a:cs typeface="Georgia" pitchFamily="34" charset="-120"/>
               </a:rPr>
               <a:t>Toque 1</a:t>
             </a:r>
@@ -5819,7 +5845,7 @@
             <a:r>
               <a:rPr lang="en-US" sz="1250" dirty="0">
                 <a:solidFill>
-                  <a:srgbClr val="9FB2C9"/>
+                  <a:srgbClr val="8A7E72"/>
                 </a:solidFill>
                 <a:latin typeface="Calibri" pitchFamily="34" charset="0"/>
                 <a:ea typeface="Calibri" pitchFamily="34" charset="-122"/>
@@ -5872,13 +5898,18 @@
             </a:avLst>
           </a:prstGeom>
           <a:solidFill>
-            <a:srgbClr val="13283F"/>
+            <a:srgbClr val="FFFFFF"/>
           </a:solidFill>
-          <a:ln/>
+          <a:ln w="12700">
+            <a:solidFill>
+              <a:srgbClr val="E3D9CC"/>
+            </a:solidFill>
+            <a:prstDash val="solid"/>
+          </a:ln>
           <a:effectLst>
-            <a:outerShdw sx="100000" sy="100000" kx="0" ky="0" algn="bl" rotWithShape="0" blurRad="127000" dist="38100" dir="5400000">
-              <a:srgbClr val="000000">
-                <a:alpha val="28000"/>
+            <a:outerShdw sx="100000" sy="100000" kx="0" ky="0" algn="bl" rotWithShape="0" blurRad="114300" dist="38100" dir="5400000">
+              <a:srgbClr val="7A6A55">
+                <a:alpha val="12000"/>
               </a:srgbClr>
             </a:outerShdw>
           </a:effectLst>
@@ -5899,9 +5930,14 @@
             <a:avLst/>
           </a:prstGeom>
           <a:solidFill>
-            <a:srgbClr val="16314F"/>
+            <a:srgbClr val="EADFD0"/>
           </a:solidFill>
-          <a:ln/>
+          <a:ln w="9525">
+            <a:solidFill>
+              <a:srgbClr val="E3D9CC"/>
+            </a:solidFill>
+            <a:prstDash val="solid"/>
+          </a:ln>
         </p:spPr>
       </p:sp>
       <p:pic>
@@ -5955,11 +5991,11 @@
             <a:r>
               <a:rPr lang="en-US" sz="1700" b="1" dirty="0">
                 <a:solidFill>
-                  <a:srgbClr val="EAF1FA"/>
-                </a:solidFill>
-                <a:latin typeface="Bookman Old Style" pitchFamily="34" charset="0"/>
-                <a:ea typeface="Bookman Old Style" pitchFamily="34" charset="-122"/>
-                <a:cs typeface="Bookman Old Style" pitchFamily="34" charset="-120"/>
+                  <a:srgbClr val="33302B"/>
+                </a:solidFill>
+                <a:latin typeface="Georgia" pitchFamily="34" charset="0"/>
+                <a:ea typeface="Georgia" pitchFamily="34" charset="-122"/>
+                <a:cs typeface="Georgia" pitchFamily="34" charset="-120"/>
               </a:rPr>
               <a:t>Toque 2</a:t>
             </a:r>
@@ -5994,7 +6030,7 @@
             <a:r>
               <a:rPr lang="en-US" sz="1250" dirty="0">
                 <a:solidFill>
-                  <a:srgbClr val="9FB2C9"/>
+                  <a:srgbClr val="8A7E72"/>
                 </a:solidFill>
                 <a:latin typeface="Calibri" pitchFamily="34" charset="0"/>
                 <a:ea typeface="Calibri" pitchFamily="34" charset="-122"/>
@@ -6047,13 +6083,18 @@
             </a:avLst>
           </a:prstGeom>
           <a:solidFill>
-            <a:srgbClr val="13283F"/>
+            <a:srgbClr val="FFFFFF"/>
           </a:solidFill>
-          <a:ln/>
+          <a:ln w="12700">
+            <a:solidFill>
+              <a:srgbClr val="E3D9CC"/>
+            </a:solidFill>
+            <a:prstDash val="solid"/>
+          </a:ln>
           <a:effectLst>
-            <a:outerShdw sx="100000" sy="100000" kx="0" ky="0" algn="bl" rotWithShape="0" blurRad="127000" dist="38100" dir="5400000">
-              <a:srgbClr val="000000">
-                <a:alpha val="28000"/>
+            <a:outerShdw sx="100000" sy="100000" kx="0" ky="0" algn="bl" rotWithShape="0" blurRad="114300" dist="38100" dir="5400000">
+              <a:srgbClr val="7A6A55">
+                <a:alpha val="12000"/>
               </a:srgbClr>
             </a:outerShdw>
           </a:effectLst>
@@ -6074,9 +6115,14 @@
             <a:avLst/>
           </a:prstGeom>
           <a:solidFill>
-            <a:srgbClr val="16314F"/>
+            <a:srgbClr val="EADFD0"/>
           </a:solidFill>
-          <a:ln/>
+          <a:ln w="9525">
+            <a:solidFill>
+              <a:srgbClr val="E3D9CC"/>
+            </a:solidFill>
+            <a:prstDash val="solid"/>
+          </a:ln>
         </p:spPr>
       </p:sp>
       <p:pic>
@@ -6130,11 +6176,11 @@
             <a:r>
               <a:rPr lang="en-US" sz="1700" b="1" dirty="0">
                 <a:solidFill>
-                  <a:srgbClr val="EAF1FA"/>
-                </a:solidFill>
-                <a:latin typeface="Bookman Old Style" pitchFamily="34" charset="0"/>
-                <a:ea typeface="Bookman Old Style" pitchFamily="34" charset="-122"/>
-                <a:cs typeface="Bookman Old Style" pitchFamily="34" charset="-120"/>
+                  <a:srgbClr val="33302B"/>
+                </a:solidFill>
+                <a:latin typeface="Georgia" pitchFamily="34" charset="0"/>
+                <a:ea typeface="Georgia" pitchFamily="34" charset="-122"/>
+                <a:cs typeface="Georgia" pitchFamily="34" charset="-120"/>
               </a:rPr>
               <a:t>Toque 3</a:t>
             </a:r>
@@ -6169,7 +6215,7 @@
             <a:r>
               <a:rPr lang="en-US" sz="1250" dirty="0">
                 <a:solidFill>
-                  <a:srgbClr val="9FB2C9"/>
+                  <a:srgbClr val="8A7E72"/>
                 </a:solidFill>
                 <a:latin typeface="Calibri" pitchFamily="34" charset="0"/>
                 <a:ea typeface="Calibri" pitchFamily="34" charset="-122"/>
@@ -6208,7 +6254,7 @@
             <a:r>
               <a:rPr lang="en-US" sz="1500" i="1" dirty="0">
                 <a:solidFill>
-                  <a:srgbClr val="C9A961"/>
+                  <a:srgbClr val="B1937E"/>
                 </a:solidFill>
                 <a:latin typeface="Calibri" pitchFamily="34" charset="0"/>
                 <a:ea typeface="Calibri" pitchFamily="34" charset="-122"/>
@@ -6237,7 +6283,7 @@
           <a:noFill/>
           <a:ln w="9525">
             <a:solidFill>
-              <a:srgbClr val="5C708A">
+              <a:srgbClr val="A89A86">
                 <a:alpha val="60000"/>
               </a:srgbClr>
             </a:solidFill>
@@ -6272,7 +6318,7 @@
             <a:r>
               <a:rPr lang="en-US" sz="900" dirty="0">
                 <a:solidFill>
-                  <a:srgbClr val="5C708A"/>
+                  <a:srgbClr val="A89A86"/>
                 </a:solidFill>
                 <a:latin typeface="Calibri" pitchFamily="34" charset="0"/>
                 <a:ea typeface="Calibri" pitchFamily="34" charset="-122"/>
@@ -6311,7 +6357,7 @@
             <a:r>
               <a:rPr lang="en-US" sz="900" dirty="0">
                 <a:solidFill>
-                  <a:srgbClr val="5C708A"/>
+                  <a:srgbClr val="A89A86"/>
                 </a:solidFill>
                 <a:latin typeface="Calibri" pitchFamily="34" charset="0"/>
                 <a:ea typeface="Calibri" pitchFamily="34" charset="-122"/>
@@ -6337,7 +6383,7 @@
     <p:bg>
       <p:bgPr>
         <a:solidFill>
-          <a:srgbClr val="0B1D33"/>
+          <a:srgbClr val="F8F6F3"/>
         </a:solidFill>
       </p:bgPr>
     </p:bg>
@@ -6382,7 +6428,7 @@
             <a:r>
               <a:rPr lang="en-US" sz="1200" b="1" spc="300" kern="0" dirty="0">
                 <a:solidFill>
-                  <a:srgbClr val="4A9EFF"/>
+                  <a:srgbClr val="9A7B66"/>
                 </a:solidFill>
                 <a:latin typeface="Calibri" pitchFamily="34" charset="0"/>
                 <a:ea typeface="Calibri" pitchFamily="34" charset="-122"/>
@@ -6424,11 +6470,11 @@
             <a:r>
               <a:rPr lang="en-US" sz="3200" b="1" dirty="0">
                 <a:solidFill>
-                  <a:srgbClr val="EAF1FA"/>
-                </a:solidFill>
-                <a:latin typeface="Bookman Old Style" pitchFamily="34" charset="0"/>
-                <a:ea typeface="Bookman Old Style" pitchFamily="34" charset="-122"/>
-                <a:cs typeface="Bookman Old Style" pitchFamily="34" charset="-120"/>
+                  <a:srgbClr val="33302B"/>
+                </a:solidFill>
+                <a:latin typeface="Georgia" pitchFamily="34" charset="0"/>
+                <a:ea typeface="Georgia" pitchFamily="34" charset="-122"/>
+                <a:cs typeface="Georgia" pitchFamily="34" charset="-120"/>
               </a:rPr>
               <a:t>Um CRM simples basta</a:t>
             </a:r>
@@ -6453,13 +6499,18 @@
             </a:avLst>
           </a:prstGeom>
           <a:solidFill>
-            <a:srgbClr val="13283F"/>
+            <a:srgbClr val="FFFFFF"/>
           </a:solidFill>
-          <a:ln/>
+          <a:ln w="12700">
+            <a:solidFill>
+              <a:srgbClr val="E3D9CC"/>
+            </a:solidFill>
+            <a:prstDash val="solid"/>
+          </a:ln>
           <a:effectLst>
-            <a:outerShdw sx="100000" sy="100000" kx="0" ky="0" algn="bl" rotWithShape="0" blurRad="127000" dist="38100" dir="5400000">
-              <a:srgbClr val="000000">
-                <a:alpha val="28000"/>
+            <a:outerShdw sx="100000" sy="100000" kx="0" ky="0" algn="bl" rotWithShape="0" blurRad="114300" dist="38100" dir="5400000">
+              <a:srgbClr val="7A6A55">
+                <a:alpha val="12000"/>
               </a:srgbClr>
             </a:outerShdw>
           </a:effectLst>
@@ -6480,9 +6531,14 @@
             <a:avLst/>
           </a:prstGeom>
           <a:solidFill>
-            <a:srgbClr val="16314F"/>
+            <a:srgbClr val="EADFD0"/>
           </a:solidFill>
-          <a:ln/>
+          <a:ln w="9525">
+            <a:solidFill>
+              <a:srgbClr val="E3D9CC"/>
+            </a:solidFill>
+            <a:prstDash val="solid"/>
+          </a:ln>
         </p:spPr>
       </p:sp>
       <p:pic>
@@ -6536,11 +6592,11 @@
             <a:r>
               <a:rPr lang="en-US" sz="1900" b="1" dirty="0">
                 <a:solidFill>
-                  <a:srgbClr val="C9A961"/>
-                </a:solidFill>
-                <a:latin typeface="Bookman Old Style" pitchFamily="34" charset="0"/>
-                <a:ea typeface="Bookman Old Style" pitchFamily="34" charset="-122"/>
-                <a:cs typeface="Bookman Old Style" pitchFamily="34" charset="-120"/>
+                  <a:srgbClr val="B1937E"/>
+                </a:solidFill>
+                <a:latin typeface="Georgia" pitchFamily="34" charset="0"/>
+                <a:ea typeface="Georgia" pitchFamily="34" charset="-122"/>
+                <a:cs typeface="Georgia" pitchFamily="34" charset="-120"/>
               </a:rPr>
               <a:t>Regista cada lead</a:t>
             </a:r>
@@ -6575,7 +6631,7 @@
             <a:r>
               <a:rPr lang="en-US" sz="1400" dirty="0">
                 <a:solidFill>
-                  <a:srgbClr val="9FB2C9"/>
+                  <a:srgbClr val="8A7E72"/>
                 </a:solidFill>
                 <a:latin typeface="Calibri" pitchFamily="34" charset="0"/>
                 <a:ea typeface="Calibri" pitchFamily="34" charset="-122"/>
@@ -6604,13 +6660,18 @@
             </a:avLst>
           </a:prstGeom>
           <a:solidFill>
-            <a:srgbClr val="13283F"/>
+            <a:srgbClr val="FFFFFF"/>
           </a:solidFill>
-          <a:ln/>
+          <a:ln w="12700">
+            <a:solidFill>
+              <a:srgbClr val="E3D9CC"/>
+            </a:solidFill>
+            <a:prstDash val="solid"/>
+          </a:ln>
           <a:effectLst>
-            <a:outerShdw sx="100000" sy="100000" kx="0" ky="0" algn="bl" rotWithShape="0" blurRad="127000" dist="38100" dir="5400000">
-              <a:srgbClr val="000000">
-                <a:alpha val="28000"/>
+            <a:outerShdw sx="100000" sy="100000" kx="0" ky="0" algn="bl" rotWithShape="0" blurRad="114300" dist="38100" dir="5400000">
+              <a:srgbClr val="7A6A55">
+                <a:alpha val="12000"/>
               </a:srgbClr>
             </a:outerShdw>
           </a:effectLst>
@@ -6631,9 +6692,14 @@
             <a:avLst/>
           </a:prstGeom>
           <a:solidFill>
-            <a:srgbClr val="16314F"/>
+            <a:srgbClr val="EADFD0"/>
           </a:solidFill>
-          <a:ln/>
+          <a:ln w="9525">
+            <a:solidFill>
+              <a:srgbClr val="E3D9CC"/>
+            </a:solidFill>
+            <a:prstDash val="solid"/>
+          </a:ln>
         </p:spPr>
       </p:sp>
       <p:pic>
@@ -6687,11 +6753,11 @@
             <a:r>
               <a:rPr lang="en-US" sz="1900" b="1" dirty="0">
                 <a:solidFill>
-                  <a:srgbClr val="C9A961"/>
-                </a:solidFill>
-                <a:latin typeface="Bookman Old Style" pitchFamily="34" charset="0"/>
-                <a:ea typeface="Bookman Old Style" pitchFamily="34" charset="-122"/>
-                <a:cs typeface="Bookman Old Style" pitchFamily="34" charset="-120"/>
+                  <a:srgbClr val="B1937E"/>
+                </a:solidFill>
+                <a:latin typeface="Georgia" pitchFamily="34" charset="0"/>
+                <a:ea typeface="Georgia" pitchFamily="34" charset="-122"/>
+                <a:cs typeface="Georgia" pitchFamily="34" charset="-120"/>
               </a:rPr>
               <a:t>Define o próximo passo</a:t>
             </a:r>
@@ -6726,7 +6792,7 @@
             <a:r>
               <a:rPr lang="en-US" sz="1400" dirty="0">
                 <a:solidFill>
-                  <a:srgbClr val="9FB2C9"/>
+                  <a:srgbClr val="8A7E72"/>
                 </a:solidFill>
                 <a:latin typeface="Calibri" pitchFamily="34" charset="0"/>
                 <a:ea typeface="Calibri" pitchFamily="34" charset="-122"/>
@@ -6755,13 +6821,18 @@
             </a:avLst>
           </a:prstGeom>
           <a:solidFill>
-            <a:srgbClr val="13283F"/>
+            <a:srgbClr val="FFFFFF"/>
           </a:solidFill>
-          <a:ln/>
+          <a:ln w="12700">
+            <a:solidFill>
+              <a:srgbClr val="E3D9CC"/>
+            </a:solidFill>
+            <a:prstDash val="solid"/>
+          </a:ln>
           <a:effectLst>
-            <a:outerShdw sx="100000" sy="100000" kx="0" ky="0" algn="bl" rotWithShape="0" blurRad="127000" dist="38100" dir="5400000">
-              <a:srgbClr val="000000">
-                <a:alpha val="28000"/>
+            <a:outerShdw sx="100000" sy="100000" kx="0" ky="0" algn="bl" rotWithShape="0" blurRad="114300" dist="38100" dir="5400000">
+              <a:srgbClr val="7A6A55">
+                <a:alpha val="12000"/>
               </a:srgbClr>
             </a:outerShdw>
           </a:effectLst>
@@ -6782,9 +6853,14 @@
             <a:avLst/>
           </a:prstGeom>
           <a:solidFill>
-            <a:srgbClr val="16314F"/>
+            <a:srgbClr val="EADFD0"/>
           </a:solidFill>
-          <a:ln/>
+          <a:ln w="9525">
+            <a:solidFill>
+              <a:srgbClr val="E3D9CC"/>
+            </a:solidFill>
+            <a:prstDash val="solid"/>
+          </a:ln>
         </p:spPr>
       </p:sp>
       <p:pic>
@@ -6838,11 +6914,11 @@
             <a:r>
               <a:rPr lang="en-US" sz="1900" b="1" dirty="0">
                 <a:solidFill>
-                  <a:srgbClr val="C9A961"/>
-                </a:solidFill>
-                <a:latin typeface="Bookman Old Style" pitchFamily="34" charset="0"/>
-                <a:ea typeface="Bookman Old Style" pitchFamily="34" charset="-122"/>
-                <a:cs typeface="Bookman Old Style" pitchFamily="34" charset="-120"/>
+                  <a:srgbClr val="B1937E"/>
+                </a:solidFill>
+                <a:latin typeface="Georgia" pitchFamily="34" charset="0"/>
+                <a:ea typeface="Georgia" pitchFamily="34" charset="-122"/>
+                <a:cs typeface="Georgia" pitchFamily="34" charset="-120"/>
               </a:rPr>
               <a:t>Mede a conversão</a:t>
             </a:r>
@@ -6877,7 +6953,7 @@
             <a:r>
               <a:rPr lang="en-US" sz="1400" dirty="0">
                 <a:solidFill>
-                  <a:srgbClr val="9FB2C9"/>
+                  <a:srgbClr val="8A7E72"/>
                 </a:solidFill>
                 <a:latin typeface="Calibri" pitchFamily="34" charset="0"/>
                 <a:ea typeface="Calibri" pitchFamily="34" charset="-122"/>
@@ -6906,7 +6982,7 @@
           <a:noFill/>
           <a:ln w="9525">
             <a:solidFill>
-              <a:srgbClr val="5C708A">
+              <a:srgbClr val="A89A86">
                 <a:alpha val="60000"/>
               </a:srgbClr>
             </a:solidFill>
@@ -6941,7 +7017,7 @@
             <a:r>
               <a:rPr lang="en-US" sz="900" dirty="0">
                 <a:solidFill>
-                  <a:srgbClr val="5C708A"/>
+                  <a:srgbClr val="A89A86"/>
                 </a:solidFill>
                 <a:latin typeface="Calibri" pitchFamily="34" charset="0"/>
                 <a:ea typeface="Calibri" pitchFamily="34" charset="-122"/>
@@ -6980,7 +7056,7 @@
             <a:r>
               <a:rPr lang="en-US" sz="900" dirty="0">
                 <a:solidFill>
-                  <a:srgbClr val="5C708A"/>
+                  <a:srgbClr val="A89A86"/>
                 </a:solidFill>
                 <a:latin typeface="Calibri" pitchFamily="34" charset="0"/>
                 <a:ea typeface="Calibri" pitchFamily="34" charset="-122"/>
@@ -7006,7 +7082,7 @@
     <p:bg>
       <p:bgPr>
         <a:solidFill>
-          <a:srgbClr val="0B1D33"/>
+          <a:srgbClr val="F8F6F3"/>
         </a:solidFill>
       </p:bgPr>
     </p:bg>
@@ -7051,7 +7127,7 @@
             <a:r>
               <a:rPr lang="en-US" sz="1200" b="1" spc="300" kern="0" dirty="0">
                 <a:solidFill>
-                  <a:srgbClr val="4A9EFF"/>
+                  <a:srgbClr val="9A7B66"/>
                 </a:solidFill>
                 <a:latin typeface="Calibri" pitchFamily="34" charset="0"/>
                 <a:ea typeface="Calibri" pitchFamily="34" charset="-122"/>
@@ -7093,11 +7169,11 @@
             <a:r>
               <a:rPr lang="en-US" sz="3200" b="1" dirty="0">
                 <a:solidFill>
-                  <a:srgbClr val="EAF1FA"/>
-                </a:solidFill>
-                <a:latin typeface="Bookman Old Style" pitchFamily="34" charset="0"/>
-                <a:ea typeface="Bookman Old Style" pitchFamily="34" charset="-122"/>
-                <a:cs typeface="Bookman Old Style" pitchFamily="34" charset="-120"/>
+                  <a:srgbClr val="33302B"/>
+                </a:solidFill>
+                <a:latin typeface="Georgia" pitchFamily="34" charset="0"/>
+                <a:ea typeface="Georgia" pitchFamily="34" charset="-122"/>
+                <a:cs typeface="Georgia" pitchFamily="34" charset="-120"/>
               </a:rPr>
               <a:t>Erros comuns na captação</a:t>
             </a:r>
@@ -7122,13 +7198,18 @@
             </a:avLst>
           </a:prstGeom>
           <a:solidFill>
-            <a:srgbClr val="13283F"/>
+            <a:srgbClr val="FFFFFF"/>
           </a:solidFill>
-          <a:ln/>
+          <a:ln w="12700">
+            <a:solidFill>
+              <a:srgbClr val="E3D9CC"/>
+            </a:solidFill>
+            <a:prstDash val="solid"/>
+          </a:ln>
           <a:effectLst>
-            <a:outerShdw sx="100000" sy="100000" kx="0" ky="0" algn="bl" rotWithShape="0" blurRad="127000" dist="38100" dir="5400000">
-              <a:srgbClr val="000000">
-                <a:alpha val="28000"/>
+            <a:outerShdw sx="100000" sy="100000" kx="0" ky="0" algn="bl" rotWithShape="0" blurRad="114300" dist="38100" dir="5400000">
+              <a:srgbClr val="7A6A55">
+                <a:alpha val="12000"/>
               </a:srgbClr>
             </a:outerShdw>
           </a:effectLst>
@@ -7149,9 +7230,14 @@
             <a:avLst/>
           </a:prstGeom>
           <a:solidFill>
-            <a:srgbClr val="16314F"/>
+            <a:srgbClr val="EADFD0"/>
           </a:solidFill>
-          <a:ln/>
+          <a:ln w="9525">
+            <a:solidFill>
+              <a:srgbClr val="E3D9CC"/>
+            </a:solidFill>
+            <a:prstDash val="solid"/>
+          </a:ln>
         </p:spPr>
       </p:sp>
       <p:pic>
@@ -7205,11 +7291,11 @@
             <a:r>
               <a:rPr lang="en-US" sz="1800" b="1" dirty="0">
                 <a:solidFill>
-                  <a:srgbClr val="C9A961"/>
-                </a:solidFill>
-                <a:latin typeface="Bookman Old Style" pitchFamily="34" charset="0"/>
-                <a:ea typeface="Bookman Old Style" pitchFamily="34" charset="-122"/>
-                <a:cs typeface="Bookman Old Style" pitchFamily="34" charset="-120"/>
+                  <a:srgbClr val="B1937E"/>
+                </a:solidFill>
+                <a:latin typeface="Georgia" pitchFamily="34" charset="0"/>
+                <a:ea typeface="Georgia" pitchFamily="34" charset="-122"/>
+                <a:cs typeface="Georgia" pitchFamily="34" charset="-120"/>
               </a:rPr>
               <a:t>Demorar a responder</a:t>
             </a:r>
@@ -7244,7 +7330,7 @@
             <a:r>
               <a:rPr lang="en-US" sz="1350" dirty="0">
                 <a:solidFill>
-                  <a:srgbClr val="9FB2C9"/>
+                  <a:srgbClr val="8A7E72"/>
                 </a:solidFill>
                 <a:latin typeface="Calibri" pitchFamily="34" charset="0"/>
                 <a:ea typeface="Calibri" pitchFamily="34" charset="-122"/>
@@ -7273,13 +7359,18 @@
             </a:avLst>
           </a:prstGeom>
           <a:solidFill>
-            <a:srgbClr val="13283F"/>
+            <a:srgbClr val="FFFFFF"/>
           </a:solidFill>
-          <a:ln/>
+          <a:ln w="12700">
+            <a:solidFill>
+              <a:srgbClr val="E3D9CC"/>
+            </a:solidFill>
+            <a:prstDash val="solid"/>
+          </a:ln>
           <a:effectLst>
-            <a:outerShdw sx="100000" sy="100000" kx="0" ky="0" algn="bl" rotWithShape="0" blurRad="127000" dist="38100" dir="5400000">
-              <a:srgbClr val="000000">
-                <a:alpha val="28000"/>
+            <a:outerShdw sx="100000" sy="100000" kx="0" ky="0" algn="bl" rotWithShape="0" blurRad="114300" dist="38100" dir="5400000">
+              <a:srgbClr val="7A6A55">
+                <a:alpha val="12000"/>
               </a:srgbClr>
             </a:outerShdw>
           </a:effectLst>
@@ -7300,9 +7391,14 @@
             <a:avLst/>
           </a:prstGeom>
           <a:solidFill>
-            <a:srgbClr val="16314F"/>
+            <a:srgbClr val="EADFD0"/>
           </a:solidFill>
-          <a:ln/>
+          <a:ln w="9525">
+            <a:solidFill>
+              <a:srgbClr val="E3D9CC"/>
+            </a:solidFill>
+            <a:prstDash val="solid"/>
+          </a:ln>
         </p:spPr>
       </p:sp>
       <p:pic>
@@ -7356,11 +7452,11 @@
             <a:r>
               <a:rPr lang="en-US" sz="1800" b="1" dirty="0">
                 <a:solidFill>
-                  <a:srgbClr val="C9A961"/>
-                </a:solidFill>
-                <a:latin typeface="Bookman Old Style" pitchFamily="34" charset="0"/>
-                <a:ea typeface="Bookman Old Style" pitchFamily="34" charset="-122"/>
-                <a:cs typeface="Bookman Old Style" pitchFamily="34" charset="-120"/>
+                  <a:srgbClr val="B1937E"/>
+                </a:solidFill>
+                <a:latin typeface="Georgia" pitchFamily="34" charset="0"/>
+                <a:ea typeface="Georgia" pitchFamily="34" charset="-122"/>
+                <a:cs typeface="Georgia" pitchFamily="34" charset="-120"/>
               </a:rPr>
               <a:t>Disparar o preço logo</a:t>
             </a:r>
@@ -7395,7 +7491,7 @@
             <a:r>
               <a:rPr lang="en-US" sz="1350" dirty="0">
                 <a:solidFill>
-                  <a:srgbClr val="9FB2C9"/>
+                  <a:srgbClr val="8A7E72"/>
                 </a:solidFill>
                 <a:latin typeface="Calibri" pitchFamily="34" charset="0"/>
                 <a:ea typeface="Calibri" pitchFamily="34" charset="-122"/>
@@ -7424,13 +7520,18 @@
             </a:avLst>
           </a:prstGeom>
           <a:solidFill>
-            <a:srgbClr val="13283F"/>
+            <a:srgbClr val="FFFFFF"/>
           </a:solidFill>
-          <a:ln/>
+          <a:ln w="12700">
+            <a:solidFill>
+              <a:srgbClr val="E3D9CC"/>
+            </a:solidFill>
+            <a:prstDash val="solid"/>
+          </a:ln>
           <a:effectLst>
-            <a:outerShdw sx="100000" sy="100000" kx="0" ky="0" algn="bl" rotWithShape="0" blurRad="127000" dist="38100" dir="5400000">
-              <a:srgbClr val="000000">
-                <a:alpha val="28000"/>
+            <a:outerShdw sx="100000" sy="100000" kx="0" ky="0" algn="bl" rotWithShape="0" blurRad="114300" dist="38100" dir="5400000">
+              <a:srgbClr val="7A6A55">
+                <a:alpha val="12000"/>
               </a:srgbClr>
             </a:outerShdw>
           </a:effectLst>
@@ -7451,9 +7552,14 @@
             <a:avLst/>
           </a:prstGeom>
           <a:solidFill>
-            <a:srgbClr val="16314F"/>
+            <a:srgbClr val="EADFD0"/>
           </a:solidFill>
-          <a:ln/>
+          <a:ln w="9525">
+            <a:solidFill>
+              <a:srgbClr val="E3D9CC"/>
+            </a:solidFill>
+            <a:prstDash val="solid"/>
+          </a:ln>
         </p:spPr>
       </p:sp>
       <p:pic>
@@ -7507,11 +7613,11 @@
             <a:r>
               <a:rPr lang="en-US" sz="1800" b="1" dirty="0">
                 <a:solidFill>
-                  <a:srgbClr val="C9A961"/>
-                </a:solidFill>
-                <a:latin typeface="Bookman Old Style" pitchFamily="34" charset="0"/>
-                <a:ea typeface="Bookman Old Style" pitchFamily="34" charset="-122"/>
-                <a:cs typeface="Bookman Old Style" pitchFamily="34" charset="-120"/>
+                  <a:srgbClr val="B1937E"/>
+                </a:solidFill>
+                <a:latin typeface="Georgia" pitchFamily="34" charset="0"/>
+                <a:ea typeface="Georgia" pitchFamily="34" charset="-122"/>
+                <a:cs typeface="Georgia" pitchFamily="34" charset="-120"/>
               </a:rPr>
               <a:t>Reunir com toda a gente</a:t>
             </a:r>
@@ -7546,7 +7652,7 @@
             <a:r>
               <a:rPr lang="en-US" sz="1350" dirty="0">
                 <a:solidFill>
-                  <a:srgbClr val="9FB2C9"/>
+                  <a:srgbClr val="8A7E72"/>
                 </a:solidFill>
                 <a:latin typeface="Calibri" pitchFamily="34" charset="0"/>
                 <a:ea typeface="Calibri" pitchFamily="34" charset="-122"/>
@@ -7575,13 +7681,18 @@
             </a:avLst>
           </a:prstGeom>
           <a:solidFill>
-            <a:srgbClr val="13283F"/>
+            <a:srgbClr val="FFFFFF"/>
           </a:solidFill>
-          <a:ln/>
+          <a:ln w="12700">
+            <a:solidFill>
+              <a:srgbClr val="E3D9CC"/>
+            </a:solidFill>
+            <a:prstDash val="solid"/>
+          </a:ln>
           <a:effectLst>
-            <a:outerShdw sx="100000" sy="100000" kx="0" ky="0" algn="bl" rotWithShape="0" blurRad="127000" dist="38100" dir="5400000">
-              <a:srgbClr val="000000">
-                <a:alpha val="28000"/>
+            <a:outerShdw sx="100000" sy="100000" kx="0" ky="0" algn="bl" rotWithShape="0" blurRad="114300" dist="38100" dir="5400000">
+              <a:srgbClr val="7A6A55">
+                <a:alpha val="12000"/>
               </a:srgbClr>
             </a:outerShdw>
           </a:effectLst>
@@ -7602,9 +7713,14 @@
             <a:avLst/>
           </a:prstGeom>
           <a:solidFill>
-            <a:srgbClr val="16314F"/>
+            <a:srgbClr val="EADFD0"/>
           </a:solidFill>
-          <a:ln/>
+          <a:ln w="9525">
+            <a:solidFill>
+              <a:srgbClr val="E3D9CC"/>
+            </a:solidFill>
+            <a:prstDash val="solid"/>
+          </a:ln>
         </p:spPr>
       </p:sp>
       <p:pic>
@@ -7658,11 +7774,11 @@
             <a:r>
               <a:rPr lang="en-US" sz="1800" b="1" dirty="0">
                 <a:solidFill>
-                  <a:srgbClr val="C9A961"/>
-                </a:solidFill>
-                <a:latin typeface="Bookman Old Style" pitchFamily="34" charset="0"/>
-                <a:ea typeface="Bookman Old Style" pitchFamily="34" charset="-122"/>
-                <a:cs typeface="Bookman Old Style" pitchFamily="34" charset="-120"/>
+                  <a:srgbClr val="B1937E"/>
+                </a:solidFill>
+                <a:latin typeface="Georgia" pitchFamily="34" charset="0"/>
+                <a:ea typeface="Georgia" pitchFamily="34" charset="-122"/>
+                <a:cs typeface="Georgia" pitchFamily="34" charset="-120"/>
               </a:rPr>
               <a:t>Desistir ao primeiro silêncio</a:t>
             </a:r>
@@ -7697,7 +7813,7 @@
             <a:r>
               <a:rPr lang="en-US" sz="1350" dirty="0">
                 <a:solidFill>
-                  <a:srgbClr val="9FB2C9"/>
+                  <a:srgbClr val="8A7E72"/>
                 </a:solidFill>
                 <a:latin typeface="Calibri" pitchFamily="34" charset="0"/>
                 <a:ea typeface="Calibri" pitchFamily="34" charset="-122"/>
@@ -7726,7 +7842,7 @@
           <a:noFill/>
           <a:ln w="9525">
             <a:solidFill>
-              <a:srgbClr val="5C708A">
+              <a:srgbClr val="A89A86">
                 <a:alpha val="60000"/>
               </a:srgbClr>
             </a:solidFill>
@@ -7761,7 +7877,7 @@
             <a:r>
               <a:rPr lang="en-US" sz="900" dirty="0">
                 <a:solidFill>
-                  <a:srgbClr val="5C708A"/>
+                  <a:srgbClr val="A89A86"/>
                 </a:solidFill>
                 <a:latin typeface="Calibri" pitchFamily="34" charset="0"/>
                 <a:ea typeface="Calibri" pitchFamily="34" charset="-122"/>
@@ -7800,7 +7916,7 @@
             <a:r>
               <a:rPr lang="en-US" sz="900" dirty="0">
                 <a:solidFill>
-                  <a:srgbClr val="5C708A"/>
+                  <a:srgbClr val="A89A86"/>
                 </a:solidFill>
                 <a:latin typeface="Calibri" pitchFamily="34" charset="0"/>
                 <a:ea typeface="Calibri" pitchFamily="34" charset="-122"/>
@@ -7826,7 +7942,7 @@
     <p:bg>
       <p:bgPr>
         <a:solidFill>
-          <a:srgbClr val="0B1D33"/>
+          <a:srgbClr val="F8F6F3"/>
         </a:solidFill>
       </p:bgPr>
     </p:bg>
@@ -7846,51 +7962,7 @@
       </p:grpSpPr>
       <p:sp>
         <p:nvSpPr>
-          <p:cNvPr id="2" name="Shape 0"/>
-          <p:cNvSpPr/>
-          <p:nvPr/>
-        </p:nvSpPr>
-        <p:spPr>
-          <a:xfrm>
-            <a:off x="7772400" y="-1371600"/>
-            <a:ext cx="5486400" cy="5486400"/>
-          </a:xfrm>
-          <a:prstGeom prst="ellipse">
-            <a:avLst/>
-          </a:prstGeom>
-          <a:solidFill>
-            <a:srgbClr val="4A9EFF">
-              <a:alpha val="10000"/>
-            </a:srgbClr>
-          </a:solidFill>
-          <a:ln/>
-        </p:spPr>
-      </p:sp>
-      <p:sp>
-        <p:nvSpPr>
-          <p:cNvPr id="3" name="Shape 1"/>
-          <p:cNvSpPr/>
-          <p:nvPr/>
-        </p:nvSpPr>
-        <p:spPr>
-          <a:xfrm>
-            <a:off x="-1371600" y="4114800"/>
-            <a:ext cx="4572000" cy="4572000"/>
-          </a:xfrm>
-          <a:prstGeom prst="ellipse">
-            <a:avLst/>
-          </a:prstGeom>
-          <a:solidFill>
-            <a:srgbClr val="C9A961">
-              <a:alpha val="8000"/>
-            </a:srgbClr>
-          </a:solidFill>
-          <a:ln/>
-        </p:spPr>
-      </p:sp>
-      <p:sp>
-        <p:nvSpPr>
-          <p:cNvPr id="4" name="Text 2"/>
+          <p:cNvPr id="2" name="Text 0"/>
           <p:cNvSpPr/>
           <p:nvPr/>
         </p:nvSpPr>
@@ -7915,11 +7987,11 @@
             <a:r>
               <a:rPr lang="en-US" sz="15000" b="1" dirty="0">
                 <a:solidFill>
-                  <a:srgbClr val="16314F"/>
-                </a:solidFill>
-                <a:latin typeface="Bookman Old Style" pitchFamily="34" charset="0"/>
-                <a:ea typeface="Bookman Old Style" pitchFamily="34" charset="-122"/>
-                <a:cs typeface="Bookman Old Style" pitchFamily="34" charset="-120"/>
+                  <a:srgbClr val="EADFD0"/>
+                </a:solidFill>
+                <a:latin typeface="Georgia" pitchFamily="34" charset="0"/>
+                <a:ea typeface="Georgia" pitchFamily="34" charset="-122"/>
+                <a:cs typeface="Georgia" pitchFamily="34" charset="-120"/>
               </a:rPr>
               <a:t>C</a:t>
             </a:r>
@@ -7929,7 +8001,7 @@
       </p:sp>
       <p:sp>
         <p:nvSpPr>
-          <p:cNvPr id="5" name="Text 3"/>
+          <p:cNvPr id="3" name="Text 1"/>
           <p:cNvSpPr/>
           <p:nvPr/>
         </p:nvSpPr>
@@ -7954,7 +8026,7 @@
             <a:r>
               <a:rPr lang="en-US" sz="1300" b="1" spc="400" kern="0" dirty="0">
                 <a:solidFill>
-                  <a:srgbClr val="C9A961"/>
+                  <a:srgbClr val="B1937E"/>
                 </a:solidFill>
                 <a:latin typeface="Calibri" pitchFamily="34" charset="0"/>
                 <a:ea typeface="Calibri" pitchFamily="34" charset="-122"/>
@@ -7968,7 +8040,7 @@
       </p:sp>
       <p:sp>
         <p:nvSpPr>
-          <p:cNvPr id="6" name="Text 4"/>
+          <p:cNvPr id="4" name="Text 2"/>
           <p:cNvSpPr/>
           <p:nvPr/>
         </p:nvSpPr>
@@ -7994,23 +8066,23 @@
               <a:buNone/>
             </a:pPr>
             <a:r>
-              <a:rPr lang="en-US" sz="4400" b="1" dirty="0">
-                <a:solidFill>
-                  <a:srgbClr val="EAF1FA"/>
-                </a:solidFill>
-                <a:latin typeface="Bookman Old Style" pitchFamily="34" charset="0"/>
-                <a:ea typeface="Bookman Old Style" pitchFamily="34" charset="-122"/>
-                <a:cs typeface="Bookman Old Style" pitchFamily="34" charset="-120"/>
+              <a:rPr lang="en-US" sz="4000" b="1" dirty="0">
+                <a:solidFill>
+                  <a:srgbClr val="33302B"/>
+                </a:solidFill>
+                <a:latin typeface="Georgia" pitchFamily="34" charset="0"/>
+                <a:ea typeface="Georgia" pitchFamily="34" charset="-122"/>
+                <a:cs typeface="Georgia" pitchFamily="34" charset="-120"/>
               </a:rPr>
               <a:t>O Trabalho desta Semana</a:t>
             </a:r>
-            <a:endParaRPr lang="en-US" sz="4400" dirty="0"/>
-          </a:p>
-        </p:txBody>
-      </p:sp>
-      <p:sp>
-        <p:nvSpPr>
-          <p:cNvPr id="7" name="Text 5"/>
+            <a:endParaRPr lang="en-US" sz="4000" dirty="0"/>
+          </a:p>
+        </p:txBody>
+      </p:sp>
+      <p:sp>
+        <p:nvSpPr>
+          <p:cNvPr id="5" name="Text 3"/>
           <p:cNvSpPr/>
           <p:nvPr/>
         </p:nvSpPr>
@@ -8035,7 +8107,7 @@
             <a:r>
               <a:rPr lang="en-US" sz="1600" dirty="0">
                 <a:solidFill>
-                  <a:srgbClr val="9FB2C9"/>
+                  <a:srgbClr val="8A7E72"/>
                 </a:solidFill>
                 <a:latin typeface="Calibri" pitchFamily="34" charset="0"/>
                 <a:ea typeface="Calibri" pitchFamily="34" charset="-122"/>
@@ -8049,7 +8121,7 @@
       </p:sp>
       <p:sp>
         <p:nvSpPr>
-          <p:cNvPr id="8" name="Shape 6"/>
+          <p:cNvPr id="6" name="Shape 4"/>
           <p:cNvSpPr/>
           <p:nvPr/>
         </p:nvSpPr>
@@ -8064,7 +8136,7 @@
           <a:noFill/>
           <a:ln w="9525">
             <a:solidFill>
-              <a:srgbClr val="5C708A">
+              <a:srgbClr val="A89A86">
                 <a:alpha val="60000"/>
               </a:srgbClr>
             </a:solidFill>
@@ -8074,7 +8146,7 @@
       </p:sp>
       <p:sp>
         <p:nvSpPr>
-          <p:cNvPr id="9" name="Text 7"/>
+          <p:cNvPr id="7" name="Text 5"/>
           <p:cNvSpPr/>
           <p:nvPr/>
         </p:nvSpPr>
@@ -8099,7 +8171,7 @@
             <a:r>
               <a:rPr lang="en-US" sz="900" dirty="0">
                 <a:solidFill>
-                  <a:srgbClr val="5C708A"/>
+                  <a:srgbClr val="A89A86"/>
                 </a:solidFill>
                 <a:latin typeface="Calibri" pitchFamily="34" charset="0"/>
                 <a:ea typeface="Calibri" pitchFamily="34" charset="-122"/>
@@ -8113,7 +8185,7 @@
       </p:sp>
       <p:sp>
         <p:nvSpPr>
-          <p:cNvPr id="10" name="Text 8"/>
+          <p:cNvPr id="8" name="Text 6"/>
           <p:cNvSpPr/>
           <p:nvPr/>
         </p:nvSpPr>
@@ -8138,7 +8210,7 @@
             <a:r>
               <a:rPr lang="en-US" sz="900" dirty="0">
                 <a:solidFill>
-                  <a:srgbClr val="5C708A"/>
+                  <a:srgbClr val="A89A86"/>
                 </a:solidFill>
                 <a:latin typeface="Calibri" pitchFamily="34" charset="0"/>
                 <a:ea typeface="Calibri" pitchFamily="34" charset="-122"/>
@@ -8164,7 +8236,7 @@
     <p:bg>
       <p:bgPr>
         <a:solidFill>
-          <a:srgbClr val="0B1D33"/>
+          <a:srgbClr val="F8F6F3"/>
         </a:solidFill>
       </p:bgPr>
     </p:bg>
@@ -8209,7 +8281,7 @@
             <a:r>
               <a:rPr lang="en-US" sz="1200" b="1" spc="300" kern="0" dirty="0">
                 <a:solidFill>
-                  <a:srgbClr val="4A9EFF"/>
+                  <a:srgbClr val="9A7B66"/>
                 </a:solidFill>
                 <a:latin typeface="Calibri" pitchFamily="34" charset="0"/>
                 <a:ea typeface="Calibri" pitchFamily="34" charset="-122"/>
@@ -8251,11 +8323,11 @@
             <a:r>
               <a:rPr lang="en-US" sz="3400" b="1" dirty="0">
                 <a:solidFill>
-                  <a:srgbClr val="EAF1FA"/>
-                </a:solidFill>
-                <a:latin typeface="Bookman Old Style" pitchFamily="34" charset="0"/>
-                <a:ea typeface="Bookman Old Style" pitchFamily="34" charset="-122"/>
-                <a:cs typeface="Bookman Old Style" pitchFamily="34" charset="-120"/>
+                  <a:srgbClr val="33302B"/>
+                </a:solidFill>
+                <a:latin typeface="Georgia" pitchFamily="34" charset="0"/>
+                <a:ea typeface="Georgia" pitchFamily="34" charset="-122"/>
+                <a:cs typeface="Georgia" pitchFamily="34" charset="-120"/>
               </a:rPr>
               <a:t>Três peças, zero leads perdidos</a:t>
             </a:r>
@@ -8280,13 +8352,18 @@
             </a:avLst>
           </a:prstGeom>
           <a:solidFill>
-            <a:srgbClr val="13283F"/>
+            <a:srgbClr val="FFFFFF"/>
           </a:solidFill>
-          <a:ln/>
+          <a:ln w="12700">
+            <a:solidFill>
+              <a:srgbClr val="E3D9CC"/>
+            </a:solidFill>
+            <a:prstDash val="solid"/>
+          </a:ln>
           <a:effectLst>
-            <a:outerShdw sx="100000" sy="100000" kx="0" ky="0" algn="bl" rotWithShape="0" blurRad="127000" dist="38100" dir="5400000">
-              <a:srgbClr val="000000">
-                <a:alpha val="28000"/>
+            <a:outerShdw sx="100000" sy="100000" kx="0" ky="0" algn="bl" rotWithShape="0" blurRad="114300" dist="38100" dir="5400000">
+              <a:srgbClr val="7A6A55">
+                <a:alpha val="12000"/>
               </a:srgbClr>
             </a:outerShdw>
           </a:effectLst>
@@ -8319,11 +8396,11 @@
             <a:r>
               <a:rPr lang="en-US" sz="3600" b="1" dirty="0">
                 <a:solidFill>
-                  <a:srgbClr val="C9A961"/>
-                </a:solidFill>
-                <a:latin typeface="Bookman Old Style" pitchFamily="34" charset="0"/>
-                <a:ea typeface="Bookman Old Style" pitchFamily="34" charset="-122"/>
-                <a:cs typeface="Bookman Old Style" pitchFamily="34" charset="-120"/>
+                  <a:srgbClr val="B1937E"/>
+                </a:solidFill>
+                <a:latin typeface="Georgia" pitchFamily="34" charset="0"/>
+                <a:ea typeface="Georgia" pitchFamily="34" charset="-122"/>
+                <a:cs typeface="Georgia" pitchFamily="34" charset="-120"/>
               </a:rPr>
               <a:t>01</a:t>
             </a:r>
@@ -8346,9 +8423,14 @@
             <a:avLst/>
           </a:prstGeom>
           <a:solidFill>
-            <a:srgbClr val="16314F"/>
+            <a:srgbClr val="EADFD0"/>
           </a:solidFill>
-          <a:ln/>
+          <a:ln w="9525">
+            <a:solidFill>
+              <a:srgbClr val="E3D9CC"/>
+            </a:solidFill>
+            <a:prstDash val="solid"/>
+          </a:ln>
         </p:spPr>
       </p:sp>
       <p:pic>
@@ -8402,11 +8484,11 @@
             <a:r>
               <a:rPr lang="en-US" sz="1900" b="1" dirty="0">
                 <a:solidFill>
-                  <a:srgbClr val="EAF1FA"/>
-                </a:solidFill>
-                <a:latin typeface="Bookman Old Style" pitchFamily="34" charset="0"/>
-                <a:ea typeface="Bookman Old Style" pitchFamily="34" charset="-122"/>
-                <a:cs typeface="Bookman Old Style" pitchFamily="34" charset="-120"/>
+                  <a:srgbClr val="33302B"/>
+                </a:solidFill>
+                <a:latin typeface="Georgia" pitchFamily="34" charset="0"/>
+                <a:ea typeface="Georgia" pitchFamily="34" charset="-122"/>
+                <a:cs typeface="Georgia" pitchFamily="34" charset="-120"/>
               </a:rPr>
               <a:t>Cria o formulário de intake</a:t>
             </a:r>
@@ -8441,7 +8523,7 @@
             <a:r>
               <a:rPr lang="en-US" sz="1300" dirty="0">
                 <a:solidFill>
-                  <a:srgbClr val="9FB2C9"/>
+                  <a:srgbClr val="8A7E72"/>
                 </a:solidFill>
                 <a:latin typeface="Calibri" pitchFamily="34" charset="0"/>
                 <a:ea typeface="Calibri" pitchFamily="34" charset="-122"/>
@@ -8470,13 +8552,18 @@
             </a:avLst>
           </a:prstGeom>
           <a:solidFill>
-            <a:srgbClr val="13283F"/>
+            <a:srgbClr val="FFFFFF"/>
           </a:solidFill>
-          <a:ln/>
+          <a:ln w="12700">
+            <a:solidFill>
+              <a:srgbClr val="E3D9CC"/>
+            </a:solidFill>
+            <a:prstDash val="solid"/>
+          </a:ln>
           <a:effectLst>
-            <a:outerShdw sx="100000" sy="100000" kx="0" ky="0" algn="bl" rotWithShape="0" blurRad="127000" dist="38100" dir="5400000">
-              <a:srgbClr val="000000">
-                <a:alpha val="28000"/>
+            <a:outerShdw sx="100000" sy="100000" kx="0" ky="0" algn="bl" rotWithShape="0" blurRad="114300" dist="38100" dir="5400000">
+              <a:srgbClr val="7A6A55">
+                <a:alpha val="12000"/>
               </a:srgbClr>
             </a:outerShdw>
           </a:effectLst>
@@ -8509,11 +8596,11 @@
             <a:r>
               <a:rPr lang="en-US" sz="3600" b="1" dirty="0">
                 <a:solidFill>
-                  <a:srgbClr val="C9A961"/>
-                </a:solidFill>
-                <a:latin typeface="Bookman Old Style" pitchFamily="34" charset="0"/>
-                <a:ea typeface="Bookman Old Style" pitchFamily="34" charset="-122"/>
-                <a:cs typeface="Bookman Old Style" pitchFamily="34" charset="-120"/>
+                  <a:srgbClr val="B1937E"/>
+                </a:solidFill>
+                <a:latin typeface="Georgia" pitchFamily="34" charset="0"/>
+                <a:ea typeface="Georgia" pitchFamily="34" charset="-122"/>
+                <a:cs typeface="Georgia" pitchFamily="34" charset="-120"/>
               </a:rPr>
               <a:t>02</a:t>
             </a:r>
@@ -8536,9 +8623,14 @@
             <a:avLst/>
           </a:prstGeom>
           <a:solidFill>
-            <a:srgbClr val="16314F"/>
+            <a:srgbClr val="EADFD0"/>
           </a:solidFill>
-          <a:ln/>
+          <a:ln w="9525">
+            <a:solidFill>
+              <a:srgbClr val="E3D9CC"/>
+            </a:solidFill>
+            <a:prstDash val="solid"/>
+          </a:ln>
         </p:spPr>
       </p:sp>
       <p:pic>
@@ -8592,11 +8684,11 @@
             <a:r>
               <a:rPr lang="en-US" sz="1900" b="1" dirty="0">
                 <a:solidFill>
-                  <a:srgbClr val="EAF1FA"/>
-                </a:solidFill>
-                <a:latin typeface="Bookman Old Style" pitchFamily="34" charset="0"/>
-                <a:ea typeface="Bookman Old Style" pitchFamily="34" charset="-122"/>
-                <a:cs typeface="Bookman Old Style" pitchFamily="34" charset="-120"/>
+                  <a:srgbClr val="33302B"/>
+                </a:solidFill>
+                <a:latin typeface="Georgia" pitchFamily="34" charset="0"/>
+                <a:ea typeface="Georgia" pitchFamily="34" charset="-122"/>
+                <a:cs typeface="Georgia" pitchFamily="34" charset="-120"/>
               </a:rPr>
               <a:t>Escreve a resposta rápida</a:t>
             </a:r>
@@ -8631,7 +8723,7 @@
             <a:r>
               <a:rPr lang="en-US" sz="1300" dirty="0">
                 <a:solidFill>
-                  <a:srgbClr val="9FB2C9"/>
+                  <a:srgbClr val="8A7E72"/>
                 </a:solidFill>
                 <a:latin typeface="Calibri" pitchFamily="34" charset="0"/>
                 <a:ea typeface="Calibri" pitchFamily="34" charset="-122"/>
@@ -8660,13 +8752,18 @@
             </a:avLst>
           </a:prstGeom>
           <a:solidFill>
-            <a:srgbClr val="13283F"/>
+            <a:srgbClr val="FFFFFF"/>
           </a:solidFill>
-          <a:ln/>
+          <a:ln w="12700">
+            <a:solidFill>
+              <a:srgbClr val="E3D9CC"/>
+            </a:solidFill>
+            <a:prstDash val="solid"/>
+          </a:ln>
           <a:effectLst>
-            <a:outerShdw sx="100000" sy="100000" kx="0" ky="0" algn="bl" rotWithShape="0" blurRad="127000" dist="38100" dir="5400000">
-              <a:srgbClr val="000000">
-                <a:alpha val="28000"/>
+            <a:outerShdw sx="100000" sy="100000" kx="0" ky="0" algn="bl" rotWithShape="0" blurRad="114300" dist="38100" dir="5400000">
+              <a:srgbClr val="7A6A55">
+                <a:alpha val="12000"/>
               </a:srgbClr>
             </a:outerShdw>
           </a:effectLst>
@@ -8699,11 +8796,11 @@
             <a:r>
               <a:rPr lang="en-US" sz="3600" b="1" dirty="0">
                 <a:solidFill>
-                  <a:srgbClr val="C9A961"/>
-                </a:solidFill>
-                <a:latin typeface="Bookman Old Style" pitchFamily="34" charset="0"/>
-                <a:ea typeface="Bookman Old Style" pitchFamily="34" charset="-122"/>
-                <a:cs typeface="Bookman Old Style" pitchFamily="34" charset="-120"/>
+                  <a:srgbClr val="B1937E"/>
+                </a:solidFill>
+                <a:latin typeface="Georgia" pitchFamily="34" charset="0"/>
+                <a:ea typeface="Georgia" pitchFamily="34" charset="-122"/>
+                <a:cs typeface="Georgia" pitchFamily="34" charset="-120"/>
               </a:rPr>
               <a:t>03</a:t>
             </a:r>
@@ -8726,9 +8823,14 @@
             <a:avLst/>
           </a:prstGeom>
           <a:solidFill>
-            <a:srgbClr val="16314F"/>
+            <a:srgbClr val="EADFD0"/>
           </a:solidFill>
-          <a:ln/>
+          <a:ln w="9525">
+            <a:solidFill>
+              <a:srgbClr val="E3D9CC"/>
+            </a:solidFill>
+            <a:prstDash val="solid"/>
+          </a:ln>
         </p:spPr>
       </p:sp>
       <p:pic>
@@ -8782,11 +8884,11 @@
             <a:r>
               <a:rPr lang="en-US" sz="1900" b="1" dirty="0">
                 <a:solidFill>
-                  <a:srgbClr val="EAF1FA"/>
-                </a:solidFill>
-                <a:latin typeface="Bookman Old Style" pitchFamily="34" charset="0"/>
-                <a:ea typeface="Bookman Old Style" pitchFamily="34" charset="-122"/>
-                <a:cs typeface="Bookman Old Style" pitchFamily="34" charset="-120"/>
+                  <a:srgbClr val="33302B"/>
+                </a:solidFill>
+                <a:latin typeface="Georgia" pitchFamily="34" charset="0"/>
+                <a:ea typeface="Georgia" pitchFamily="34" charset="-122"/>
+                <a:cs typeface="Georgia" pitchFamily="34" charset="-120"/>
               </a:rPr>
               <a:t>Define a sequência de follow-up</a:t>
             </a:r>
@@ -8821,7 +8923,7 @@
             <a:r>
               <a:rPr lang="en-US" sz="1300" dirty="0">
                 <a:solidFill>
-                  <a:srgbClr val="9FB2C9"/>
+                  <a:srgbClr val="8A7E72"/>
                 </a:solidFill>
                 <a:latin typeface="Calibri" pitchFamily="34" charset="0"/>
                 <a:ea typeface="Calibri" pitchFamily="34" charset="-122"/>
@@ -8850,7 +8952,7 @@
           <a:noFill/>
           <a:ln w="9525">
             <a:solidFill>
-              <a:srgbClr val="5C708A">
+              <a:srgbClr val="A89A86">
                 <a:alpha val="60000"/>
               </a:srgbClr>
             </a:solidFill>
@@ -8885,7 +8987,7 @@
             <a:r>
               <a:rPr lang="en-US" sz="900" dirty="0">
                 <a:solidFill>
-                  <a:srgbClr val="5C708A"/>
+                  <a:srgbClr val="A89A86"/>
                 </a:solidFill>
                 <a:latin typeface="Calibri" pitchFamily="34" charset="0"/>
                 <a:ea typeface="Calibri" pitchFamily="34" charset="-122"/>
@@ -8924,7 +9026,7 @@
             <a:r>
               <a:rPr lang="en-US" sz="900" dirty="0">
                 <a:solidFill>
-                  <a:srgbClr val="5C708A"/>
+                  <a:srgbClr val="A89A86"/>
                 </a:solidFill>
                 <a:latin typeface="Calibri" pitchFamily="34" charset="0"/>
                 <a:ea typeface="Calibri" pitchFamily="34" charset="-122"/>
@@ -8950,7 +9052,7 @@
     <p:bg>
       <p:bgPr>
         <a:solidFill>
-          <a:srgbClr val="102844"/>
+          <a:srgbClr val="EFE7DE"/>
         </a:solidFill>
       </p:bgPr>
     </p:bg>
@@ -8995,7 +9097,7 @@
             <a:r>
               <a:rPr lang="en-US" sz="1200" b="1" spc="300" kern="0" dirty="0">
                 <a:solidFill>
-                  <a:srgbClr val="C9A961"/>
+                  <a:srgbClr val="B1937E"/>
                 </a:solidFill>
                 <a:latin typeface="Calibri" pitchFamily="34" charset="0"/>
                 <a:ea typeface="Calibri" pitchFamily="34" charset="-122"/>
@@ -9037,11 +9139,11 @@
             <a:r>
               <a:rPr lang="en-US" sz="3200" b="1" dirty="0">
                 <a:solidFill>
-                  <a:srgbClr val="EAF1FA"/>
-                </a:solidFill>
-                <a:latin typeface="Bookman Old Style" pitchFamily="34" charset="0"/>
-                <a:ea typeface="Bookman Old Style" pitchFamily="34" charset="-122"/>
-                <a:cs typeface="Bookman Old Style" pitchFamily="34" charset="-120"/>
+                  <a:srgbClr val="33302B"/>
+                </a:solidFill>
+                <a:latin typeface="Georgia" pitchFamily="34" charset="0"/>
+                <a:ea typeface="Georgia" pitchFamily="34" charset="-122"/>
+                <a:cs typeface="Georgia" pitchFamily="34" charset="-120"/>
               </a:rPr>
               <a:t>O que trazes à próxima sessão</a:t>
             </a:r>
@@ -9066,18 +9168,18 @@
             </a:avLst>
           </a:prstGeom>
           <a:solidFill>
-            <a:srgbClr val="13283F"/>
+            <a:srgbClr val="FFFFFF"/>
           </a:solidFill>
           <a:ln w="19050">
             <a:solidFill>
-              <a:srgbClr val="C9A961"/>
+              <a:srgbClr val="B1937E"/>
             </a:solidFill>
             <a:prstDash val="solid"/>
           </a:ln>
           <a:effectLst>
-            <a:outerShdw sx="100000" sy="100000" kx="0" ky="0" algn="bl" rotWithShape="0" blurRad="127000" dist="38100" dir="5400000">
-              <a:srgbClr val="000000">
-                <a:alpha val="28000"/>
+            <a:outerShdw sx="100000" sy="100000" kx="0" ky="0" algn="bl" rotWithShape="0" blurRad="114300" dist="38100" dir="5400000">
+              <a:srgbClr val="7A6A55">
+                <a:alpha val="12000"/>
               </a:srgbClr>
             </a:outerShdw>
           </a:effectLst>
@@ -9110,11 +9212,11 @@
             <a:r>
               <a:rPr lang="en-US" sz="2300" b="1" dirty="0">
                 <a:solidFill>
-                  <a:srgbClr val="C9A961"/>
-                </a:solidFill>
-                <a:latin typeface="Bookman Old Style" pitchFamily="34" charset="0"/>
-                <a:ea typeface="Bookman Old Style" pitchFamily="34" charset="-122"/>
-                <a:cs typeface="Bookman Old Style" pitchFamily="34" charset="-120"/>
+                  <a:srgbClr val="B1937E"/>
+                </a:solidFill>
+                <a:latin typeface="Georgia" pitchFamily="34" charset="0"/>
+                <a:ea typeface="Georgia" pitchFamily="34" charset="-122"/>
+                <a:cs typeface="Georgia" pitchFamily="34" charset="-120"/>
               </a:rPr>
               <a:t>Sistema de Captação</a:t>
             </a:r>
@@ -9173,7 +9275,7 @@
             <a:r>
               <a:rPr lang="en-US" sz="1550" dirty="0">
                 <a:solidFill>
-                  <a:srgbClr val="EAF1FA"/>
+                  <a:srgbClr val="33302B"/>
                 </a:solidFill>
                 <a:latin typeface="Calibri" pitchFamily="34" charset="0"/>
                 <a:ea typeface="Calibri" pitchFamily="34" charset="-122"/>
@@ -9236,7 +9338,7 @@
             <a:r>
               <a:rPr lang="en-US" sz="1550" dirty="0">
                 <a:solidFill>
-                  <a:srgbClr val="EAF1FA"/>
+                  <a:srgbClr val="33302B"/>
                 </a:solidFill>
                 <a:latin typeface="Calibri" pitchFamily="34" charset="0"/>
                 <a:ea typeface="Calibri" pitchFamily="34" charset="-122"/>
@@ -9299,7 +9401,7 @@
             <a:r>
               <a:rPr lang="en-US" sz="1550" dirty="0">
                 <a:solidFill>
-                  <a:srgbClr val="EAF1FA"/>
+                  <a:srgbClr val="33302B"/>
                 </a:solidFill>
                 <a:latin typeface="Calibri" pitchFamily="34" charset="0"/>
                 <a:ea typeface="Calibri" pitchFamily="34" charset="-122"/>
@@ -9338,7 +9440,7 @@
             <a:r>
               <a:rPr lang="en-US" sz="1500" i="1" dirty="0">
                 <a:solidFill>
-                  <a:srgbClr val="9FB2C9"/>
+                  <a:srgbClr val="8A7E72"/>
                 </a:solidFill>
                 <a:latin typeface="Calibri" pitchFamily="34" charset="0"/>
                 <a:ea typeface="Calibri" pitchFamily="34" charset="-122"/>
@@ -9367,7 +9469,7 @@
           <a:noFill/>
           <a:ln w="9525">
             <a:solidFill>
-              <a:srgbClr val="5C708A">
+              <a:srgbClr val="A89A86">
                 <a:alpha val="60000"/>
               </a:srgbClr>
             </a:solidFill>
@@ -9402,7 +9504,7 @@
             <a:r>
               <a:rPr lang="en-US" sz="900" dirty="0">
                 <a:solidFill>
-                  <a:srgbClr val="5C708A"/>
+                  <a:srgbClr val="A89A86"/>
                 </a:solidFill>
                 <a:latin typeface="Calibri" pitchFamily="34" charset="0"/>
                 <a:ea typeface="Calibri" pitchFamily="34" charset="-122"/>
@@ -9441,7 +9543,7 @@
             <a:r>
               <a:rPr lang="en-US" sz="900" dirty="0">
                 <a:solidFill>
-                  <a:srgbClr val="5C708A"/>
+                  <a:srgbClr val="A89A86"/>
                 </a:solidFill>
                 <a:latin typeface="Calibri" pitchFamily="34" charset="0"/>
                 <a:ea typeface="Calibri" pitchFamily="34" charset="-122"/>
@@ -9467,7 +9569,7 @@
     <p:bg>
       <p:bgPr>
         <a:solidFill>
-          <a:srgbClr val="0B1D33"/>
+          <a:srgbClr val="F8F6F3"/>
         </a:solidFill>
       </p:bgPr>
     </p:bg>
@@ -9512,7 +9614,7 @@
             <a:r>
               <a:rPr lang="en-US" sz="1200" b="1" spc="300" kern="0" dirty="0">
                 <a:solidFill>
-                  <a:srgbClr val="4A9EFF"/>
+                  <a:srgbClr val="9A7B66"/>
                 </a:solidFill>
                 <a:latin typeface="Calibri" pitchFamily="34" charset="0"/>
                 <a:ea typeface="Calibri" pitchFamily="34" charset="-122"/>
@@ -9554,11 +9656,11 @@
             <a:r>
               <a:rPr lang="en-US" sz="3600" b="1" dirty="0">
                 <a:solidFill>
-                  <a:srgbClr val="EAF1FA"/>
-                </a:solidFill>
-                <a:latin typeface="Bookman Old Style" pitchFamily="34" charset="0"/>
-                <a:ea typeface="Bookman Old Style" pitchFamily="34" charset="-122"/>
-                <a:cs typeface="Bookman Old Style" pitchFamily="34" charset="-120"/>
+                  <a:srgbClr val="33302B"/>
+                </a:solidFill>
+                <a:latin typeface="Georgia" pitchFamily="34" charset="0"/>
+                <a:ea typeface="Georgia" pitchFamily="34" charset="-122"/>
+                <a:cs typeface="Georgia" pitchFamily="34" charset="-120"/>
               </a:rPr>
               <a:t>Do contacto à reunião certa</a:t>
             </a:r>
@@ -9583,13 +9685,18 @@
             </a:avLst>
           </a:prstGeom>
           <a:solidFill>
-            <a:srgbClr val="13283F"/>
+            <a:srgbClr val="FFFFFF"/>
           </a:solidFill>
-          <a:ln/>
+          <a:ln w="12700">
+            <a:solidFill>
+              <a:srgbClr val="E3D9CC"/>
+            </a:solidFill>
+            <a:prstDash val="solid"/>
+          </a:ln>
           <a:effectLst>
-            <a:outerShdw sx="100000" sy="100000" kx="0" ky="0" algn="bl" rotWithShape="0" blurRad="127000" dist="38100" dir="5400000">
-              <a:srgbClr val="000000">
-                <a:alpha val="28000"/>
+            <a:outerShdw sx="100000" sy="100000" kx="0" ky="0" algn="bl" rotWithShape="0" blurRad="114300" dist="38100" dir="5400000">
+              <a:srgbClr val="7A6A55">
+                <a:alpha val="12000"/>
               </a:srgbClr>
             </a:outerShdw>
           </a:effectLst>
@@ -9610,9 +9717,14 @@
             <a:avLst/>
           </a:prstGeom>
           <a:solidFill>
-            <a:srgbClr val="16314F"/>
+            <a:srgbClr val="EADFD0"/>
           </a:solidFill>
-          <a:ln/>
+          <a:ln w="9525">
+            <a:solidFill>
+              <a:srgbClr val="E3D9CC"/>
+            </a:solidFill>
+            <a:prstDash val="solid"/>
+          </a:ln>
         </p:spPr>
       </p:sp>
       <p:pic>
@@ -9666,11 +9778,11 @@
             <a:r>
               <a:rPr lang="en-US" sz="2800" b="1" dirty="0">
                 <a:solidFill>
-                  <a:srgbClr val="C9A961"/>
-                </a:solidFill>
-                <a:latin typeface="Bookman Old Style" pitchFamily="34" charset="0"/>
-                <a:ea typeface="Bookman Old Style" pitchFamily="34" charset="-122"/>
-                <a:cs typeface="Bookman Old Style" pitchFamily="34" charset="-120"/>
+                  <a:srgbClr val="B1937E"/>
+                </a:solidFill>
+                <a:latin typeface="Georgia" pitchFamily="34" charset="0"/>
+                <a:ea typeface="Georgia" pitchFamily="34" charset="-122"/>
+                <a:cs typeface="Georgia" pitchFamily="34" charset="-120"/>
               </a:rPr>
               <a:t>01</a:t>
             </a:r>
@@ -9705,7 +9817,7 @@
             <a:r>
               <a:rPr lang="en-US" sz="1800" b="1" dirty="0">
                 <a:solidFill>
-                  <a:srgbClr val="EAF1FA"/>
+                  <a:srgbClr val="33302B"/>
                 </a:solidFill>
                 <a:latin typeface="Calibri" pitchFamily="34" charset="0"/>
                 <a:ea typeface="Calibri" pitchFamily="34" charset="-122"/>
@@ -9744,7 +9856,7 @@
             <a:r>
               <a:rPr lang="en-US" sz="1300" dirty="0">
                 <a:solidFill>
-                  <a:srgbClr val="9FB2C9"/>
+                  <a:srgbClr val="8A7E72"/>
                 </a:solidFill>
                 <a:latin typeface="Calibri" pitchFamily="34" charset="0"/>
                 <a:ea typeface="Calibri" pitchFamily="34" charset="-122"/>
@@ -9773,13 +9885,18 @@
             </a:avLst>
           </a:prstGeom>
           <a:solidFill>
-            <a:srgbClr val="13283F"/>
+            <a:srgbClr val="FFFFFF"/>
           </a:solidFill>
-          <a:ln/>
+          <a:ln w="12700">
+            <a:solidFill>
+              <a:srgbClr val="E3D9CC"/>
+            </a:solidFill>
+            <a:prstDash val="solid"/>
+          </a:ln>
           <a:effectLst>
-            <a:outerShdw sx="100000" sy="100000" kx="0" ky="0" algn="bl" rotWithShape="0" blurRad="127000" dist="38100" dir="5400000">
-              <a:srgbClr val="000000">
-                <a:alpha val="28000"/>
+            <a:outerShdw sx="100000" sy="100000" kx="0" ky="0" algn="bl" rotWithShape="0" blurRad="114300" dist="38100" dir="5400000">
+              <a:srgbClr val="7A6A55">
+                <a:alpha val="12000"/>
               </a:srgbClr>
             </a:outerShdw>
           </a:effectLst>
@@ -9800,9 +9917,14 @@
             <a:avLst/>
           </a:prstGeom>
           <a:solidFill>
-            <a:srgbClr val="16314F"/>
+            <a:srgbClr val="EADFD0"/>
           </a:solidFill>
-          <a:ln/>
+          <a:ln w="9525">
+            <a:solidFill>
+              <a:srgbClr val="E3D9CC"/>
+            </a:solidFill>
+            <a:prstDash val="solid"/>
+          </a:ln>
         </p:spPr>
       </p:sp>
       <p:pic>
@@ -9856,11 +9978,11 @@
             <a:r>
               <a:rPr lang="en-US" sz="2800" b="1" dirty="0">
                 <a:solidFill>
-                  <a:srgbClr val="C9A961"/>
-                </a:solidFill>
-                <a:latin typeface="Bookman Old Style" pitchFamily="34" charset="0"/>
-                <a:ea typeface="Bookman Old Style" pitchFamily="34" charset="-122"/>
-                <a:cs typeface="Bookman Old Style" pitchFamily="34" charset="-120"/>
+                  <a:srgbClr val="B1937E"/>
+                </a:solidFill>
+                <a:latin typeface="Georgia" pitchFamily="34" charset="0"/>
+                <a:ea typeface="Georgia" pitchFamily="34" charset="-122"/>
+                <a:cs typeface="Georgia" pitchFamily="34" charset="-120"/>
               </a:rPr>
               <a:t>02</a:t>
             </a:r>
@@ -9895,7 +10017,7 @@
             <a:r>
               <a:rPr lang="en-US" sz="1800" b="1" dirty="0">
                 <a:solidFill>
-                  <a:srgbClr val="EAF1FA"/>
+                  <a:srgbClr val="33302B"/>
                 </a:solidFill>
                 <a:latin typeface="Calibri" pitchFamily="34" charset="0"/>
                 <a:ea typeface="Calibri" pitchFamily="34" charset="-122"/>
@@ -9934,7 +10056,7 @@
             <a:r>
               <a:rPr lang="en-US" sz="1300" dirty="0">
                 <a:solidFill>
-                  <a:srgbClr val="9FB2C9"/>
+                  <a:srgbClr val="8A7E72"/>
                 </a:solidFill>
                 <a:latin typeface="Calibri" pitchFamily="34" charset="0"/>
                 <a:ea typeface="Calibri" pitchFamily="34" charset="-122"/>
@@ -9963,13 +10085,18 @@
             </a:avLst>
           </a:prstGeom>
           <a:solidFill>
-            <a:srgbClr val="13283F"/>
+            <a:srgbClr val="FFFFFF"/>
           </a:solidFill>
-          <a:ln/>
+          <a:ln w="12700">
+            <a:solidFill>
+              <a:srgbClr val="E3D9CC"/>
+            </a:solidFill>
+            <a:prstDash val="solid"/>
+          </a:ln>
           <a:effectLst>
-            <a:outerShdw sx="100000" sy="100000" kx="0" ky="0" algn="bl" rotWithShape="0" blurRad="127000" dist="38100" dir="5400000">
-              <a:srgbClr val="000000">
-                <a:alpha val="28000"/>
+            <a:outerShdw sx="100000" sy="100000" kx="0" ky="0" algn="bl" rotWithShape="0" blurRad="114300" dist="38100" dir="5400000">
+              <a:srgbClr val="7A6A55">
+                <a:alpha val="12000"/>
               </a:srgbClr>
             </a:outerShdw>
           </a:effectLst>
@@ -9990,9 +10117,14 @@
             <a:avLst/>
           </a:prstGeom>
           <a:solidFill>
-            <a:srgbClr val="16314F"/>
+            <a:srgbClr val="EADFD0"/>
           </a:solidFill>
-          <a:ln/>
+          <a:ln w="9525">
+            <a:solidFill>
+              <a:srgbClr val="E3D9CC"/>
+            </a:solidFill>
+            <a:prstDash val="solid"/>
+          </a:ln>
         </p:spPr>
       </p:sp>
       <p:pic>
@@ -10046,11 +10178,11 @@
             <a:r>
               <a:rPr lang="en-US" sz="2800" b="1" dirty="0">
                 <a:solidFill>
-                  <a:srgbClr val="C9A961"/>
-                </a:solidFill>
-                <a:latin typeface="Bookman Old Style" pitchFamily="34" charset="0"/>
-                <a:ea typeface="Bookman Old Style" pitchFamily="34" charset="-122"/>
-                <a:cs typeface="Bookman Old Style" pitchFamily="34" charset="-120"/>
+                  <a:srgbClr val="B1937E"/>
+                </a:solidFill>
+                <a:latin typeface="Georgia" pitchFamily="34" charset="0"/>
+                <a:ea typeface="Georgia" pitchFamily="34" charset="-122"/>
+                <a:cs typeface="Georgia" pitchFamily="34" charset="-120"/>
               </a:rPr>
               <a:t>03</a:t>
             </a:r>
@@ -10085,7 +10217,7 @@
             <a:r>
               <a:rPr lang="en-US" sz="1800" b="1" dirty="0">
                 <a:solidFill>
-                  <a:srgbClr val="EAF1FA"/>
+                  <a:srgbClr val="33302B"/>
                 </a:solidFill>
                 <a:latin typeface="Calibri" pitchFamily="34" charset="0"/>
                 <a:ea typeface="Calibri" pitchFamily="34" charset="-122"/>
@@ -10124,7 +10256,7 @@
             <a:r>
               <a:rPr lang="en-US" sz="1300" dirty="0">
                 <a:solidFill>
-                  <a:srgbClr val="9FB2C9"/>
+                  <a:srgbClr val="8A7E72"/>
                 </a:solidFill>
                 <a:latin typeface="Calibri" pitchFamily="34" charset="0"/>
                 <a:ea typeface="Calibri" pitchFamily="34" charset="-122"/>
@@ -10153,13 +10285,18 @@
             </a:avLst>
           </a:prstGeom>
           <a:solidFill>
-            <a:srgbClr val="13283F"/>
+            <a:srgbClr val="FFFFFF"/>
           </a:solidFill>
-          <a:ln/>
+          <a:ln w="12700">
+            <a:solidFill>
+              <a:srgbClr val="E3D9CC"/>
+            </a:solidFill>
+            <a:prstDash val="solid"/>
+          </a:ln>
           <a:effectLst>
-            <a:outerShdw sx="100000" sy="100000" kx="0" ky="0" algn="bl" rotWithShape="0" blurRad="127000" dist="38100" dir="5400000">
-              <a:srgbClr val="000000">
-                <a:alpha val="28000"/>
+            <a:outerShdw sx="100000" sy="100000" kx="0" ky="0" algn="bl" rotWithShape="0" blurRad="114300" dist="38100" dir="5400000">
+              <a:srgbClr val="7A6A55">
+                <a:alpha val="12000"/>
               </a:srgbClr>
             </a:outerShdw>
           </a:effectLst>
@@ -10180,9 +10317,14 @@
             <a:avLst/>
           </a:prstGeom>
           <a:solidFill>
-            <a:srgbClr val="16314F"/>
+            <a:srgbClr val="EADFD0"/>
           </a:solidFill>
-          <a:ln/>
+          <a:ln w="9525">
+            <a:solidFill>
+              <a:srgbClr val="E3D9CC"/>
+            </a:solidFill>
+            <a:prstDash val="solid"/>
+          </a:ln>
         </p:spPr>
       </p:sp>
       <p:pic>
@@ -10236,11 +10378,11 @@
             <a:r>
               <a:rPr lang="en-US" sz="2800" b="1" dirty="0">
                 <a:solidFill>
-                  <a:srgbClr val="C9A961"/>
-                </a:solidFill>
-                <a:latin typeface="Bookman Old Style" pitchFamily="34" charset="0"/>
-                <a:ea typeface="Bookman Old Style" pitchFamily="34" charset="-122"/>
-                <a:cs typeface="Bookman Old Style" pitchFamily="34" charset="-120"/>
+                  <a:srgbClr val="B1937E"/>
+                </a:solidFill>
+                <a:latin typeface="Georgia" pitchFamily="34" charset="0"/>
+                <a:ea typeface="Georgia" pitchFamily="34" charset="-122"/>
+                <a:cs typeface="Georgia" pitchFamily="34" charset="-120"/>
               </a:rPr>
               <a:t>04</a:t>
             </a:r>
@@ -10275,7 +10417,7 @@
             <a:r>
               <a:rPr lang="en-US" sz="1800" b="1" dirty="0">
                 <a:solidFill>
-                  <a:srgbClr val="EAF1FA"/>
+                  <a:srgbClr val="33302B"/>
                 </a:solidFill>
                 <a:latin typeface="Calibri" pitchFamily="34" charset="0"/>
                 <a:ea typeface="Calibri" pitchFamily="34" charset="-122"/>
@@ -10314,7 +10456,7 @@
             <a:r>
               <a:rPr lang="en-US" sz="1300" dirty="0">
                 <a:solidFill>
-                  <a:srgbClr val="9FB2C9"/>
+                  <a:srgbClr val="8A7E72"/>
                 </a:solidFill>
                 <a:latin typeface="Calibri" pitchFamily="34" charset="0"/>
                 <a:ea typeface="Calibri" pitchFamily="34" charset="-122"/>
@@ -10343,7 +10485,7 @@
           <a:noFill/>
           <a:ln w="9525">
             <a:solidFill>
-              <a:srgbClr val="5C708A">
+              <a:srgbClr val="A89A86">
                 <a:alpha val="60000"/>
               </a:srgbClr>
             </a:solidFill>
@@ -10378,7 +10520,7 @@
             <a:r>
               <a:rPr lang="en-US" sz="900" dirty="0">
                 <a:solidFill>
-                  <a:srgbClr val="5C708A"/>
+                  <a:srgbClr val="A89A86"/>
                 </a:solidFill>
                 <a:latin typeface="Calibri" pitchFamily="34" charset="0"/>
                 <a:ea typeface="Calibri" pitchFamily="34" charset="-122"/>
@@ -10417,7 +10559,7 @@
             <a:r>
               <a:rPr lang="en-US" sz="900" dirty="0">
                 <a:solidFill>
-                  <a:srgbClr val="5C708A"/>
+                  <a:srgbClr val="A89A86"/>
                 </a:solidFill>
                 <a:latin typeface="Calibri" pitchFamily="34" charset="0"/>
                 <a:ea typeface="Calibri" pitchFamily="34" charset="-122"/>
@@ -10443,7 +10585,7 @@
     <p:bg>
       <p:bgPr>
         <a:solidFill>
-          <a:srgbClr val="0B1D33"/>
+          <a:srgbClr val="F8F6F3"/>
         </a:solidFill>
       </p:bgPr>
     </p:bg>
@@ -10463,51 +10605,7 @@
       </p:grpSpPr>
       <p:sp>
         <p:nvSpPr>
-          <p:cNvPr id="2" name="Shape 0"/>
-          <p:cNvSpPr/>
-          <p:nvPr/>
-        </p:nvSpPr>
-        <p:spPr>
-          <a:xfrm>
-            <a:off x="8046720" y="-1645920"/>
-            <a:ext cx="5943600" cy="5943600"/>
-          </a:xfrm>
-          <a:prstGeom prst="ellipse">
-            <a:avLst/>
-          </a:prstGeom>
-          <a:solidFill>
-            <a:srgbClr val="4A9EFF">
-              <a:alpha val="14000"/>
-            </a:srgbClr>
-          </a:solidFill>
-          <a:ln/>
-        </p:spPr>
-      </p:sp>
-      <p:sp>
-        <p:nvSpPr>
-          <p:cNvPr id="3" name="Shape 1"/>
-          <p:cNvSpPr/>
-          <p:nvPr/>
-        </p:nvSpPr>
-        <p:spPr>
-          <a:xfrm>
-            <a:off x="-1828800" y="4389120"/>
-            <a:ext cx="5029200" cy="5029200"/>
-          </a:xfrm>
-          <a:prstGeom prst="ellipse">
-            <a:avLst/>
-          </a:prstGeom>
-          <a:solidFill>
-            <a:srgbClr val="C9A961">
-              <a:alpha val="10000"/>
-            </a:srgbClr>
-          </a:solidFill>
-          <a:ln/>
-        </p:spPr>
-      </p:sp>
-      <p:sp>
-        <p:nvSpPr>
-          <p:cNvPr id="4" name="Text 2"/>
+          <p:cNvPr id="2" name="Text 0"/>
           <p:cNvSpPr/>
           <p:nvPr/>
         </p:nvSpPr>
@@ -10532,7 +10630,7 @@
             <a:r>
               <a:rPr lang="en-US" sz="1400" b="1" spc="500" kern="0" dirty="0">
                 <a:solidFill>
-                  <a:srgbClr val="C9A961"/>
+                  <a:srgbClr val="B1937E"/>
                 </a:solidFill>
                 <a:latin typeface="Calibri" pitchFamily="34" charset="0"/>
                 <a:ea typeface="Calibri" pitchFamily="34" charset="-122"/>
@@ -10546,7 +10644,7 @@
       </p:sp>
       <p:sp>
         <p:nvSpPr>
-          <p:cNvPr id="5" name="Text 3"/>
+          <p:cNvPr id="3" name="Text 1"/>
           <p:cNvSpPr/>
           <p:nvPr/>
         </p:nvSpPr>
@@ -10572,17 +10670,17 @@
               <a:buNone/>
             </a:pPr>
             <a:r>
-              <a:rPr lang="en-US" sz="4200" b="1" dirty="0">
-                <a:solidFill>
-                  <a:srgbClr val="EAF1FA"/>
-                </a:solidFill>
-                <a:latin typeface="Bookman Old Style" pitchFamily="34" charset="0"/>
-                <a:ea typeface="Bookman Old Style" pitchFamily="34" charset="-122"/>
-                <a:cs typeface="Bookman Old Style" pitchFamily="34" charset="-120"/>
+              <a:rPr lang="en-US" sz="3800" b="1" dirty="0">
+                <a:solidFill>
+                  <a:srgbClr val="33302B"/>
+                </a:solidFill>
+                <a:latin typeface="Georgia" pitchFamily="34" charset="0"/>
+                <a:ea typeface="Georgia" pitchFamily="34" charset="-122"/>
+                <a:cs typeface="Georgia" pitchFamily="34" charset="-120"/>
               </a:rPr>
               <a:t>Sessão 04:</a:t>
             </a:r>
-            <a:endParaRPr lang="en-US" sz="4200" dirty="0"/>
+            <a:endParaRPr lang="en-US" sz="3800" dirty="0"/>
           </a:p>
           <a:p>
             <a:pPr indent="0" marL="0">
@@ -10592,23 +10690,23 @@
               <a:buNone/>
             </a:pPr>
             <a:r>
-              <a:rPr lang="en-US" sz="4200" b="1" dirty="0">
-                <a:solidFill>
-                  <a:srgbClr val="EAF1FA"/>
-                </a:solidFill>
-                <a:latin typeface="Bookman Old Style" pitchFamily="34" charset="0"/>
-                <a:ea typeface="Bookman Old Style" pitchFamily="34" charset="-122"/>
-                <a:cs typeface="Bookman Old Style" pitchFamily="34" charset="-120"/>
+              <a:rPr lang="en-US" sz="3800" b="1" dirty="0">
+                <a:solidFill>
+                  <a:srgbClr val="33302B"/>
+                </a:solidFill>
+                <a:latin typeface="Georgia" pitchFamily="34" charset="0"/>
+                <a:ea typeface="Georgia" pitchFamily="34" charset="-122"/>
+                <a:cs typeface="Georgia" pitchFamily="34" charset="-120"/>
               </a:rPr>
               <a:t>A Reunião de Venda</a:t>
             </a:r>
-            <a:endParaRPr lang="en-US" sz="4200" dirty="0"/>
-          </a:p>
-        </p:txBody>
-      </p:sp>
-      <p:sp>
-        <p:nvSpPr>
-          <p:cNvPr id="6" name="Text 4"/>
+            <a:endParaRPr lang="en-US" sz="3800" dirty="0"/>
+          </a:p>
+        </p:txBody>
+      </p:sp>
+      <p:sp>
+        <p:nvSpPr>
+          <p:cNvPr id="4" name="Text 2"/>
           <p:cNvSpPr/>
           <p:nvPr/>
         </p:nvSpPr>
@@ -10633,7 +10731,7 @@
             <a:r>
               <a:rPr lang="en-US" sz="1700" dirty="0">
                 <a:solidFill>
-                  <a:srgbClr val="9FB2C9"/>
+                  <a:srgbClr val="8A7E72"/>
                 </a:solidFill>
                 <a:latin typeface="Calibri" pitchFamily="34" charset="0"/>
                 <a:ea typeface="Calibri" pitchFamily="34" charset="-122"/>
@@ -10647,7 +10745,7 @@
       </p:sp>
       <p:sp>
         <p:nvSpPr>
-          <p:cNvPr id="7" name="Shape 5"/>
+          <p:cNvPr id="5" name="Shape 3"/>
           <p:cNvSpPr/>
           <p:nvPr/>
         </p:nvSpPr>
@@ -10662,51 +10760,36 @@
           <a:noFill/>
           <a:ln w="31750">
             <a:solidFill>
-              <a:srgbClr val="C9A961"/>
+              <a:srgbClr val="B1937E"/>
             </a:solidFill>
             <a:prstDash val="solid"/>
           </a:ln>
         </p:spPr>
       </p:sp>
-      <p:sp>
-        <p:nvSpPr>
-          <p:cNvPr id="8" name="Text 6"/>
-          <p:cNvSpPr/>
-          <p:nvPr/>
-        </p:nvSpPr>
-        <p:spPr>
-          <a:xfrm>
-            <a:off x="640080" y="5943600"/>
-            <a:ext cx="7315200" cy="365760"/>
-          </a:xfrm>
-          <a:prstGeom prst="rect">
-            <a:avLst/>
-          </a:prstGeom>
-          <a:noFill/>
-          <a:ln/>
-        </p:spPr>
-        <p:txBody>
-          <a:bodyPr wrap="square" lIns="0" tIns="0" rIns="0" bIns="0" rtlCol="0" anchor="ctr"/>
-          <a:lstStyle/>
-          <a:p>
-            <a:pPr indent="0" marL="0">
-              <a:buNone/>
-            </a:pPr>
-            <a:r>
-              <a:rPr lang="en-US" sz="1200" spc="400" kern="0" dirty="0">
-                <a:solidFill>
-                  <a:srgbClr val="5C708A"/>
-                </a:solidFill>
-                <a:latin typeface="Calibri" pitchFamily="34" charset="0"/>
-                <a:ea typeface="Calibri" pitchFamily="34" charset="-122"/>
-                <a:cs typeface="Calibri" pitchFamily="34" charset="-120"/>
-              </a:rPr>
-              <a:t>MENTORIA · RL</a:t>
-            </a:r>
-            <a:endParaRPr lang="en-US" sz="1200" dirty="0"/>
-          </a:p>
-        </p:txBody>
-      </p:sp>
+      <p:pic>
+        <p:nvPicPr>
+          <p:cNvPr id="6" name="Image 0" descr="preencoded.png">    </p:cNvPr>
+          <p:cNvPicPr>
+            <a:picLocks noChangeAspect="1"/>
+          </p:cNvPicPr>
+          <p:nvPr/>
+        </p:nvPicPr>
+        <p:blipFill>
+          <a:blip r:embed="rId1"/>
+          <a:stretch>
+            <a:fillRect/>
+          </a:stretch>
+        </p:blipFill>
+        <p:spPr>
+          <a:xfrm>
+            <a:off x="640080" y="502920"/>
+            <a:ext cx="1280160" cy="1320800"/>
+          </a:xfrm>
+          <a:prstGeom prst="rect">
+            <a:avLst/>
+          </a:prstGeom>
+        </p:spPr>
+      </p:pic>
     </p:spTree>
   </p:cSld>
   <p:clrMapOvr>
@@ -10721,7 +10804,7 @@
     <p:bg>
       <p:bgPr>
         <a:solidFill>
-          <a:srgbClr val="0B1D33"/>
+          <a:srgbClr val="F8F6F3"/>
         </a:solidFill>
       </p:bgPr>
     </p:bg>
@@ -10741,51 +10824,7 @@
       </p:grpSpPr>
       <p:sp>
         <p:nvSpPr>
-          <p:cNvPr id="2" name="Shape 0"/>
-          <p:cNvSpPr/>
-          <p:nvPr/>
-        </p:nvSpPr>
-        <p:spPr>
-          <a:xfrm>
-            <a:off x="7772400" y="-1371600"/>
-            <a:ext cx="5486400" cy="5486400"/>
-          </a:xfrm>
-          <a:prstGeom prst="ellipse">
-            <a:avLst/>
-          </a:prstGeom>
-          <a:solidFill>
-            <a:srgbClr val="4A9EFF">
-              <a:alpha val="10000"/>
-            </a:srgbClr>
-          </a:solidFill>
-          <a:ln/>
-        </p:spPr>
-      </p:sp>
-      <p:sp>
-        <p:nvSpPr>
-          <p:cNvPr id="3" name="Shape 1"/>
-          <p:cNvSpPr/>
-          <p:nvPr/>
-        </p:nvSpPr>
-        <p:spPr>
-          <a:xfrm>
-            <a:off x="-1371600" y="4114800"/>
-            <a:ext cx="4572000" cy="4572000"/>
-          </a:xfrm>
-          <a:prstGeom prst="ellipse">
-            <a:avLst/>
-          </a:prstGeom>
-          <a:solidFill>
-            <a:srgbClr val="C9A961">
-              <a:alpha val="8000"/>
-            </a:srgbClr>
-          </a:solidFill>
-          <a:ln/>
-        </p:spPr>
-      </p:sp>
-      <p:sp>
-        <p:nvSpPr>
-          <p:cNvPr id="4" name="Text 2"/>
+          <p:cNvPr id="2" name="Text 0"/>
           <p:cNvSpPr/>
           <p:nvPr/>
         </p:nvSpPr>
@@ -10810,11 +10849,11 @@
             <a:r>
               <a:rPr lang="en-US" sz="15000" b="1" dirty="0">
                 <a:solidFill>
-                  <a:srgbClr val="16314F"/>
-                </a:solidFill>
-                <a:latin typeface="Bookman Old Style" pitchFamily="34" charset="0"/>
-                <a:ea typeface="Bookman Old Style" pitchFamily="34" charset="-122"/>
-                <a:cs typeface="Bookman Old Style" pitchFamily="34" charset="-120"/>
+                  <a:srgbClr val="EADFD0"/>
+                </a:solidFill>
+                <a:latin typeface="Georgia" pitchFamily="34" charset="0"/>
+                <a:ea typeface="Georgia" pitchFamily="34" charset="-122"/>
+                <a:cs typeface="Georgia" pitchFamily="34" charset="-120"/>
               </a:rPr>
               <a:t>A</a:t>
             </a:r>
@@ -10824,7 +10863,7 @@
       </p:sp>
       <p:sp>
         <p:nvSpPr>
-          <p:cNvPr id="5" name="Text 3"/>
+          <p:cNvPr id="3" name="Text 1"/>
           <p:cNvSpPr/>
           <p:nvPr/>
         </p:nvSpPr>
@@ -10849,7 +10888,7 @@
             <a:r>
               <a:rPr lang="en-US" sz="1300" b="1" spc="400" kern="0" dirty="0">
                 <a:solidFill>
-                  <a:srgbClr val="C9A961"/>
+                  <a:srgbClr val="B1937E"/>
                 </a:solidFill>
                 <a:latin typeface="Calibri" pitchFamily="34" charset="0"/>
                 <a:ea typeface="Calibri" pitchFamily="34" charset="-122"/>
@@ -10863,7 +10902,7 @@
       </p:sp>
       <p:sp>
         <p:nvSpPr>
-          <p:cNvPr id="6" name="Text 4"/>
+          <p:cNvPr id="4" name="Text 2"/>
           <p:cNvSpPr/>
           <p:nvPr/>
         </p:nvSpPr>
@@ -10889,23 +10928,23 @@
               <a:buNone/>
             </a:pPr>
             <a:r>
-              <a:rPr lang="en-US" sz="4400" b="1" dirty="0">
-                <a:solidFill>
-                  <a:srgbClr val="EAF1FA"/>
-                </a:solidFill>
-                <a:latin typeface="Bookman Old Style" pitchFamily="34" charset="0"/>
-                <a:ea typeface="Bookman Old Style" pitchFamily="34" charset="-122"/>
-                <a:cs typeface="Bookman Old Style" pitchFamily="34" charset="-120"/>
+              <a:rPr lang="en-US" sz="4000" b="1" dirty="0">
+                <a:solidFill>
+                  <a:srgbClr val="33302B"/>
+                </a:solidFill>
+                <a:latin typeface="Georgia" pitchFamily="34" charset="0"/>
+                <a:ea typeface="Georgia" pitchFamily="34" charset="-122"/>
+                <a:cs typeface="Georgia" pitchFamily="34" charset="-120"/>
               </a:rPr>
               <a:t>A Velocidade Fecha Negócios</a:t>
             </a:r>
-            <a:endParaRPr lang="en-US" sz="4400" dirty="0"/>
-          </a:p>
-        </p:txBody>
-      </p:sp>
-      <p:sp>
-        <p:nvSpPr>
-          <p:cNvPr id="7" name="Text 5"/>
+            <a:endParaRPr lang="en-US" sz="4000" dirty="0"/>
+          </a:p>
+        </p:txBody>
+      </p:sp>
+      <p:sp>
+        <p:nvSpPr>
+          <p:cNvPr id="5" name="Text 3"/>
           <p:cNvSpPr/>
           <p:nvPr/>
         </p:nvSpPr>
@@ -10930,7 +10969,7 @@
             <a:r>
               <a:rPr lang="en-US" sz="1600" dirty="0">
                 <a:solidFill>
-                  <a:srgbClr val="9FB2C9"/>
+                  <a:srgbClr val="8A7E72"/>
                 </a:solidFill>
                 <a:latin typeface="Calibri" pitchFamily="34" charset="0"/>
                 <a:ea typeface="Calibri" pitchFamily="34" charset="-122"/>
@@ -10944,7 +10983,7 @@
       </p:sp>
       <p:sp>
         <p:nvSpPr>
-          <p:cNvPr id="8" name="Shape 6"/>
+          <p:cNvPr id="6" name="Shape 4"/>
           <p:cNvSpPr/>
           <p:nvPr/>
         </p:nvSpPr>
@@ -10959,7 +10998,7 @@
           <a:noFill/>
           <a:ln w="9525">
             <a:solidFill>
-              <a:srgbClr val="5C708A">
+              <a:srgbClr val="A89A86">
                 <a:alpha val="60000"/>
               </a:srgbClr>
             </a:solidFill>
@@ -10969,7 +11008,7 @@
       </p:sp>
       <p:sp>
         <p:nvSpPr>
-          <p:cNvPr id="9" name="Text 7"/>
+          <p:cNvPr id="7" name="Text 5"/>
           <p:cNvSpPr/>
           <p:nvPr/>
         </p:nvSpPr>
@@ -10994,7 +11033,7 @@
             <a:r>
               <a:rPr lang="en-US" sz="900" dirty="0">
                 <a:solidFill>
-                  <a:srgbClr val="5C708A"/>
+                  <a:srgbClr val="A89A86"/>
                 </a:solidFill>
                 <a:latin typeface="Calibri" pitchFamily="34" charset="0"/>
                 <a:ea typeface="Calibri" pitchFamily="34" charset="-122"/>
@@ -11008,7 +11047,7 @@
       </p:sp>
       <p:sp>
         <p:nvSpPr>
-          <p:cNvPr id="10" name="Text 8"/>
+          <p:cNvPr id="8" name="Text 6"/>
           <p:cNvSpPr/>
           <p:nvPr/>
         </p:nvSpPr>
@@ -11033,7 +11072,7 @@
             <a:r>
               <a:rPr lang="en-US" sz="900" dirty="0">
                 <a:solidFill>
-                  <a:srgbClr val="5C708A"/>
+                  <a:srgbClr val="A89A86"/>
                 </a:solidFill>
                 <a:latin typeface="Calibri" pitchFamily="34" charset="0"/>
                 <a:ea typeface="Calibri" pitchFamily="34" charset="-122"/>
@@ -11059,7 +11098,7 @@
     <p:bg>
       <p:bgPr>
         <a:solidFill>
-          <a:srgbClr val="0B1D33"/>
+          <a:srgbClr val="F8F6F3"/>
         </a:solidFill>
       </p:bgPr>
     </p:bg>
@@ -11104,7 +11143,7 @@
             <a:r>
               <a:rPr lang="en-US" sz="1200" b="1" spc="300" kern="0" dirty="0">
                 <a:solidFill>
-                  <a:srgbClr val="4A9EFF"/>
+                  <a:srgbClr val="9A7B66"/>
                 </a:solidFill>
                 <a:latin typeface="Calibri" pitchFamily="34" charset="0"/>
                 <a:ea typeface="Calibri" pitchFamily="34" charset="-122"/>
@@ -11146,11 +11185,11 @@
             <a:r>
               <a:rPr lang="en-US" sz="3200" b="1" dirty="0">
                 <a:solidFill>
-                  <a:srgbClr val="EAF1FA"/>
-                </a:solidFill>
-                <a:latin typeface="Bookman Old Style" pitchFamily="34" charset="0"/>
-                <a:ea typeface="Bookman Old Style" pitchFamily="34" charset="-122"/>
-                <a:cs typeface="Bookman Old Style" pitchFamily="34" charset="-120"/>
+                  <a:srgbClr val="33302B"/>
+                </a:solidFill>
+                <a:latin typeface="Georgia" pitchFamily="34" charset="0"/>
+                <a:ea typeface="Georgia" pitchFamily="34" charset="-122"/>
+                <a:cs typeface="Georgia" pitchFamily="34" charset="-120"/>
               </a:rPr>
               <a:t>O lead arrefece a cada minuto</a:t>
             </a:r>
@@ -11175,13 +11214,18 @@
             </a:avLst>
           </a:prstGeom>
           <a:solidFill>
-            <a:srgbClr val="13283F"/>
+            <a:srgbClr val="FFFFFF"/>
           </a:solidFill>
-          <a:ln/>
+          <a:ln w="12700">
+            <a:solidFill>
+              <a:srgbClr val="E3D9CC"/>
+            </a:solidFill>
+            <a:prstDash val="solid"/>
+          </a:ln>
           <a:effectLst>
-            <a:outerShdw sx="100000" sy="100000" kx="0" ky="0" algn="bl" rotWithShape="0" blurRad="127000" dist="38100" dir="5400000">
-              <a:srgbClr val="000000">
-                <a:alpha val="28000"/>
+            <a:outerShdw sx="100000" sy="100000" kx="0" ky="0" algn="bl" rotWithShape="0" blurRad="114300" dist="38100" dir="5400000">
+              <a:srgbClr val="7A6A55">
+                <a:alpha val="12000"/>
               </a:srgbClr>
             </a:outerShdw>
           </a:effectLst>
@@ -11214,11 +11258,11 @@
             <a:r>
               <a:rPr lang="en-US" sz="4600" b="1" dirty="0">
                 <a:solidFill>
-                  <a:srgbClr val="C9A961"/>
-                </a:solidFill>
-                <a:latin typeface="Bookman Old Style" pitchFamily="34" charset="0"/>
-                <a:ea typeface="Bookman Old Style" pitchFamily="34" charset="-122"/>
-                <a:cs typeface="Bookman Old Style" pitchFamily="34" charset="-120"/>
+                  <a:srgbClr val="B1937E"/>
+                </a:solidFill>
+                <a:latin typeface="Georgia" pitchFamily="34" charset="0"/>
+                <a:ea typeface="Georgia" pitchFamily="34" charset="-122"/>
+                <a:cs typeface="Georgia" pitchFamily="34" charset="-120"/>
               </a:rPr>
               <a:t>10min</a:t>
             </a:r>
@@ -11253,7 +11297,7 @@
             <a:r>
               <a:rPr lang="en-US" sz="1500" b="1" dirty="0">
                 <a:solidFill>
-                  <a:srgbClr val="EAF1FA"/>
+                  <a:srgbClr val="33302B"/>
                 </a:solidFill>
                 <a:latin typeface="Calibri" pitchFamily="34" charset="0"/>
                 <a:ea typeface="Calibri" pitchFamily="34" charset="-122"/>
@@ -11282,7 +11326,7 @@
           <a:noFill/>
           <a:ln w="9525">
             <a:solidFill>
-              <a:srgbClr val="5C708A">
+              <a:srgbClr val="A89A86">
                 <a:alpha val="60000"/>
               </a:srgbClr>
             </a:solidFill>
@@ -11317,7 +11361,7 @@
             <a:r>
               <a:rPr lang="en-US" sz="1300" dirty="0">
                 <a:solidFill>
-                  <a:srgbClr val="9FB2C9"/>
+                  <a:srgbClr val="8A7E72"/>
                 </a:solidFill>
                 <a:latin typeface="Calibri" pitchFamily="34" charset="0"/>
                 <a:ea typeface="Calibri" pitchFamily="34" charset="-122"/>
@@ -11346,13 +11390,18 @@
             </a:avLst>
           </a:prstGeom>
           <a:solidFill>
-            <a:srgbClr val="13283F"/>
+            <a:srgbClr val="FFFFFF"/>
           </a:solidFill>
-          <a:ln/>
+          <a:ln w="12700">
+            <a:solidFill>
+              <a:srgbClr val="E3D9CC"/>
+            </a:solidFill>
+            <a:prstDash val="solid"/>
+          </a:ln>
           <a:effectLst>
-            <a:outerShdw sx="100000" sy="100000" kx="0" ky="0" algn="bl" rotWithShape="0" blurRad="127000" dist="38100" dir="5400000">
-              <a:srgbClr val="000000">
-                <a:alpha val="28000"/>
+            <a:outerShdw sx="100000" sy="100000" kx="0" ky="0" algn="bl" rotWithShape="0" blurRad="114300" dist="38100" dir="5400000">
+              <a:srgbClr val="7A6A55">
+                <a:alpha val="12000"/>
               </a:srgbClr>
             </a:outerShdw>
           </a:effectLst>
@@ -11385,11 +11434,11 @@
             <a:r>
               <a:rPr lang="en-US" sz="4600" b="1" dirty="0">
                 <a:solidFill>
-                  <a:srgbClr val="4A9EFF"/>
-                </a:solidFill>
-                <a:latin typeface="Bookman Old Style" pitchFamily="34" charset="0"/>
-                <a:ea typeface="Bookman Old Style" pitchFamily="34" charset="-122"/>
-                <a:cs typeface="Bookman Old Style" pitchFamily="34" charset="-120"/>
+                  <a:srgbClr val="9A7B66"/>
+                </a:solidFill>
+                <a:latin typeface="Georgia" pitchFamily="34" charset="0"/>
+                <a:ea typeface="Georgia" pitchFamily="34" charset="-122"/>
+                <a:cs typeface="Georgia" pitchFamily="34" charset="-120"/>
               </a:rPr>
               <a:t>5</a:t>
             </a:r>
@@ -11424,7 +11473,7 @@
             <a:r>
               <a:rPr lang="en-US" sz="1500" b="1" dirty="0">
                 <a:solidFill>
-                  <a:srgbClr val="EAF1FA"/>
+                  <a:srgbClr val="33302B"/>
                 </a:solidFill>
                 <a:latin typeface="Calibri" pitchFamily="34" charset="0"/>
                 <a:ea typeface="Calibri" pitchFamily="34" charset="-122"/>
@@ -11453,7 +11502,7 @@
           <a:noFill/>
           <a:ln w="9525">
             <a:solidFill>
-              <a:srgbClr val="5C708A">
+              <a:srgbClr val="A89A86">
                 <a:alpha val="60000"/>
               </a:srgbClr>
             </a:solidFill>
@@ -11488,7 +11537,7 @@
             <a:r>
               <a:rPr lang="en-US" sz="1300" dirty="0">
                 <a:solidFill>
-                  <a:srgbClr val="9FB2C9"/>
+                  <a:srgbClr val="8A7E72"/>
                 </a:solidFill>
                 <a:latin typeface="Calibri" pitchFamily="34" charset="0"/>
                 <a:ea typeface="Calibri" pitchFamily="34" charset="-122"/>
@@ -11517,13 +11566,18 @@
             </a:avLst>
           </a:prstGeom>
           <a:solidFill>
-            <a:srgbClr val="13283F"/>
+            <a:srgbClr val="FFFFFF"/>
           </a:solidFill>
-          <a:ln/>
+          <a:ln w="12700">
+            <a:solidFill>
+              <a:srgbClr val="E3D9CC"/>
+            </a:solidFill>
+            <a:prstDash val="solid"/>
+          </a:ln>
           <a:effectLst>
-            <a:outerShdw sx="100000" sy="100000" kx="0" ky="0" algn="bl" rotWithShape="0" blurRad="127000" dist="38100" dir="5400000">
-              <a:srgbClr val="000000">
-                <a:alpha val="28000"/>
+            <a:outerShdw sx="100000" sy="100000" kx="0" ky="0" algn="bl" rotWithShape="0" blurRad="114300" dist="38100" dir="5400000">
+              <a:srgbClr val="7A6A55">
+                <a:alpha val="12000"/>
               </a:srgbClr>
             </a:outerShdw>
           </a:effectLst>
@@ -11556,11 +11610,11 @@
             <a:r>
               <a:rPr lang="en-US" sz="4600" b="1" dirty="0">
                 <a:solidFill>
-                  <a:srgbClr val="4A9EFF"/>
-                </a:solidFill>
-                <a:latin typeface="Bookman Old Style" pitchFamily="34" charset="0"/>
-                <a:ea typeface="Bookman Old Style" pitchFamily="34" charset="-122"/>
-                <a:cs typeface="Bookman Old Style" pitchFamily="34" charset="-120"/>
+                  <a:srgbClr val="9A7B66"/>
+                </a:solidFill>
+                <a:latin typeface="Georgia" pitchFamily="34" charset="0"/>
+                <a:ea typeface="Georgia" pitchFamily="34" charset="-122"/>
+                <a:cs typeface="Georgia" pitchFamily="34" charset="-120"/>
               </a:rPr>
               <a:t>1º</a:t>
             </a:r>
@@ -11595,7 +11649,7 @@
             <a:r>
               <a:rPr lang="en-US" sz="1500" b="1" dirty="0">
                 <a:solidFill>
-                  <a:srgbClr val="EAF1FA"/>
+                  <a:srgbClr val="33302B"/>
                 </a:solidFill>
                 <a:latin typeface="Calibri" pitchFamily="34" charset="0"/>
                 <a:ea typeface="Calibri" pitchFamily="34" charset="-122"/>
@@ -11624,7 +11678,7 @@
           <a:noFill/>
           <a:ln w="9525">
             <a:solidFill>
-              <a:srgbClr val="5C708A">
+              <a:srgbClr val="A89A86">
                 <a:alpha val="60000"/>
               </a:srgbClr>
             </a:solidFill>
@@ -11659,7 +11713,7 @@
             <a:r>
               <a:rPr lang="en-US" sz="1300" dirty="0">
                 <a:solidFill>
-                  <a:srgbClr val="9FB2C9"/>
+                  <a:srgbClr val="8A7E72"/>
                 </a:solidFill>
                 <a:latin typeface="Calibri" pitchFamily="34" charset="0"/>
                 <a:ea typeface="Calibri" pitchFamily="34" charset="-122"/>
@@ -11698,7 +11752,7 @@
             <a:r>
               <a:rPr lang="en-US" sz="1500" i="1" dirty="0">
                 <a:solidFill>
-                  <a:srgbClr val="C9A961"/>
+                  <a:srgbClr val="B1937E"/>
                 </a:solidFill>
                 <a:latin typeface="Calibri" pitchFamily="34" charset="0"/>
                 <a:ea typeface="Calibri" pitchFamily="34" charset="-122"/>
@@ -11727,7 +11781,7 @@
           <a:noFill/>
           <a:ln w="9525">
             <a:solidFill>
-              <a:srgbClr val="5C708A">
+              <a:srgbClr val="A89A86">
                 <a:alpha val="60000"/>
               </a:srgbClr>
             </a:solidFill>
@@ -11762,7 +11816,7 @@
             <a:r>
               <a:rPr lang="en-US" sz="900" dirty="0">
                 <a:solidFill>
-                  <a:srgbClr val="5C708A"/>
+                  <a:srgbClr val="A89A86"/>
                 </a:solidFill>
                 <a:latin typeface="Calibri" pitchFamily="34" charset="0"/>
                 <a:ea typeface="Calibri" pitchFamily="34" charset="-122"/>
@@ -11801,7 +11855,7 @@
             <a:r>
               <a:rPr lang="en-US" sz="900" dirty="0">
                 <a:solidFill>
-                  <a:srgbClr val="5C708A"/>
+                  <a:srgbClr val="A89A86"/>
                 </a:solidFill>
                 <a:latin typeface="Calibri" pitchFamily="34" charset="0"/>
                 <a:ea typeface="Calibri" pitchFamily="34" charset="-122"/>
@@ -11827,7 +11881,7 @@
     <p:bg>
       <p:bgPr>
         <a:solidFill>
-          <a:srgbClr val="0B1D33"/>
+          <a:srgbClr val="F8F6F3"/>
         </a:solidFill>
       </p:bgPr>
     </p:bg>
@@ -11872,7 +11926,7 @@
             <a:r>
               <a:rPr lang="en-US" sz="1200" b="1" spc="300" kern="0" dirty="0">
                 <a:solidFill>
-                  <a:srgbClr val="4A9EFF"/>
+                  <a:srgbClr val="9A7B66"/>
                 </a:solidFill>
                 <a:latin typeface="Calibri" pitchFamily="34" charset="0"/>
                 <a:ea typeface="Calibri" pitchFamily="34" charset="-122"/>
@@ -11914,11 +11968,11 @@
             <a:r>
               <a:rPr lang="en-US" sz="3200" b="1" dirty="0">
                 <a:solidFill>
-                  <a:srgbClr val="EAF1FA"/>
-                </a:solidFill>
-                <a:latin typeface="Bookman Old Style" pitchFamily="34" charset="0"/>
-                <a:ea typeface="Bookman Old Style" pitchFamily="34" charset="-122"/>
-                <a:cs typeface="Bookman Old Style" pitchFamily="34" charset="-120"/>
+                  <a:srgbClr val="33302B"/>
+                </a:solidFill>
+                <a:latin typeface="Georgia" pitchFamily="34" charset="0"/>
+                <a:ea typeface="Georgia" pitchFamily="34" charset="-122"/>
+                <a:cs typeface="Georgia" pitchFamily="34" charset="-120"/>
               </a:rPr>
               <a:t>Quem responde primeiro, comanda</a:t>
             </a:r>
@@ -11943,13 +11997,18 @@
             </a:avLst>
           </a:prstGeom>
           <a:solidFill>
-            <a:srgbClr val="13283F"/>
+            <a:srgbClr val="FFFFFF"/>
           </a:solidFill>
-          <a:ln/>
+          <a:ln w="12700">
+            <a:solidFill>
+              <a:srgbClr val="E3D9CC"/>
+            </a:solidFill>
+            <a:prstDash val="solid"/>
+          </a:ln>
           <a:effectLst>
-            <a:outerShdw sx="100000" sy="100000" kx="0" ky="0" algn="bl" rotWithShape="0" blurRad="127000" dist="38100" dir="5400000">
-              <a:srgbClr val="000000">
-                <a:alpha val="28000"/>
+            <a:outerShdw sx="100000" sy="100000" kx="0" ky="0" algn="bl" rotWithShape="0" blurRad="114300" dist="38100" dir="5400000">
+              <a:srgbClr val="7A6A55">
+                <a:alpha val="12000"/>
               </a:srgbClr>
             </a:outerShdw>
           </a:effectLst>
@@ -11970,9 +12029,14 @@
             <a:avLst/>
           </a:prstGeom>
           <a:solidFill>
-            <a:srgbClr val="16314F"/>
+            <a:srgbClr val="EADFD0"/>
           </a:solidFill>
-          <a:ln/>
+          <a:ln w="9525">
+            <a:solidFill>
+              <a:srgbClr val="E3D9CC"/>
+            </a:solidFill>
+            <a:prstDash val="solid"/>
+          </a:ln>
         </p:spPr>
       </p:sp>
       <p:pic>
@@ -12026,11 +12090,11 @@
             <a:r>
               <a:rPr lang="en-US" sz="1900" b="1" dirty="0">
                 <a:solidFill>
-                  <a:srgbClr val="C9A961"/>
-                </a:solidFill>
-                <a:latin typeface="Bookman Old Style" pitchFamily="34" charset="0"/>
-                <a:ea typeface="Bookman Old Style" pitchFamily="34" charset="-122"/>
-                <a:cs typeface="Bookman Old Style" pitchFamily="34" charset="-120"/>
+                  <a:srgbClr val="B1937E"/>
+                </a:solidFill>
+                <a:latin typeface="Georgia" pitchFamily="34" charset="0"/>
+                <a:ea typeface="Georgia" pitchFamily="34" charset="-122"/>
+                <a:cs typeface="Georgia" pitchFamily="34" charset="-120"/>
               </a:rPr>
               <a:t>Intenção no pico</a:t>
             </a:r>
@@ -12065,7 +12129,7 @@
             <a:r>
               <a:rPr lang="en-US" sz="1400" dirty="0">
                 <a:solidFill>
-                  <a:srgbClr val="9FB2C9"/>
+                  <a:srgbClr val="8A7E72"/>
                 </a:solidFill>
                 <a:latin typeface="Calibri" pitchFamily="34" charset="0"/>
                 <a:ea typeface="Calibri" pitchFamily="34" charset="-122"/>
@@ -12094,13 +12158,18 @@
             </a:avLst>
           </a:prstGeom>
           <a:solidFill>
-            <a:srgbClr val="13283F"/>
+            <a:srgbClr val="FFFFFF"/>
           </a:solidFill>
-          <a:ln/>
+          <a:ln w="12700">
+            <a:solidFill>
+              <a:srgbClr val="E3D9CC"/>
+            </a:solidFill>
+            <a:prstDash val="solid"/>
+          </a:ln>
           <a:effectLst>
-            <a:outerShdw sx="100000" sy="100000" kx="0" ky="0" algn="bl" rotWithShape="0" blurRad="127000" dist="38100" dir="5400000">
-              <a:srgbClr val="000000">
-                <a:alpha val="28000"/>
+            <a:outerShdw sx="100000" sy="100000" kx="0" ky="0" algn="bl" rotWithShape="0" blurRad="114300" dist="38100" dir="5400000">
+              <a:srgbClr val="7A6A55">
+                <a:alpha val="12000"/>
               </a:srgbClr>
             </a:outerShdw>
           </a:effectLst>
@@ -12121,9 +12190,14 @@
             <a:avLst/>
           </a:prstGeom>
           <a:solidFill>
-            <a:srgbClr val="16314F"/>
+            <a:srgbClr val="EADFD0"/>
           </a:solidFill>
-          <a:ln/>
+          <a:ln w="9525">
+            <a:solidFill>
+              <a:srgbClr val="E3D9CC"/>
+            </a:solidFill>
+            <a:prstDash val="solid"/>
+          </a:ln>
         </p:spPr>
       </p:sp>
       <p:pic>
@@ -12177,11 +12251,11 @@
             <a:r>
               <a:rPr lang="en-US" sz="1900" b="1" dirty="0">
                 <a:solidFill>
-                  <a:srgbClr val="C9A961"/>
-                </a:solidFill>
-                <a:latin typeface="Bookman Old Style" pitchFamily="34" charset="0"/>
-                <a:ea typeface="Bookman Old Style" pitchFamily="34" charset="-122"/>
-                <a:cs typeface="Bookman Old Style" pitchFamily="34" charset="-120"/>
+                  <a:srgbClr val="B1937E"/>
+                </a:solidFill>
+                <a:latin typeface="Georgia" pitchFamily="34" charset="0"/>
+                <a:ea typeface="Georgia" pitchFamily="34" charset="-122"/>
+                <a:cs typeface="Georgia" pitchFamily="34" charset="-120"/>
               </a:rPr>
               <a:t>Primeira impressão</a:t>
             </a:r>
@@ -12216,7 +12290,7 @@
             <a:r>
               <a:rPr lang="en-US" sz="1400" dirty="0">
                 <a:solidFill>
-                  <a:srgbClr val="9FB2C9"/>
+                  <a:srgbClr val="8A7E72"/>
                 </a:solidFill>
                 <a:latin typeface="Calibri" pitchFamily="34" charset="0"/>
                 <a:ea typeface="Calibri" pitchFamily="34" charset="-122"/>
@@ -12245,13 +12319,18 @@
             </a:avLst>
           </a:prstGeom>
           <a:solidFill>
-            <a:srgbClr val="13283F"/>
+            <a:srgbClr val="FFFFFF"/>
           </a:solidFill>
-          <a:ln/>
+          <a:ln w="12700">
+            <a:solidFill>
+              <a:srgbClr val="E3D9CC"/>
+            </a:solidFill>
+            <a:prstDash val="solid"/>
+          </a:ln>
           <a:effectLst>
-            <a:outerShdw sx="100000" sy="100000" kx="0" ky="0" algn="bl" rotWithShape="0" blurRad="127000" dist="38100" dir="5400000">
-              <a:srgbClr val="000000">
-                <a:alpha val="28000"/>
+            <a:outerShdw sx="100000" sy="100000" kx="0" ky="0" algn="bl" rotWithShape="0" blurRad="114300" dist="38100" dir="5400000">
+              <a:srgbClr val="7A6A55">
+                <a:alpha val="12000"/>
               </a:srgbClr>
             </a:outerShdw>
           </a:effectLst>
@@ -12272,9 +12351,14 @@
             <a:avLst/>
           </a:prstGeom>
           <a:solidFill>
-            <a:srgbClr val="16314F"/>
+            <a:srgbClr val="EADFD0"/>
           </a:solidFill>
-          <a:ln/>
+          <a:ln w="9525">
+            <a:solidFill>
+              <a:srgbClr val="E3D9CC"/>
+            </a:solidFill>
+            <a:prstDash val="solid"/>
+          </a:ln>
         </p:spPr>
       </p:sp>
       <p:pic>
@@ -12328,11 +12412,11 @@
             <a:r>
               <a:rPr lang="en-US" sz="1900" b="1" dirty="0">
                 <a:solidFill>
-                  <a:srgbClr val="C9A961"/>
-                </a:solidFill>
-                <a:latin typeface="Bookman Old Style" pitchFamily="34" charset="0"/>
-                <a:ea typeface="Bookman Old Style" pitchFamily="34" charset="-122"/>
-                <a:cs typeface="Bookman Old Style" pitchFamily="34" charset="-120"/>
+                  <a:srgbClr val="B1937E"/>
+                </a:solidFill>
+                <a:latin typeface="Georgia" pitchFamily="34" charset="0"/>
+                <a:ea typeface="Georgia" pitchFamily="34" charset="-122"/>
+                <a:cs typeface="Georgia" pitchFamily="34" charset="-120"/>
               </a:rPr>
               <a:t>Vantagem competitiva</a:t>
             </a:r>
@@ -12367,7 +12451,7 @@
             <a:r>
               <a:rPr lang="en-US" sz="1400" dirty="0">
                 <a:solidFill>
-                  <a:srgbClr val="9FB2C9"/>
+                  <a:srgbClr val="8A7E72"/>
                 </a:solidFill>
                 <a:latin typeface="Calibri" pitchFamily="34" charset="0"/>
                 <a:ea typeface="Calibri" pitchFamily="34" charset="-122"/>
@@ -12396,7 +12480,7 @@
           <a:noFill/>
           <a:ln w="9525">
             <a:solidFill>
-              <a:srgbClr val="5C708A">
+              <a:srgbClr val="A89A86">
                 <a:alpha val="60000"/>
               </a:srgbClr>
             </a:solidFill>
@@ -12431,7 +12515,7 @@
             <a:r>
               <a:rPr lang="en-US" sz="900" dirty="0">
                 <a:solidFill>
-                  <a:srgbClr val="5C708A"/>
+                  <a:srgbClr val="A89A86"/>
                 </a:solidFill>
                 <a:latin typeface="Calibri" pitchFamily="34" charset="0"/>
                 <a:ea typeface="Calibri" pitchFamily="34" charset="-122"/>
@@ -12470,7 +12554,7 @@
             <a:r>
               <a:rPr lang="en-US" sz="900" dirty="0">
                 <a:solidFill>
-                  <a:srgbClr val="5C708A"/>
+                  <a:srgbClr val="A89A86"/>
                 </a:solidFill>
                 <a:latin typeface="Calibri" pitchFamily="34" charset="0"/>
                 <a:ea typeface="Calibri" pitchFamily="34" charset="-122"/>
@@ -12496,7 +12580,7 @@
     <p:bg>
       <p:bgPr>
         <a:solidFill>
-          <a:srgbClr val="0B1D33"/>
+          <a:srgbClr val="F8F6F3"/>
         </a:solidFill>
       </p:bgPr>
     </p:bg>
@@ -12541,7 +12625,7 @@
             <a:r>
               <a:rPr lang="en-US" sz="1200" b="1" spc="300" kern="0" dirty="0">
                 <a:solidFill>
-                  <a:srgbClr val="4A9EFF"/>
+                  <a:srgbClr val="9A7B66"/>
                 </a:solidFill>
                 <a:latin typeface="Calibri" pitchFamily="34" charset="0"/>
                 <a:ea typeface="Calibri" pitchFamily="34" charset="-122"/>
@@ -12583,11 +12667,11 @@
             <a:r>
               <a:rPr lang="en-US" sz="3200" b="1" dirty="0">
                 <a:solidFill>
-                  <a:srgbClr val="EAF1FA"/>
-                </a:solidFill>
-                <a:latin typeface="Bookman Old Style" pitchFamily="34" charset="0"/>
-                <a:ea typeface="Bookman Old Style" pitchFamily="34" charset="-122"/>
-                <a:cs typeface="Bookman Old Style" pitchFamily="34" charset="-120"/>
+                  <a:srgbClr val="33302B"/>
+                </a:solidFill>
+                <a:latin typeface="Georgia" pitchFamily="34" charset="0"/>
+                <a:ea typeface="Georgia" pitchFamily="34" charset="-122"/>
+                <a:cs typeface="Georgia" pitchFamily="34" charset="-120"/>
               </a:rPr>
               <a:t>O formulário de intake</a:t>
             </a:r>
@@ -12612,13 +12696,18 @@
             </a:avLst>
           </a:prstGeom>
           <a:solidFill>
-            <a:srgbClr val="13283F"/>
+            <a:srgbClr val="FFFFFF"/>
           </a:solidFill>
-          <a:ln/>
+          <a:ln w="12700">
+            <a:solidFill>
+              <a:srgbClr val="E3D9CC"/>
+            </a:solidFill>
+            <a:prstDash val="solid"/>
+          </a:ln>
           <a:effectLst>
-            <a:outerShdw sx="100000" sy="100000" kx="0" ky="0" algn="bl" rotWithShape="0" blurRad="127000" dist="38100" dir="5400000">
-              <a:srgbClr val="000000">
-                <a:alpha val="28000"/>
+            <a:outerShdw sx="100000" sy="100000" kx="0" ky="0" algn="bl" rotWithShape="0" blurRad="114300" dist="38100" dir="5400000">
+              <a:srgbClr val="7A6A55">
+                <a:alpha val="12000"/>
               </a:srgbClr>
             </a:outerShdw>
           </a:effectLst>
@@ -12639,9 +12728,14 @@
             <a:avLst/>
           </a:prstGeom>
           <a:solidFill>
-            <a:srgbClr val="16314F"/>
+            <a:srgbClr val="EADFD0"/>
           </a:solidFill>
-          <a:ln/>
+          <a:ln w="9525">
+            <a:solidFill>
+              <a:srgbClr val="E3D9CC"/>
+            </a:solidFill>
+            <a:prstDash val="solid"/>
+          </a:ln>
         </p:spPr>
       </p:sp>
       <p:pic>
@@ -12695,11 +12789,11 @@
             <a:r>
               <a:rPr lang="en-US" sz="1800" b="1" dirty="0">
                 <a:solidFill>
-                  <a:srgbClr val="C9A961"/>
-                </a:solidFill>
-                <a:latin typeface="Bookman Old Style" pitchFamily="34" charset="0"/>
-                <a:ea typeface="Bookman Old Style" pitchFamily="34" charset="-122"/>
-                <a:cs typeface="Bookman Old Style" pitchFamily="34" charset="-120"/>
+                  <a:srgbClr val="B1937E"/>
+                </a:solidFill>
+                <a:latin typeface="Georgia" pitchFamily="34" charset="0"/>
+                <a:ea typeface="Georgia" pitchFamily="34" charset="-122"/>
+                <a:cs typeface="Georgia" pitchFamily="34" charset="-120"/>
               </a:rPr>
               <a:t>Data e local</a:t>
             </a:r>
@@ -12734,7 +12828,7 @@
             <a:r>
               <a:rPr lang="en-US" sz="1350" dirty="0">
                 <a:solidFill>
-                  <a:srgbClr val="9FB2C9"/>
+                  <a:srgbClr val="8A7E72"/>
                 </a:solidFill>
                 <a:latin typeface="Calibri" pitchFamily="34" charset="0"/>
                 <a:ea typeface="Calibri" pitchFamily="34" charset="-122"/>
@@ -12763,13 +12857,18 @@
             </a:avLst>
           </a:prstGeom>
           <a:solidFill>
-            <a:srgbClr val="13283F"/>
+            <a:srgbClr val="FFFFFF"/>
           </a:solidFill>
-          <a:ln/>
+          <a:ln w="12700">
+            <a:solidFill>
+              <a:srgbClr val="E3D9CC"/>
+            </a:solidFill>
+            <a:prstDash val="solid"/>
+          </a:ln>
           <a:effectLst>
-            <a:outerShdw sx="100000" sy="100000" kx="0" ky="0" algn="bl" rotWithShape="0" blurRad="127000" dist="38100" dir="5400000">
-              <a:srgbClr val="000000">
-                <a:alpha val="28000"/>
+            <a:outerShdw sx="100000" sy="100000" kx="0" ky="0" algn="bl" rotWithShape="0" blurRad="114300" dist="38100" dir="5400000">
+              <a:srgbClr val="7A6A55">
+                <a:alpha val="12000"/>
               </a:srgbClr>
             </a:outerShdw>
           </a:effectLst>
@@ -12790,9 +12889,14 @@
             <a:avLst/>
           </a:prstGeom>
           <a:solidFill>
-            <a:srgbClr val="16314F"/>
+            <a:srgbClr val="EADFD0"/>
           </a:solidFill>
-          <a:ln/>
+          <a:ln w="9525">
+            <a:solidFill>
+              <a:srgbClr val="E3D9CC"/>
+            </a:solidFill>
+            <a:prstDash val="solid"/>
+          </a:ln>
         </p:spPr>
       </p:sp>
       <p:pic>
@@ -12846,11 +12950,11 @@
             <a:r>
               <a:rPr lang="en-US" sz="1800" b="1" dirty="0">
                 <a:solidFill>
-                  <a:srgbClr val="C9A961"/>
-                </a:solidFill>
-                <a:latin typeface="Bookman Old Style" pitchFamily="34" charset="0"/>
-                <a:ea typeface="Bookman Old Style" pitchFamily="34" charset="-122"/>
-                <a:cs typeface="Bookman Old Style" pitchFamily="34" charset="-120"/>
+                  <a:srgbClr val="B1937E"/>
+                </a:solidFill>
+                <a:latin typeface="Georgia" pitchFamily="34" charset="0"/>
+                <a:ea typeface="Georgia" pitchFamily="34" charset="-122"/>
+                <a:cs typeface="Georgia" pitchFamily="34" charset="-120"/>
               </a:rPr>
               <a:t>Tipo de serviço</a:t>
             </a:r>
@@ -12885,7 +12989,7 @@
             <a:r>
               <a:rPr lang="en-US" sz="1350" dirty="0">
                 <a:solidFill>
-                  <a:srgbClr val="9FB2C9"/>
+                  <a:srgbClr val="8A7E72"/>
                 </a:solidFill>
                 <a:latin typeface="Calibri" pitchFamily="34" charset="0"/>
                 <a:ea typeface="Calibri" pitchFamily="34" charset="-122"/>
@@ -12914,13 +13018,18 @@
             </a:avLst>
           </a:prstGeom>
           <a:solidFill>
-            <a:srgbClr val="13283F"/>
+            <a:srgbClr val="FFFFFF"/>
           </a:solidFill>
-          <a:ln/>
+          <a:ln w="12700">
+            <a:solidFill>
+              <a:srgbClr val="E3D9CC"/>
+            </a:solidFill>
+            <a:prstDash val="solid"/>
+          </a:ln>
           <a:effectLst>
-            <a:outerShdw sx="100000" sy="100000" kx="0" ky="0" algn="bl" rotWithShape="0" blurRad="127000" dist="38100" dir="5400000">
-              <a:srgbClr val="000000">
-                <a:alpha val="28000"/>
+            <a:outerShdw sx="100000" sy="100000" kx="0" ky="0" algn="bl" rotWithShape="0" blurRad="114300" dist="38100" dir="5400000">
+              <a:srgbClr val="7A6A55">
+                <a:alpha val="12000"/>
               </a:srgbClr>
             </a:outerShdw>
           </a:effectLst>
@@ -12941,9 +13050,14 @@
             <a:avLst/>
           </a:prstGeom>
           <a:solidFill>
-            <a:srgbClr val="16314F"/>
+            <a:srgbClr val="EADFD0"/>
           </a:solidFill>
-          <a:ln/>
+          <a:ln w="9525">
+            <a:solidFill>
+              <a:srgbClr val="E3D9CC"/>
+            </a:solidFill>
+            <a:prstDash val="solid"/>
+          </a:ln>
         </p:spPr>
       </p:sp>
       <p:pic>
@@ -12997,11 +13111,11 @@
             <a:r>
               <a:rPr lang="en-US" sz="1800" b="1" dirty="0">
                 <a:solidFill>
-                  <a:srgbClr val="C9A961"/>
-                </a:solidFill>
-                <a:latin typeface="Bookman Old Style" pitchFamily="34" charset="0"/>
-                <a:ea typeface="Bookman Old Style" pitchFamily="34" charset="-122"/>
-                <a:cs typeface="Bookman Old Style" pitchFamily="34" charset="-120"/>
+                  <a:srgbClr val="B1937E"/>
+                </a:solidFill>
+                <a:latin typeface="Georgia" pitchFamily="34" charset="0"/>
+                <a:ea typeface="Georgia" pitchFamily="34" charset="-122"/>
+                <a:cs typeface="Georgia" pitchFamily="34" charset="-120"/>
               </a:rPr>
               <a:t>Como te conheceu</a:t>
             </a:r>
@@ -13036,7 +13150,7 @@
             <a:r>
               <a:rPr lang="en-US" sz="1350" dirty="0">
                 <a:solidFill>
-                  <a:srgbClr val="9FB2C9"/>
+                  <a:srgbClr val="8A7E72"/>
                 </a:solidFill>
                 <a:latin typeface="Calibri" pitchFamily="34" charset="0"/>
                 <a:ea typeface="Calibri" pitchFamily="34" charset="-122"/>
@@ -13065,13 +13179,18 @@
             </a:avLst>
           </a:prstGeom>
           <a:solidFill>
-            <a:srgbClr val="13283F"/>
+            <a:srgbClr val="FFFFFF"/>
           </a:solidFill>
-          <a:ln/>
+          <a:ln w="12700">
+            <a:solidFill>
+              <a:srgbClr val="E3D9CC"/>
+            </a:solidFill>
+            <a:prstDash val="solid"/>
+          </a:ln>
           <a:effectLst>
-            <a:outerShdw sx="100000" sy="100000" kx="0" ky="0" algn="bl" rotWithShape="0" blurRad="127000" dist="38100" dir="5400000">
-              <a:srgbClr val="000000">
-                <a:alpha val="28000"/>
+            <a:outerShdw sx="100000" sy="100000" kx="0" ky="0" algn="bl" rotWithShape="0" blurRad="114300" dist="38100" dir="5400000">
+              <a:srgbClr val="7A6A55">
+                <a:alpha val="12000"/>
               </a:srgbClr>
             </a:outerShdw>
           </a:effectLst>
@@ -13092,9 +13211,14 @@
             <a:avLst/>
           </a:prstGeom>
           <a:solidFill>
-            <a:srgbClr val="16314F"/>
+            <a:srgbClr val="EADFD0"/>
           </a:solidFill>
-          <a:ln/>
+          <a:ln w="9525">
+            <a:solidFill>
+              <a:srgbClr val="E3D9CC"/>
+            </a:solidFill>
+            <a:prstDash val="solid"/>
+          </a:ln>
         </p:spPr>
       </p:sp>
       <p:pic>
@@ -13148,11 +13272,11 @@
             <a:r>
               <a:rPr lang="en-US" sz="1800" b="1" dirty="0">
                 <a:solidFill>
-                  <a:srgbClr val="C9A961"/>
-                </a:solidFill>
-                <a:latin typeface="Bookman Old Style" pitchFamily="34" charset="0"/>
-                <a:ea typeface="Bookman Old Style" pitchFamily="34" charset="-122"/>
-                <a:cs typeface="Bookman Old Style" pitchFamily="34" charset="-120"/>
+                  <a:srgbClr val="B1937E"/>
+                </a:solidFill>
+                <a:latin typeface="Georgia" pitchFamily="34" charset="0"/>
+                <a:ea typeface="Georgia" pitchFamily="34" charset="-122"/>
+                <a:cs typeface="Georgia" pitchFamily="34" charset="-120"/>
               </a:rPr>
               <a:t>O que procuram</a:t>
             </a:r>
@@ -13187,7 +13311,7 @@
             <a:r>
               <a:rPr lang="en-US" sz="1350" dirty="0">
                 <a:solidFill>
-                  <a:srgbClr val="9FB2C9"/>
+                  <a:srgbClr val="8A7E72"/>
                 </a:solidFill>
                 <a:latin typeface="Calibri" pitchFamily="34" charset="0"/>
                 <a:ea typeface="Calibri" pitchFamily="34" charset="-122"/>
@@ -13216,7 +13340,7 @@
           <a:noFill/>
           <a:ln w="9525">
             <a:solidFill>
-              <a:srgbClr val="5C708A">
+              <a:srgbClr val="A89A86">
                 <a:alpha val="60000"/>
               </a:srgbClr>
             </a:solidFill>
@@ -13251,7 +13375,7 @@
             <a:r>
               <a:rPr lang="en-US" sz="900" dirty="0">
                 <a:solidFill>
-                  <a:srgbClr val="5C708A"/>
+                  <a:srgbClr val="A89A86"/>
                 </a:solidFill>
                 <a:latin typeface="Calibri" pitchFamily="34" charset="0"/>
                 <a:ea typeface="Calibri" pitchFamily="34" charset="-122"/>
@@ -13290,7 +13414,7 @@
             <a:r>
               <a:rPr lang="en-US" sz="900" dirty="0">
                 <a:solidFill>
-                  <a:srgbClr val="5C708A"/>
+                  <a:srgbClr val="A89A86"/>
                 </a:solidFill>
                 <a:latin typeface="Calibri" pitchFamily="34" charset="0"/>
                 <a:ea typeface="Calibri" pitchFamily="34" charset="-122"/>
@@ -13316,7 +13440,7 @@
     <p:bg>
       <p:bgPr>
         <a:solidFill>
-          <a:srgbClr val="102844"/>
+          <a:srgbClr val="EFE7DE"/>
         </a:solidFill>
       </p:bgPr>
     </p:bg>
@@ -13361,7 +13485,7 @@
             <a:r>
               <a:rPr lang="en-US" sz="1200" b="1" spc="300" kern="0" dirty="0">
                 <a:solidFill>
-                  <a:srgbClr val="C9A961"/>
+                  <a:srgbClr val="B1937E"/>
                 </a:solidFill>
                 <a:latin typeface="Calibri" pitchFamily="34" charset="0"/>
                 <a:ea typeface="Calibri" pitchFamily="34" charset="-122"/>
@@ -13403,11 +13527,11 @@
             <a:r>
               <a:rPr lang="en-US" sz="3400" b="1" dirty="0">
                 <a:solidFill>
-                  <a:srgbClr val="EAF1FA"/>
-                </a:solidFill>
-                <a:latin typeface="Bookman Old Style" pitchFamily="34" charset="0"/>
-                <a:ea typeface="Bookman Old Style" pitchFamily="34" charset="-122"/>
-                <a:cs typeface="Bookman Old Style" pitchFamily="34" charset="-120"/>
+                  <a:srgbClr val="33302B"/>
+                </a:solidFill>
+                <a:latin typeface="Georgia" pitchFamily="34" charset="0"/>
+                <a:ea typeface="Georgia" pitchFamily="34" charset="-122"/>
+                <a:cs typeface="Georgia" pitchFamily="34" charset="-120"/>
               </a:rPr>
               <a:t>A resposta que aquece</a:t>
             </a:r>
@@ -13432,20 +13556,20 @@
             </a:avLst>
           </a:prstGeom>
           <a:solidFill>
-            <a:srgbClr val="13283F"/>
+            <a:srgbClr val="FFFFFF"/>
           </a:solidFill>
           <a:ln w="9525">
             <a:solidFill>
-              <a:srgbClr val="9FB2C9">
+              <a:srgbClr val="8A7E72">
                 <a:alpha val="50000"/>
               </a:srgbClr>
             </a:solidFill>
             <a:prstDash val="solid"/>
           </a:ln>
           <a:effectLst>
-            <a:outerShdw sx="100000" sy="100000" kx="0" ky="0" algn="bl" rotWithShape="0" blurRad="127000" dist="38100" dir="5400000">
-              <a:srgbClr val="000000">
-                <a:alpha val="28000"/>
+            <a:outerShdw sx="100000" sy="100000" kx="0" ky="0" algn="bl" rotWithShape="0" blurRad="114300" dist="38100" dir="5400000">
+              <a:srgbClr val="7A6A55">
+                <a:alpha val="12000"/>
               </a:srgbClr>
             </a:outerShdw>
           </a:effectLst>
@@ -13478,7 +13602,7 @@
             <a:r>
               <a:rPr lang="en-US" sz="1300" b="1" spc="300" kern="0" dirty="0">
                 <a:solidFill>
-                  <a:srgbClr val="9FB2C9"/>
+                  <a:srgbClr val="8A7E72"/>
                 </a:solidFill>
                 <a:latin typeface="Calibri" pitchFamily="34" charset="0"/>
                 <a:ea typeface="Calibri" pitchFamily="34" charset="-122"/>
@@ -13520,7 +13644,7 @@
             <a:r>
               <a:rPr lang="en-US" sz="1600" b="1" i="1" dirty="0">
                 <a:solidFill>
-                  <a:srgbClr val="9FB2C9"/>
+                  <a:srgbClr val="8A7E72"/>
                 </a:solidFill>
                 <a:latin typeface="Calibri" pitchFamily="34" charset="0"/>
                 <a:ea typeface="Calibri" pitchFamily="34" charset="-122"/>
@@ -13540,7 +13664,7 @@
             <a:r>
               <a:rPr lang="en-US" sz="1500" dirty="0">
                 <a:solidFill>
-                  <a:srgbClr val="9FB2C9"/>
+                  <a:srgbClr val="8A7E72"/>
                 </a:solidFill>
                 <a:latin typeface="Calibri" pitchFamily="34" charset="0"/>
                 <a:ea typeface="Calibri" pitchFamily="34" charset="-122"/>
@@ -13560,7 +13684,7 @@
             <a:r>
               <a:rPr lang="en-US" sz="1500" dirty="0">
                 <a:solidFill>
-                  <a:srgbClr val="9FB2C9"/>
+                  <a:srgbClr val="8A7E72"/>
                 </a:solidFill>
                 <a:latin typeface="Calibri" pitchFamily="34" charset="0"/>
                 <a:ea typeface="Calibri" pitchFamily="34" charset="-122"/>
@@ -13577,7 +13701,7 @@
             <a:r>
               <a:rPr lang="en-US" sz="1400" i="1" dirty="0">
                 <a:solidFill>
-                  <a:srgbClr val="9FB2C9"/>
+                  <a:srgbClr val="8A7E72"/>
                 </a:solidFill>
                 <a:latin typeface="Calibri" pitchFamily="34" charset="0"/>
                 <a:ea typeface="Calibri" pitchFamily="34" charset="-122"/>
@@ -13606,18 +13730,18 @@
             </a:avLst>
           </a:prstGeom>
           <a:solidFill>
-            <a:srgbClr val="16314F"/>
+            <a:srgbClr val="EADFD0"/>
           </a:solidFill>
           <a:ln w="19050">
             <a:solidFill>
-              <a:srgbClr val="C9A961"/>
+              <a:srgbClr val="B1937E"/>
             </a:solidFill>
             <a:prstDash val="solid"/>
           </a:ln>
           <a:effectLst>
-            <a:outerShdw sx="100000" sy="100000" kx="0" ky="0" algn="bl" rotWithShape="0" blurRad="127000" dist="38100" dir="5400000">
-              <a:srgbClr val="000000">
-                <a:alpha val="28000"/>
+            <a:outerShdw sx="100000" sy="100000" kx="0" ky="0" algn="bl" rotWithShape="0" blurRad="114300" dist="38100" dir="5400000">
+              <a:srgbClr val="7A6A55">
+                <a:alpha val="12000"/>
               </a:srgbClr>
             </a:outerShdw>
           </a:effectLst>
@@ -13650,7 +13774,7 @@
             <a:r>
               <a:rPr lang="en-US" sz="1300" b="1" spc="300" kern="0" dirty="0">
                 <a:solidFill>
-                  <a:srgbClr val="C9A961"/>
+                  <a:srgbClr val="B1937E"/>
                 </a:solidFill>
                 <a:latin typeface="Calibri" pitchFamily="34" charset="0"/>
                 <a:ea typeface="Calibri" pitchFamily="34" charset="-122"/>
@@ -13692,7 +13816,7 @@
             <a:r>
               <a:rPr lang="en-US" sz="1600" b="1" dirty="0">
                 <a:solidFill>
-                  <a:srgbClr val="EAF1FA"/>
+                  <a:srgbClr val="33302B"/>
                 </a:solidFill>
                 <a:latin typeface="Calibri" pitchFamily="34" charset="0"/>
                 <a:ea typeface="Calibri" pitchFamily="34" charset="-122"/>
@@ -13712,7 +13836,7 @@
             <a:r>
               <a:rPr lang="en-US" sz="1500" dirty="0">
                 <a:solidFill>
-                  <a:srgbClr val="EAF1FA"/>
+                  <a:srgbClr val="33302B"/>
                 </a:solidFill>
                 <a:latin typeface="Calibri" pitchFamily="34" charset="0"/>
                 <a:ea typeface="Calibri" pitchFamily="34" charset="-122"/>
@@ -13732,7 +13856,7 @@
             <a:r>
               <a:rPr lang="en-US" sz="1500" dirty="0">
                 <a:solidFill>
-                  <a:srgbClr val="EAF1FA"/>
+                  <a:srgbClr val="33302B"/>
                 </a:solidFill>
                 <a:latin typeface="Calibri" pitchFamily="34" charset="0"/>
                 <a:ea typeface="Calibri" pitchFamily="34" charset="-122"/>
@@ -13749,7 +13873,7 @@
             <a:r>
               <a:rPr lang="en-US" sz="1400" i="1" dirty="0">
                 <a:solidFill>
-                  <a:srgbClr val="C9A961"/>
+                  <a:srgbClr val="B1937E"/>
                 </a:solidFill>
                 <a:latin typeface="Calibri" pitchFamily="34" charset="0"/>
                 <a:ea typeface="Calibri" pitchFamily="34" charset="-122"/>
@@ -13778,7 +13902,7 @@
           <a:noFill/>
           <a:ln w="9525">
             <a:solidFill>
-              <a:srgbClr val="5C708A">
+              <a:srgbClr val="A89A86">
                 <a:alpha val="60000"/>
               </a:srgbClr>
             </a:solidFill>
@@ -13813,7 +13937,7 @@
             <a:r>
               <a:rPr lang="en-US" sz="900" dirty="0">
                 <a:solidFill>
-                  <a:srgbClr val="5C708A"/>
+                  <a:srgbClr val="A89A86"/>
                 </a:solidFill>
                 <a:latin typeface="Calibri" pitchFamily="34" charset="0"/>
                 <a:ea typeface="Calibri" pitchFamily="34" charset="-122"/>
@@ -13852,7 +13976,7 @@
             <a:r>
               <a:rPr lang="en-US" sz="900" dirty="0">
                 <a:solidFill>
-                  <a:srgbClr val="5C708A"/>
+                  <a:srgbClr val="A89A86"/>
                 </a:solidFill>
                 <a:latin typeface="Calibri" pitchFamily="34" charset="0"/>
                 <a:ea typeface="Calibri" pitchFamily="34" charset="-122"/>
@@ -13878,7 +14002,7 @@
     <p:bg>
       <p:bgPr>
         <a:solidFill>
-          <a:srgbClr val="0B1D33"/>
+          <a:srgbClr val="F8F6F3"/>
         </a:solidFill>
       </p:bgPr>
     </p:bg>
@@ -13898,51 +14022,7 @@
       </p:grpSpPr>
       <p:sp>
         <p:nvSpPr>
-          <p:cNvPr id="2" name="Shape 0"/>
-          <p:cNvSpPr/>
-          <p:nvPr/>
-        </p:nvSpPr>
-        <p:spPr>
-          <a:xfrm>
-            <a:off x="8229600" y="-1463040"/>
-            <a:ext cx="5486400" cy="5486400"/>
-          </a:xfrm>
-          <a:prstGeom prst="ellipse">
-            <a:avLst/>
-          </a:prstGeom>
-          <a:solidFill>
-            <a:srgbClr val="4A9EFF">
-              <a:alpha val="10000"/>
-            </a:srgbClr>
-          </a:solidFill>
-          <a:ln/>
-        </p:spPr>
-      </p:sp>
-      <p:sp>
-        <p:nvSpPr>
-          <p:cNvPr id="3" name="Shape 1"/>
-          <p:cNvSpPr/>
-          <p:nvPr/>
-        </p:nvSpPr>
-        <p:spPr>
-          <a:xfrm>
-            <a:off x="-1463040" y="4206240"/>
-            <a:ext cx="4572000" cy="4572000"/>
-          </a:xfrm>
-          <a:prstGeom prst="ellipse">
-            <a:avLst/>
-          </a:prstGeom>
-          <a:solidFill>
-            <a:srgbClr val="C9A961">
-              <a:alpha val="8000"/>
-            </a:srgbClr>
-          </a:solidFill>
-          <a:ln/>
-        </p:spPr>
-      </p:sp>
-      <p:sp>
-        <p:nvSpPr>
-          <p:cNvPr id="4" name="Text 2"/>
+          <p:cNvPr id="2" name="Text 0"/>
           <p:cNvSpPr/>
           <p:nvPr/>
         </p:nvSpPr>
@@ -13967,7 +14047,7 @@
             <a:r>
               <a:rPr lang="en-US" sz="1200" b="1" spc="300" kern="0" dirty="0">
                 <a:solidFill>
-                  <a:srgbClr val="4A9EFF"/>
+                  <a:srgbClr val="9A7B66"/>
                 </a:solidFill>
                 <a:latin typeface="Calibri" pitchFamily="34" charset="0"/>
                 <a:ea typeface="Calibri" pitchFamily="34" charset="-122"/>
@@ -13981,7 +14061,7 @@
       </p:sp>
       <p:sp>
         <p:nvSpPr>
-          <p:cNvPr id="5" name="Shape 3"/>
+          <p:cNvPr id="3" name="Shape 1"/>
           <p:cNvSpPr/>
           <p:nvPr/>
         </p:nvSpPr>
@@ -13994,14 +14074,19 @@
             <a:avLst/>
           </a:prstGeom>
           <a:solidFill>
-            <a:srgbClr val="16314F"/>
+            <a:srgbClr val="EADFD0"/>
           </a:solidFill>
-          <a:ln/>
+          <a:ln w="9525">
+            <a:solidFill>
+              <a:srgbClr val="E3D9CC"/>
+            </a:solidFill>
+            <a:prstDash val="solid"/>
+          </a:ln>
         </p:spPr>
       </p:sp>
       <p:pic>
         <p:nvPicPr>
-          <p:cNvPr id="6" name="Image 0" descr="preencoded.png">    </p:cNvPr>
+          <p:cNvPr id="4" name="Image 0" descr="preencoded.png">    </p:cNvPr>
           <p:cNvPicPr>
             <a:picLocks noChangeAspect="1"/>
           </p:cNvPicPr>
@@ -14025,7 +14110,7 @@
       </p:pic>
       <p:sp>
         <p:nvSpPr>
-          <p:cNvPr id="7" name="Text 4"/>
+          <p:cNvPr id="5" name="Text 2"/>
           <p:cNvSpPr/>
           <p:nvPr/>
         </p:nvSpPr>
@@ -14053,11 +14138,11 @@
             <a:r>
               <a:rPr lang="en-US" sz="3200" b="1" i="1" dirty="0">
                 <a:solidFill>
-                  <a:srgbClr val="EAF1FA"/>
-                </a:solidFill>
-                <a:latin typeface="Bookman Old Style" pitchFamily="34" charset="0"/>
-                <a:ea typeface="Bookman Old Style" pitchFamily="34" charset="-122"/>
-                <a:cs typeface="Bookman Old Style" pitchFamily="34" charset="-120"/>
+                  <a:srgbClr val="33302B"/>
+                </a:solidFill>
+                <a:latin typeface="Georgia" pitchFamily="34" charset="0"/>
+                <a:ea typeface="Georgia" pitchFamily="34" charset="-122"/>
+                <a:cs typeface="Georgia" pitchFamily="34" charset="-120"/>
               </a:rPr>
               <a:t>Nunca envies preço sem antes criares valor.</a:t>
             </a:r>
@@ -14067,7 +14152,7 @@
       </p:sp>
       <p:sp>
         <p:nvSpPr>
-          <p:cNvPr id="8" name="Text 5"/>
+          <p:cNvPr id="6" name="Text 3"/>
           <p:cNvSpPr/>
           <p:nvPr/>
         </p:nvSpPr>
@@ -14092,7 +14177,7 @@
             <a:r>
               <a:rPr lang="en-US" sz="1600" dirty="0">
                 <a:solidFill>
-                  <a:srgbClr val="9FB2C9"/>
+                  <a:srgbClr val="8A7E72"/>
                 </a:solidFill>
                 <a:latin typeface="Calibri" pitchFamily="34" charset="0"/>
                 <a:ea typeface="Calibri" pitchFamily="34" charset="-122"/>
@@ -14106,7 +14191,7 @@
       </p:sp>
       <p:sp>
         <p:nvSpPr>
-          <p:cNvPr id="9" name="Shape 6"/>
+          <p:cNvPr id="7" name="Shape 4"/>
           <p:cNvSpPr/>
           <p:nvPr/>
         </p:nvSpPr>
@@ -14121,7 +14206,7 @@
           <a:noFill/>
           <a:ln w="9525">
             <a:solidFill>
-              <a:srgbClr val="5C708A">
+              <a:srgbClr val="A89A86">
                 <a:alpha val="60000"/>
               </a:srgbClr>
             </a:solidFill>
@@ -14131,7 +14216,7 @@
       </p:sp>
       <p:sp>
         <p:nvSpPr>
-          <p:cNvPr id="10" name="Text 7"/>
+          <p:cNvPr id="8" name="Text 5"/>
           <p:cNvSpPr/>
           <p:nvPr/>
         </p:nvSpPr>
@@ -14156,7 +14241,7 @@
             <a:r>
               <a:rPr lang="en-US" sz="900" dirty="0">
                 <a:solidFill>
-                  <a:srgbClr val="5C708A"/>
+                  <a:srgbClr val="A89A86"/>
                 </a:solidFill>
                 <a:latin typeface="Calibri" pitchFamily="34" charset="0"/>
                 <a:ea typeface="Calibri" pitchFamily="34" charset="-122"/>
@@ -14170,7 +14255,7 @@
       </p:sp>
       <p:sp>
         <p:nvSpPr>
-          <p:cNvPr id="11" name="Text 8"/>
+          <p:cNvPr id="9" name="Text 6"/>
           <p:cNvSpPr/>
           <p:nvPr/>
         </p:nvSpPr>
@@ -14195,7 +14280,7 @@
             <a:r>
               <a:rPr lang="en-US" sz="900" dirty="0">
                 <a:solidFill>
-                  <a:srgbClr val="5C708A"/>
+                  <a:srgbClr val="A89A86"/>
                 </a:solidFill>
                 <a:latin typeface="Calibri" pitchFamily="34" charset="0"/>
                 <a:ea typeface="Calibri" pitchFamily="34" charset="-122"/>
@@ -14221,7 +14306,7 @@
     <p:bg>
       <p:bgPr>
         <a:solidFill>
-          <a:srgbClr val="0B1D33"/>
+          <a:srgbClr val="F8F6F3"/>
         </a:solidFill>
       </p:bgPr>
     </p:bg>
@@ -14241,51 +14326,7 @@
       </p:grpSpPr>
       <p:sp>
         <p:nvSpPr>
-          <p:cNvPr id="2" name="Shape 0"/>
-          <p:cNvSpPr/>
-          <p:nvPr/>
-        </p:nvSpPr>
-        <p:spPr>
-          <a:xfrm>
-            <a:off x="7772400" y="-1371600"/>
-            <a:ext cx="5486400" cy="5486400"/>
-          </a:xfrm>
-          <a:prstGeom prst="ellipse">
-            <a:avLst/>
-          </a:prstGeom>
-          <a:solidFill>
-            <a:srgbClr val="4A9EFF">
-              <a:alpha val="10000"/>
-            </a:srgbClr>
-          </a:solidFill>
-          <a:ln/>
-        </p:spPr>
-      </p:sp>
-      <p:sp>
-        <p:nvSpPr>
-          <p:cNvPr id="3" name="Shape 1"/>
-          <p:cNvSpPr/>
-          <p:nvPr/>
-        </p:nvSpPr>
-        <p:spPr>
-          <a:xfrm>
-            <a:off x="-1371600" y="4114800"/>
-            <a:ext cx="4572000" cy="4572000"/>
-          </a:xfrm>
-          <a:prstGeom prst="ellipse">
-            <a:avLst/>
-          </a:prstGeom>
-          <a:solidFill>
-            <a:srgbClr val="C9A961">
-              <a:alpha val="8000"/>
-            </a:srgbClr>
-          </a:solidFill>
-          <a:ln/>
-        </p:spPr>
-      </p:sp>
-      <p:sp>
-        <p:nvSpPr>
-          <p:cNvPr id="4" name="Text 2"/>
+          <p:cNvPr id="2" name="Text 0"/>
           <p:cNvSpPr/>
           <p:nvPr/>
         </p:nvSpPr>
@@ -14310,11 +14351,11 @@
             <a:r>
               <a:rPr lang="en-US" sz="15000" b="1" dirty="0">
                 <a:solidFill>
-                  <a:srgbClr val="16314F"/>
-                </a:solidFill>
-                <a:latin typeface="Bookman Old Style" pitchFamily="34" charset="0"/>
-                <a:ea typeface="Bookman Old Style" pitchFamily="34" charset="-122"/>
-                <a:cs typeface="Bookman Old Style" pitchFamily="34" charset="-120"/>
+                  <a:srgbClr val="EADFD0"/>
+                </a:solidFill>
+                <a:latin typeface="Georgia" pitchFamily="34" charset="0"/>
+                <a:ea typeface="Georgia" pitchFamily="34" charset="-122"/>
+                <a:cs typeface="Georgia" pitchFamily="34" charset="-120"/>
               </a:rPr>
               <a:t>B</a:t>
             </a:r>
@@ -14324,7 +14365,7 @@
       </p:sp>
       <p:sp>
         <p:nvSpPr>
-          <p:cNvPr id="5" name="Text 3"/>
+          <p:cNvPr id="3" name="Text 1"/>
           <p:cNvSpPr/>
           <p:nvPr/>
         </p:nvSpPr>
@@ -14349,7 +14390,7 @@
             <a:r>
               <a:rPr lang="en-US" sz="1300" b="1" spc="400" kern="0" dirty="0">
                 <a:solidFill>
-                  <a:srgbClr val="C9A961"/>
+                  <a:srgbClr val="B1937E"/>
                 </a:solidFill>
                 <a:latin typeface="Calibri" pitchFamily="34" charset="0"/>
                 <a:ea typeface="Calibri" pitchFamily="34" charset="-122"/>
@@ -14363,7 +14404,7 @@
       </p:sp>
       <p:sp>
         <p:nvSpPr>
-          <p:cNvPr id="6" name="Text 4"/>
+          <p:cNvPr id="4" name="Text 2"/>
           <p:cNvSpPr/>
           <p:nvPr/>
         </p:nvSpPr>
@@ -14389,23 +14430,23 @@
               <a:buNone/>
             </a:pPr>
             <a:r>
-              <a:rPr lang="en-US" sz="4400" b="1" dirty="0">
-                <a:solidFill>
-                  <a:srgbClr val="EAF1FA"/>
-                </a:solidFill>
-                <a:latin typeface="Bookman Old Style" pitchFamily="34" charset="0"/>
-                <a:ea typeface="Bookman Old Style" pitchFamily="34" charset="-122"/>
-                <a:cs typeface="Bookman Old Style" pitchFamily="34" charset="-120"/>
+              <a:rPr lang="en-US" sz="4000" b="1" dirty="0">
+                <a:solidFill>
+                  <a:srgbClr val="33302B"/>
+                </a:solidFill>
+                <a:latin typeface="Georgia" pitchFamily="34" charset="0"/>
+                <a:ea typeface="Georgia" pitchFamily="34" charset="-122"/>
+                <a:cs typeface="Georgia" pitchFamily="34" charset="-120"/>
               </a:rPr>
               <a:t>Qualificar &amp; Não Largar</a:t>
             </a:r>
-            <a:endParaRPr lang="en-US" sz="4400" dirty="0"/>
-          </a:p>
-        </p:txBody>
-      </p:sp>
-      <p:sp>
-        <p:nvSpPr>
-          <p:cNvPr id="7" name="Text 5"/>
+            <a:endParaRPr lang="en-US" sz="4000" dirty="0"/>
+          </a:p>
+        </p:txBody>
+      </p:sp>
+      <p:sp>
+        <p:nvSpPr>
+          <p:cNvPr id="5" name="Text 3"/>
           <p:cNvSpPr/>
           <p:nvPr/>
         </p:nvSpPr>
@@ -14430,7 +14471,7 @@
             <a:r>
               <a:rPr lang="en-US" sz="1600" dirty="0">
                 <a:solidFill>
-                  <a:srgbClr val="9FB2C9"/>
+                  <a:srgbClr val="8A7E72"/>
                 </a:solidFill>
                 <a:latin typeface="Calibri" pitchFamily="34" charset="0"/>
                 <a:ea typeface="Calibri" pitchFamily="34" charset="-122"/>
@@ -14444,7 +14485,7 @@
       </p:sp>
       <p:sp>
         <p:nvSpPr>
-          <p:cNvPr id="8" name="Shape 6"/>
+          <p:cNvPr id="6" name="Shape 4"/>
           <p:cNvSpPr/>
           <p:nvPr/>
         </p:nvSpPr>
@@ -14459,7 +14500,7 @@
           <a:noFill/>
           <a:ln w="9525">
             <a:solidFill>
-              <a:srgbClr val="5C708A">
+              <a:srgbClr val="A89A86">
                 <a:alpha val="60000"/>
               </a:srgbClr>
             </a:solidFill>
@@ -14469,7 +14510,7 @@
       </p:sp>
       <p:sp>
         <p:nvSpPr>
-          <p:cNvPr id="9" name="Text 7"/>
+          <p:cNvPr id="7" name="Text 5"/>
           <p:cNvSpPr/>
           <p:nvPr/>
         </p:nvSpPr>
@@ -14494,7 +14535,7 @@
             <a:r>
               <a:rPr lang="en-US" sz="900" dirty="0">
                 <a:solidFill>
-                  <a:srgbClr val="5C708A"/>
+                  <a:srgbClr val="A89A86"/>
                 </a:solidFill>
                 <a:latin typeface="Calibri" pitchFamily="34" charset="0"/>
                 <a:ea typeface="Calibri" pitchFamily="34" charset="-122"/>
@@ -14508,7 +14549,7 @@
       </p:sp>
       <p:sp>
         <p:nvSpPr>
-          <p:cNvPr id="10" name="Text 8"/>
+          <p:cNvPr id="8" name="Text 6"/>
           <p:cNvSpPr/>
           <p:nvPr/>
         </p:nvSpPr>
@@ -14533,7 +14574,7 @@
             <a:r>
               <a:rPr lang="en-US" sz="900" dirty="0">
                 <a:solidFill>
-                  <a:srgbClr val="5C708A"/>
+                  <a:srgbClr val="A89A86"/>
                 </a:solidFill>
                 <a:latin typeface="Calibri" pitchFamily="34" charset="0"/>
                 <a:ea typeface="Calibri" pitchFamily="34" charset="-122"/>
